--- a/SupplementaryMaterial/ConditionalProbability_WhenOneThingDependsOnAother.pptx
+++ b/SupplementaryMaterial/ConditionalProbability_WhenOneThingDependsOnAother.pptx
@@ -5,7 +5,7 @@
     <p:sldMasterId id="2147483648" r:id="rId1"/>
   </p:sldMasterIdLst>
   <p:notesMasterIdLst>
-    <p:notesMasterId r:id="rId54"/>
+    <p:notesMasterId r:id="rId58"/>
   </p:notesMasterIdLst>
   <p:sldIdLst>
     <p:sldId id="299" r:id="rId2"/>
@@ -58,8 +58,12 @@
     <p:sldId id="345" r:id="rId49"/>
     <p:sldId id="344" r:id="rId50"/>
     <p:sldId id="346" r:id="rId51"/>
-    <p:sldId id="281" r:id="rId52"/>
-    <p:sldId id="282" r:id="rId53"/>
+    <p:sldId id="355" r:id="rId52"/>
+    <p:sldId id="358" r:id="rId53"/>
+    <p:sldId id="359" r:id="rId54"/>
+    <p:sldId id="356" r:id="rId55"/>
+    <p:sldId id="281" r:id="rId56"/>
+    <p:sldId id="282" r:id="rId57"/>
   </p:sldIdLst>
   <p:sldSz cx="9144000" cy="5143500" type="screen16x9"/>
   <p:notesSz cx="6858000" cy="9144000"/>
@@ -259,7 +263,7 @@
           <a:p>
             <a:fld id="{4A4A0935-8C25-438A-84D4-96B1DB833474}" type="datetimeFigureOut">
               <a:rPr lang="en-US" smtClean="0"/>
-              <a:t>2/25/2026</a:t>
+              <a:t>3/4/2026</a:t>
             </a:fld>
             <a:endParaRPr lang="en-US"/>
           </a:p>
@@ -789,7 +793,7 @@
           <a:p>
             <a:fld id="{241EB5C9-1307-BA42-ABA2-0BC069CD8E7F}" type="datetimeFigureOut">
               <a:rPr lang="en-US" smtClean="0"/>
-              <a:t>2/25/2026</a:t>
+              <a:t>3/4/2026</a:t>
             </a:fld>
             <a:endParaRPr lang="en-US"/>
           </a:p>
@@ -957,7 +961,7 @@
           <a:p>
             <a:fld id="{241EB5C9-1307-BA42-ABA2-0BC069CD8E7F}" type="datetimeFigureOut">
               <a:rPr lang="en-US" smtClean="0"/>
-              <a:t>2/25/2026</a:t>
+              <a:t>3/4/2026</a:t>
             </a:fld>
             <a:endParaRPr lang="en-US"/>
           </a:p>
@@ -1135,7 +1139,7 @@
           <a:p>
             <a:fld id="{241EB5C9-1307-BA42-ABA2-0BC069CD8E7F}" type="datetimeFigureOut">
               <a:rPr lang="en-US" smtClean="0"/>
-              <a:t>2/25/2026</a:t>
+              <a:t>3/4/2026</a:t>
             </a:fld>
             <a:endParaRPr lang="en-US"/>
           </a:p>
@@ -1303,7 +1307,7 @@
           <a:p>
             <a:fld id="{241EB5C9-1307-BA42-ABA2-0BC069CD8E7F}" type="datetimeFigureOut">
               <a:rPr lang="en-US" smtClean="0"/>
-              <a:t>2/25/2026</a:t>
+              <a:t>3/4/2026</a:t>
             </a:fld>
             <a:endParaRPr lang="en-US"/>
           </a:p>
@@ -1548,7 +1552,7 @@
           <a:p>
             <a:fld id="{241EB5C9-1307-BA42-ABA2-0BC069CD8E7F}" type="datetimeFigureOut">
               <a:rPr lang="en-US" smtClean="0"/>
-              <a:t>2/25/2026</a:t>
+              <a:t>3/4/2026</a:t>
             </a:fld>
             <a:endParaRPr lang="en-US"/>
           </a:p>
@@ -1833,7 +1837,7 @@
           <a:p>
             <a:fld id="{241EB5C9-1307-BA42-ABA2-0BC069CD8E7F}" type="datetimeFigureOut">
               <a:rPr lang="en-US" smtClean="0"/>
-              <a:t>2/25/2026</a:t>
+              <a:t>3/4/2026</a:t>
             </a:fld>
             <a:endParaRPr lang="en-US"/>
           </a:p>
@@ -2252,7 +2256,7 @@
           <a:p>
             <a:fld id="{241EB5C9-1307-BA42-ABA2-0BC069CD8E7F}" type="datetimeFigureOut">
               <a:rPr lang="en-US" smtClean="0"/>
-              <a:t>2/25/2026</a:t>
+              <a:t>3/4/2026</a:t>
             </a:fld>
             <a:endParaRPr lang="en-US"/>
           </a:p>
@@ -2369,7 +2373,7 @@
           <a:p>
             <a:fld id="{241EB5C9-1307-BA42-ABA2-0BC069CD8E7F}" type="datetimeFigureOut">
               <a:rPr lang="en-US" smtClean="0"/>
-              <a:t>2/25/2026</a:t>
+              <a:t>3/4/2026</a:t>
             </a:fld>
             <a:endParaRPr lang="en-US"/>
           </a:p>
@@ -2464,7 +2468,7 @@
           <a:p>
             <a:fld id="{241EB5C9-1307-BA42-ABA2-0BC069CD8E7F}" type="datetimeFigureOut">
               <a:rPr lang="en-US" smtClean="0"/>
-              <a:t>2/25/2026</a:t>
+              <a:t>3/4/2026</a:t>
             </a:fld>
             <a:endParaRPr lang="en-US"/>
           </a:p>
@@ -2739,7 +2743,7 @@
           <a:p>
             <a:fld id="{241EB5C9-1307-BA42-ABA2-0BC069CD8E7F}" type="datetimeFigureOut">
               <a:rPr lang="en-US" smtClean="0"/>
-              <a:t>2/25/2026</a:t>
+              <a:t>3/4/2026</a:t>
             </a:fld>
             <a:endParaRPr lang="en-US"/>
           </a:p>
@@ -2991,7 +2995,7 @@
           <a:p>
             <a:fld id="{241EB5C9-1307-BA42-ABA2-0BC069CD8E7F}" type="datetimeFigureOut">
               <a:rPr lang="en-US" smtClean="0"/>
-              <a:t>2/25/2026</a:t>
+              <a:t>3/4/2026</a:t>
             </a:fld>
             <a:endParaRPr lang="en-US"/>
           </a:p>
@@ -3202,7 +3206,7 @@
           <a:p>
             <a:fld id="{241EB5C9-1307-BA42-ABA2-0BC069CD8E7F}" type="datetimeFigureOut">
               <a:rPr lang="en-US" smtClean="0"/>
-              <a:t>2/25/2026</a:t>
+              <a:t>3/4/2026</a:t>
             </a:fld>
             <a:endParaRPr lang="en-US"/>
           </a:p>
@@ -8361,8 +8365,8 @@
           </a:p>
         </p:txBody>
       </p:sp>
-      <mc:AlternateContent xmlns:mc="http://schemas.openxmlformats.org/markup-compatibility/2006">
-        <mc:Choice xmlns:a14="http://schemas.microsoft.com/office/drawing/2010/main" Requires="a14">
+      <mc:AlternateContent xmlns:mc="http://schemas.openxmlformats.org/markup-compatibility/2006" xmlns:a14="http://schemas.microsoft.com/office/drawing/2010/main">
+        <mc:Choice Requires="a14">
           <p:sp>
             <p:nvSpPr>
               <p:cNvPr id="3" name="Content Placeholder 2">
@@ -9629,7 +9633,7 @@
             </p:txBody>
           </p:sp>
         </mc:Choice>
-        <mc:Fallback>
+        <mc:Fallback xmlns="">
           <p:sp>
             <p:nvSpPr>
               <p:cNvPr id="3" name="Content Placeholder 2">
@@ -13267,8 +13271,8 @@
           <a:chExt cx="0" cy="0"/>
         </a:xfrm>
       </p:grpSpPr>
-      <mc:AlternateContent xmlns:mc="http://schemas.openxmlformats.org/markup-compatibility/2006">
-        <mc:Choice xmlns:a14="http://schemas.microsoft.com/office/drawing/2010/main" Requires="a14">
+      <mc:AlternateContent xmlns:mc="http://schemas.openxmlformats.org/markup-compatibility/2006" xmlns:a14="http://schemas.microsoft.com/office/drawing/2010/main">
+        <mc:Choice Requires="a14">
           <p:sp>
             <p:nvSpPr>
               <p:cNvPr id="3" name="Content Placeholder 2"/>
@@ -14572,7 +14576,7 @@
             </p:txBody>
           </p:sp>
         </mc:Choice>
-        <mc:Fallback>
+        <mc:Fallback xmlns="">
           <p:sp>
             <p:nvSpPr>
               <p:cNvPr id="3" name="Content Placeholder 2"/>
@@ -15415,8 +15419,8 @@
           <a:chExt cx="0" cy="0"/>
         </a:xfrm>
       </p:grpSpPr>
-      <mc:AlternateContent xmlns:mc="http://schemas.openxmlformats.org/markup-compatibility/2006">
-        <mc:Choice xmlns:a14="http://schemas.microsoft.com/office/drawing/2010/main" Requires="a14">
+      <mc:AlternateContent xmlns:mc="http://schemas.openxmlformats.org/markup-compatibility/2006" xmlns:a14="http://schemas.microsoft.com/office/drawing/2010/main">
+        <mc:Choice Requires="a14">
           <p:sp>
             <p:nvSpPr>
               <p:cNvPr id="3" name="Content Placeholder 2"/>
@@ -16016,7 +16020,7 @@
             </p:txBody>
           </p:sp>
         </mc:Choice>
-        <mc:Fallback>
+        <mc:Fallback xmlns="">
           <p:sp>
             <p:nvSpPr>
               <p:cNvPr id="3" name="Content Placeholder 2"/>
@@ -16643,6 +16647,47 @@
                             <m:t>𝐴</m:t>
                           </m:r>
                           <m:r>
+                            <a:rPr lang="en-US" b="0" i="0" smtClean="0">
+                              <a:latin typeface="Cambria Math" panose="02040503050406030204" pitchFamily="18" charset="0"/>
+                            </a:rPr>
+                            <m:t>,</m:t>
+                          </m:r>
+                          <m:r>
+                            <a:rPr lang="ar-AE">
+                              <a:latin typeface="Cambria Math" panose="02040503050406030204" pitchFamily="18" charset="0"/>
+                            </a:rPr>
+                            <m:t>𝐵</m:t>
+                          </m:r>
+                        </m:e>
+                      </m:d>
+                      <m:r>
+                        <a:rPr lang="en-US" b="0" i="1" smtClean="0">
+                          <a:latin typeface="Cambria Math" panose="02040503050406030204" pitchFamily="18" charset="0"/>
+                        </a:rPr>
+                        <m:t>=</m:t>
+                      </m:r>
+                      <m:r>
+                        <a:rPr lang="en-US">
+                          <a:latin typeface="Cambria Math" panose="02040503050406030204" pitchFamily="18" charset="0"/>
+                        </a:rPr>
+                        <m:t>𝑃</m:t>
+                      </m:r>
+                      <m:d>
+                        <m:dPr>
+                          <m:ctrlPr>
+                            <a:rPr lang="ar-AE" i="1">
+                              <a:latin typeface="Cambria Math" panose="02040503050406030204" pitchFamily="18" charset="0"/>
+                            </a:rPr>
+                          </m:ctrlPr>
+                        </m:dPr>
+                        <m:e>
+                          <m:r>
+                            <a:rPr lang="ar-AE">
+                              <a:latin typeface="Cambria Math" panose="02040503050406030204" pitchFamily="18" charset="0"/>
+                            </a:rPr>
+                            <m:t>𝐴</m:t>
+                          </m:r>
+                          <m:r>
                             <a:rPr lang="ar-AE">
                               <a:latin typeface="Cambria Math" panose="02040503050406030204" pitchFamily="18" charset="0"/>
                             </a:rPr>
@@ -16938,7 +16983,7 @@
               <a:p>
                 <a:r>
                   <a:rPr lang="en-US" dirty="0"/>
-                  <a:t>Leading to:</a:t>
+                  <a:t>Therefore:</a:t>
                 </a:r>
               </a:p>
               <a:p>
@@ -27747,8 +27792,8 @@
           </a:p>
         </p:txBody>
       </p:sp>
-      <mc:AlternateContent xmlns:mc="http://schemas.openxmlformats.org/markup-compatibility/2006">
-        <mc:Choice xmlns:a14="http://schemas.microsoft.com/office/drawing/2010/main" Requires="a14">
+      <mc:AlternateContent xmlns:mc="http://schemas.openxmlformats.org/markup-compatibility/2006" xmlns:a14="http://schemas.microsoft.com/office/drawing/2010/main">
+        <mc:Choice Requires="a14">
           <p:sp>
             <p:nvSpPr>
               <p:cNvPr id="3" name="Content Placeholder 2">
@@ -27905,6 +27950,47 @@
                             <m:t>𝐴</m:t>
                           </m:r>
                           <m:r>
+                            <a:rPr lang="en-US" sz="2000" b="0" i="0" smtClean="0">
+                              <a:latin typeface="Cambria Math" panose="02040503050406030204" pitchFamily="18" charset="0"/>
+                            </a:rPr>
+                            <m:t>,</m:t>
+                          </m:r>
+                          <m:r>
+                            <a:rPr lang="ar-AE" sz="2000">
+                              <a:latin typeface="Cambria Math" panose="02040503050406030204" pitchFamily="18" charset="0"/>
+                            </a:rPr>
+                            <m:t>𝐵</m:t>
+                          </m:r>
+                        </m:e>
+                      </m:d>
+                      <m:r>
+                        <a:rPr lang="en-US" sz="2000" b="0" i="0" smtClean="0">
+                          <a:latin typeface="Cambria Math" panose="02040503050406030204" pitchFamily="18" charset="0"/>
+                        </a:rPr>
+                        <m:t>=</m:t>
+                      </m:r>
+                      <m:r>
+                        <a:rPr lang="ar-AE" sz="2000">
+                          <a:latin typeface="Cambria Math" panose="02040503050406030204" pitchFamily="18" charset="0"/>
+                        </a:rPr>
+                        <m:t>𝑃</m:t>
+                      </m:r>
+                      <m:d>
+                        <m:dPr>
+                          <m:ctrlPr>
+                            <a:rPr lang="ar-AE" sz="2000" i="1">
+                              <a:latin typeface="Cambria Math" panose="02040503050406030204" pitchFamily="18" charset="0"/>
+                            </a:rPr>
+                          </m:ctrlPr>
+                        </m:dPr>
+                        <m:e>
+                          <m:r>
+                            <a:rPr lang="ar-AE" sz="2000">
+                              <a:latin typeface="Cambria Math" panose="02040503050406030204" pitchFamily="18" charset="0"/>
+                            </a:rPr>
+                            <m:t>𝐴</m:t>
+                          </m:r>
+                          <m:r>
                             <a:rPr lang="ar-AE" sz="2000">
                               <a:latin typeface="Cambria Math" panose="02040503050406030204" pitchFamily="18" charset="0"/>
                             </a:rPr>
@@ -28073,6 +28159,87 @@
                                 <m:t>𝐴</m:t>
                               </m:r>
                               <m:r>
+                                <a:rPr lang="en-US" sz="2000" b="0" i="0" smtClean="0">
+                                  <a:latin typeface="Cambria Math" panose="02040503050406030204" pitchFamily="18" charset="0"/>
+                                </a:rPr>
+                                <m:t>,</m:t>
+                              </m:r>
+                              <m:r>
+                                <a:rPr lang="ar-AE" sz="2000">
+                                  <a:latin typeface="Cambria Math" panose="02040503050406030204" pitchFamily="18" charset="0"/>
+                                </a:rPr>
+                                <m:t>𝐵</m:t>
+                              </m:r>
+                            </m:e>
+                          </m:d>
+                        </m:e>
+                      </m:nary>
+                      <m:r>
+                        <a:rPr lang="ar-AE" sz="2000">
+                          <a:latin typeface="Cambria Math" panose="02040503050406030204" pitchFamily="18" charset="0"/>
+                        </a:rPr>
+                        <m:t>𝑑</m:t>
+                      </m:r>
+                      <m:r>
+                        <a:rPr lang="en-US" sz="2000" i="1">
+                          <a:latin typeface="Cambria Math" panose="02040503050406030204" pitchFamily="18" charset="0"/>
+                        </a:rPr>
+                        <m:t>𝐵</m:t>
+                      </m:r>
+                      <m:r>
+                        <a:rPr lang="en-US" sz="2000" b="0" i="0" smtClean="0">
+                          <a:latin typeface="Cambria Math" panose="02040503050406030204" pitchFamily="18" charset="0"/>
+                        </a:rPr>
+                        <m:t>=</m:t>
+                      </m:r>
+                      <m:nary>
+                        <m:naryPr>
+                          <m:limLoc m:val="subSup"/>
+                          <m:ctrlPr>
+                            <a:rPr lang="ar-AE" sz="2000" i="1">
+                              <a:latin typeface="Cambria Math" panose="02040503050406030204" pitchFamily="18" charset="0"/>
+                            </a:rPr>
+                          </m:ctrlPr>
+                        </m:naryPr>
+                        <m:sub>
+                          <m:r>
+                            <a:rPr lang="en-US" sz="2000" i="1">
+                              <a:latin typeface="Cambria Math" panose="02040503050406030204" pitchFamily="18" charset="0"/>
+                            </a:rPr>
+                            <m:t>𝐵</m:t>
+                          </m:r>
+                        </m:sub>
+                        <m:sup>
+                          <m:r>
+                            <a:rPr lang="ar-AE" sz="2000">
+                              <a:latin typeface="Cambria Math" panose="02040503050406030204" pitchFamily="18" charset="0"/>
+                            </a:rPr>
+                            <m:t>​</m:t>
+                          </m:r>
+                        </m:sup>
+                        <m:e>
+                          <m:r>
+                            <a:rPr lang="ar-AE" sz="2000">
+                              <a:latin typeface="Cambria Math" panose="02040503050406030204" pitchFamily="18" charset="0"/>
+                            </a:rPr>
+                            <m:t>𝑃</m:t>
+                          </m:r>
+                          <m:d>
+                            <m:dPr>
+                              <m:ctrlPr>
+                                <a:rPr lang="ar-AE" sz="2000" i="1">
+                                  <a:latin typeface="Cambria Math" panose="02040503050406030204" pitchFamily="18" charset="0"/>
+                                </a:rPr>
+                              </m:ctrlPr>
+                            </m:dPr>
+                            <m:e>
+                              <m:r>
+                                <a:rPr lang="ar-AE" sz="2000">
+                                  <a:latin typeface="Cambria Math" panose="02040503050406030204" pitchFamily="18" charset="0"/>
+                                </a:rPr>
+                                <m:t>𝐴</m:t>
+                              </m:r>
+                              <m:r>
                                 <a:rPr lang="ar-AE" sz="2000">
                                   <a:latin typeface="Cambria Math" panose="02040503050406030204" pitchFamily="18" charset="0"/>
                                 </a:rPr>
@@ -28227,6 +28394,90 @@
                             </m:dPr>
                             <m:e>
                               <m:r>
+                                <a:rPr lang="ar-AE" sz="2000">
+                                  <a:latin typeface="Cambria Math" panose="02040503050406030204" pitchFamily="18" charset="0"/>
+                                </a:rPr>
+                                <m:t>𝐴</m:t>
+                              </m:r>
+                              <m:r>
+                                <a:rPr lang="en-US" sz="2000">
+                                  <a:latin typeface="Cambria Math" panose="02040503050406030204" pitchFamily="18" charset="0"/>
+                                </a:rPr>
+                                <m:t>,</m:t>
+                              </m:r>
+                              <m:r>
+                                <a:rPr lang="ar-AE" sz="2000">
+                                  <a:latin typeface="Cambria Math" panose="02040503050406030204" pitchFamily="18" charset="0"/>
+                                </a:rPr>
+                                <m:t>𝐵</m:t>
+                              </m:r>
+                            </m:e>
+                          </m:d>
+                        </m:e>
+                      </m:nary>
+                      <m:r>
+                        <a:rPr lang="ar-AE" sz="2000">
+                          <a:latin typeface="Cambria Math" panose="02040503050406030204" pitchFamily="18" charset="0"/>
+                        </a:rPr>
+                        <m:t>𝑑</m:t>
+                      </m:r>
+                      <m:r>
+                        <m:rPr>
+                          <m:sty m:val="p"/>
+                        </m:rPr>
+                        <a:rPr lang="en-US" sz="2000" b="0" i="0" smtClean="0">
+                          <a:latin typeface="Cambria Math" panose="02040503050406030204" pitchFamily="18" charset="0"/>
+                        </a:rPr>
+                        <m:t>A</m:t>
+                      </m:r>
+                      <m:r>
+                        <a:rPr lang="ar-AE" sz="2000">
+                          <a:latin typeface="Cambria Math" panose="02040503050406030204" pitchFamily="18" charset="0"/>
+                        </a:rPr>
+                        <m:t>=</m:t>
+                      </m:r>
+                      <m:nary>
+                        <m:naryPr>
+                          <m:limLoc m:val="subSup"/>
+                          <m:ctrlPr>
+                            <a:rPr lang="ar-AE" sz="2000" i="1">
+                              <a:latin typeface="Cambria Math" panose="02040503050406030204" pitchFamily="18" charset="0"/>
+                            </a:rPr>
+                          </m:ctrlPr>
+                        </m:naryPr>
+                        <m:sub>
+                          <m:r>
+                            <a:rPr lang="en-US" sz="2000" b="0" i="1" smtClean="0">
+                              <a:latin typeface="Cambria Math" panose="02040503050406030204" pitchFamily="18" charset="0"/>
+                            </a:rPr>
+                            <m:t>𝐴</m:t>
+                          </m:r>
+                        </m:sub>
+                        <m:sup>
+                          <m:r>
+                            <a:rPr lang="ar-AE" sz="2000">
+                              <a:latin typeface="Cambria Math" panose="02040503050406030204" pitchFamily="18" charset="0"/>
+                            </a:rPr>
+                            <m:t>​</m:t>
+                          </m:r>
+                        </m:sup>
+                        <m:e>
+                          <m:r>
+                            <a:rPr lang="ar-AE" sz="2000">
+                              <a:latin typeface="Cambria Math" panose="02040503050406030204" pitchFamily="18" charset="0"/>
+                            </a:rPr>
+                            <m:t>𝑃</m:t>
+                          </m:r>
+                          <m:d>
+                            <m:dPr>
+                              <m:ctrlPr>
+                                <a:rPr lang="ar-AE" sz="2000" i="1">
+                                  <a:latin typeface="Cambria Math" panose="02040503050406030204" pitchFamily="18" charset="0"/>
+                                </a:rPr>
+                              </m:ctrlPr>
+                            </m:dPr>
+                            <m:e>
+                              <m:r>
                                 <m:rPr>
                                   <m:sty m:val="p"/>
                                 </m:rPr>
@@ -28297,7 +28548,7 @@
             </p:txBody>
           </p:sp>
         </mc:Choice>
-        <mc:Fallback>
+        <mc:Fallback xmlns="">
           <p:sp>
             <p:nvSpPr>
               <p:cNvPr id="3" name="Content Placeholder 2">
@@ -28351,6 +28602,276 @@
   <p:clrMapOvr>
     <a:masterClrMapping/>
   </p:clrMapOvr>
+  <p:timing>
+    <p:tnLst>
+      <p:par>
+        <p:cTn id="1" dur="indefinite" restart="never" nodeType="tmRoot">
+          <p:childTnLst>
+            <p:seq concurrent="1" nextAc="seek">
+              <p:cTn id="2" dur="indefinite" nodeType="mainSeq">
+                <p:childTnLst>
+                  <p:par>
+                    <p:cTn id="3" fill="hold">
+                      <p:stCondLst>
+                        <p:cond delay="indefinite"/>
+                      </p:stCondLst>
+                      <p:childTnLst>
+                        <p:par>
+                          <p:cTn id="4" fill="hold">
+                            <p:stCondLst>
+                              <p:cond delay="0"/>
+                            </p:stCondLst>
+                            <p:childTnLst>
+                              <p:par>
+                                <p:cTn id="5" presetID="1" presetClass="entr" presetSubtype="0" fill="hold" nodeType="clickEffect">
+                                  <p:stCondLst>
+                                    <p:cond delay="0"/>
+                                  </p:stCondLst>
+                                  <p:childTnLst>
+                                    <p:set>
+                                      <p:cBhvr>
+                                        <p:cTn id="6" dur="1" fill="hold">
+                                          <p:stCondLst>
+                                            <p:cond delay="0"/>
+                                          </p:stCondLst>
+                                        </p:cTn>
+                                        <p:tgtEl>
+                                          <p:spTgt spid="3">
+                                            <p:txEl>
+                                              <p:pRg st="1" end="1"/>
+                                            </p:txEl>
+                                          </p:spTgt>
+                                        </p:tgtEl>
+                                        <p:attrNameLst>
+                                          <p:attrName>style.visibility</p:attrName>
+                                        </p:attrNameLst>
+                                      </p:cBhvr>
+                                      <p:to>
+                                        <p:strVal val="visible"/>
+                                      </p:to>
+                                    </p:set>
+                                  </p:childTnLst>
+                                </p:cTn>
+                              </p:par>
+                              <p:par>
+                                <p:cTn id="7" presetID="1" presetClass="entr" presetSubtype="0" fill="hold" nodeType="withEffect">
+                                  <p:stCondLst>
+                                    <p:cond delay="0"/>
+                                  </p:stCondLst>
+                                  <p:childTnLst>
+                                    <p:set>
+                                      <p:cBhvr>
+                                        <p:cTn id="8" dur="1" fill="hold">
+                                          <p:stCondLst>
+                                            <p:cond delay="0"/>
+                                          </p:stCondLst>
+                                        </p:cTn>
+                                        <p:tgtEl>
+                                          <p:spTgt spid="3">
+                                            <p:txEl>
+                                              <p:pRg st="2" end="2"/>
+                                            </p:txEl>
+                                          </p:spTgt>
+                                        </p:tgtEl>
+                                        <p:attrNameLst>
+                                          <p:attrName>style.visibility</p:attrName>
+                                        </p:attrNameLst>
+                                      </p:cBhvr>
+                                      <p:to>
+                                        <p:strVal val="visible"/>
+                                      </p:to>
+                                    </p:set>
+                                  </p:childTnLst>
+                                </p:cTn>
+                              </p:par>
+                            </p:childTnLst>
+                          </p:cTn>
+                        </p:par>
+                      </p:childTnLst>
+                    </p:cTn>
+                  </p:par>
+                  <p:par>
+                    <p:cTn id="9" fill="hold">
+                      <p:stCondLst>
+                        <p:cond delay="indefinite"/>
+                      </p:stCondLst>
+                      <p:childTnLst>
+                        <p:par>
+                          <p:cTn id="10" fill="hold">
+                            <p:stCondLst>
+                              <p:cond delay="0"/>
+                            </p:stCondLst>
+                            <p:childTnLst>
+                              <p:par>
+                                <p:cTn id="11" presetID="1" presetClass="entr" presetSubtype="0" fill="hold" nodeType="clickEffect">
+                                  <p:stCondLst>
+                                    <p:cond delay="0"/>
+                                  </p:stCondLst>
+                                  <p:childTnLst>
+                                    <p:set>
+                                      <p:cBhvr>
+                                        <p:cTn id="12" dur="1" fill="hold">
+                                          <p:stCondLst>
+                                            <p:cond delay="0"/>
+                                          </p:stCondLst>
+                                        </p:cTn>
+                                        <p:tgtEl>
+                                          <p:spTgt spid="3">
+                                            <p:txEl>
+                                              <p:pRg st="3" end="3"/>
+                                            </p:txEl>
+                                          </p:spTgt>
+                                        </p:tgtEl>
+                                        <p:attrNameLst>
+                                          <p:attrName>style.visibility</p:attrName>
+                                        </p:attrNameLst>
+                                      </p:cBhvr>
+                                      <p:to>
+                                        <p:strVal val="visible"/>
+                                      </p:to>
+                                    </p:set>
+                                  </p:childTnLst>
+                                </p:cTn>
+                              </p:par>
+                              <p:par>
+                                <p:cTn id="13" presetID="1" presetClass="entr" presetSubtype="0" fill="hold" nodeType="withEffect">
+                                  <p:stCondLst>
+                                    <p:cond delay="0"/>
+                                  </p:stCondLst>
+                                  <p:childTnLst>
+                                    <p:set>
+                                      <p:cBhvr>
+                                        <p:cTn id="14" dur="1" fill="hold">
+                                          <p:stCondLst>
+                                            <p:cond delay="0"/>
+                                          </p:stCondLst>
+                                        </p:cTn>
+                                        <p:tgtEl>
+                                          <p:spTgt spid="3">
+                                            <p:txEl>
+                                              <p:pRg st="4" end="4"/>
+                                            </p:txEl>
+                                          </p:spTgt>
+                                        </p:tgtEl>
+                                        <p:attrNameLst>
+                                          <p:attrName>style.visibility</p:attrName>
+                                        </p:attrNameLst>
+                                      </p:cBhvr>
+                                      <p:to>
+                                        <p:strVal val="visible"/>
+                                      </p:to>
+                                    </p:set>
+                                  </p:childTnLst>
+                                </p:cTn>
+                              </p:par>
+                            </p:childTnLst>
+                          </p:cTn>
+                        </p:par>
+                      </p:childTnLst>
+                    </p:cTn>
+                  </p:par>
+                  <p:par>
+                    <p:cTn id="15" fill="hold">
+                      <p:stCondLst>
+                        <p:cond delay="indefinite"/>
+                      </p:stCondLst>
+                      <p:childTnLst>
+                        <p:par>
+                          <p:cTn id="16" fill="hold">
+                            <p:stCondLst>
+                              <p:cond delay="0"/>
+                            </p:stCondLst>
+                            <p:childTnLst>
+                              <p:par>
+                                <p:cTn id="17" presetID="1" presetClass="entr" presetSubtype="0" fill="hold" nodeType="clickEffect">
+                                  <p:stCondLst>
+                                    <p:cond delay="0"/>
+                                  </p:stCondLst>
+                                  <p:childTnLst>
+                                    <p:set>
+                                      <p:cBhvr>
+                                        <p:cTn id="18" dur="1" fill="hold">
+                                          <p:stCondLst>
+                                            <p:cond delay="0"/>
+                                          </p:stCondLst>
+                                        </p:cTn>
+                                        <p:tgtEl>
+                                          <p:spTgt spid="3">
+                                            <p:txEl>
+                                              <p:pRg st="5" end="5"/>
+                                            </p:txEl>
+                                          </p:spTgt>
+                                        </p:tgtEl>
+                                        <p:attrNameLst>
+                                          <p:attrName>style.visibility</p:attrName>
+                                        </p:attrNameLst>
+                                      </p:cBhvr>
+                                      <p:to>
+                                        <p:strVal val="visible"/>
+                                      </p:to>
+                                    </p:set>
+                                  </p:childTnLst>
+                                </p:cTn>
+                              </p:par>
+                              <p:par>
+                                <p:cTn id="19" presetID="1" presetClass="entr" presetSubtype="0" fill="hold" nodeType="withEffect">
+                                  <p:stCondLst>
+                                    <p:cond delay="0"/>
+                                  </p:stCondLst>
+                                  <p:childTnLst>
+                                    <p:set>
+                                      <p:cBhvr>
+                                        <p:cTn id="20" dur="1" fill="hold">
+                                          <p:stCondLst>
+                                            <p:cond delay="0"/>
+                                          </p:stCondLst>
+                                        </p:cTn>
+                                        <p:tgtEl>
+                                          <p:spTgt spid="3">
+                                            <p:txEl>
+                                              <p:pRg st="6" end="6"/>
+                                            </p:txEl>
+                                          </p:spTgt>
+                                        </p:tgtEl>
+                                        <p:attrNameLst>
+                                          <p:attrName>style.visibility</p:attrName>
+                                        </p:attrNameLst>
+                                      </p:cBhvr>
+                                      <p:to>
+                                        <p:strVal val="visible"/>
+                                      </p:to>
+                                    </p:set>
+                                  </p:childTnLst>
+                                </p:cTn>
+                              </p:par>
+                            </p:childTnLst>
+                          </p:cTn>
+                        </p:par>
+                      </p:childTnLst>
+                    </p:cTn>
+                  </p:par>
+                </p:childTnLst>
+              </p:cTn>
+              <p:prevCondLst>
+                <p:cond evt="onPrev" delay="0">
+                  <p:tgtEl>
+                    <p:sldTgt/>
+                  </p:tgtEl>
+                </p:cond>
+              </p:prevCondLst>
+              <p:nextCondLst>
+                <p:cond evt="onNext" delay="0">
+                  <p:tgtEl>
+                    <p:sldTgt/>
+                  </p:tgtEl>
+                </p:cond>
+              </p:nextCondLst>
+            </p:seq>
+          </p:childTnLst>
+        </p:cTn>
+      </p:par>
+    </p:tnLst>
+  </p:timing>
 </p:sld>
 </file>
 
@@ -28531,31 +29052,12 @@
                           </m:ctrlPr>
                         </m:dPr>
                         <m:e>
-                          <m:sSub>
-                            <m:sSubPr>
-                              <m:ctrlPr>
-                                <a:rPr lang="ar-AE" sz="2000" i="1" smtClean="0">
-                                  <a:latin typeface="Cambria Math" panose="02040503050406030204" pitchFamily="18" charset="0"/>
-                                </a:rPr>
-                              </m:ctrlPr>
-                            </m:sSubPr>
-                            <m:e>
-                              <m:r>
-                                <a:rPr lang="en-US" sz="2000" b="0" i="1" smtClean="0">
-                                  <a:latin typeface="Cambria Math" panose="02040503050406030204" pitchFamily="18" charset="0"/>
-                                </a:rPr>
-                                <m:t>𝑎</m:t>
-                              </m:r>
-                            </m:e>
-                            <m:sub>
-                              <m:r>
-                                <a:rPr lang="en-US" sz="2000" b="0" i="1" smtClean="0">
-                                  <a:latin typeface="Cambria Math" panose="02040503050406030204" pitchFamily="18" charset="0"/>
-                                </a:rPr>
-                                <m:t>𝑖</m:t>
-                              </m:r>
-                            </m:sub>
-                          </m:sSub>
+                          <m:r>
+                            <a:rPr lang="en-US" sz="2000" b="0" i="1" smtClean="0">
+                              <a:latin typeface="Cambria Math" panose="02040503050406030204" pitchFamily="18" charset="0"/>
+                            </a:rPr>
+                            <m:t>𝐴</m:t>
+                          </m:r>
                         </m:e>
                       </m:d>
                       <m:r>
@@ -28752,31 +29254,12 @@
                           </m:ctrlPr>
                         </m:dPr>
                         <m:e>
-                          <m:sSub>
-                            <m:sSubPr>
-                              <m:ctrlPr>
-                                <a:rPr lang="ar-AE" sz="2000" i="1">
-                                  <a:latin typeface="Cambria Math" panose="02040503050406030204" pitchFamily="18" charset="0"/>
-                                </a:rPr>
-                              </m:ctrlPr>
-                            </m:sSubPr>
-                            <m:e>
-                              <m:r>
-                                <a:rPr lang="en-US" sz="2000" b="0" i="1" smtClean="0">
-                                  <a:latin typeface="Cambria Math" panose="02040503050406030204" pitchFamily="18" charset="0"/>
-                                </a:rPr>
-                                <m:t>𝑏</m:t>
-                              </m:r>
-                            </m:e>
-                            <m:sub>
-                              <m:r>
-                                <a:rPr lang="en-US" sz="2000" i="1">
-                                  <a:latin typeface="Cambria Math" panose="02040503050406030204" pitchFamily="18" charset="0"/>
-                                </a:rPr>
-                                <m:t>𝑖</m:t>
-                              </m:r>
-                            </m:sub>
-                          </m:sSub>
+                          <m:r>
+                            <a:rPr lang="en-US" sz="2000" b="0" i="1" smtClean="0">
+                              <a:latin typeface="Cambria Math" panose="02040503050406030204" pitchFamily="18" charset="0"/>
+                            </a:rPr>
+                            <m:t>𝐵</m:t>
+                          </m:r>
                         </m:e>
                       </m:d>
                       <m:r>
@@ -28987,6 +29470,942 @@
   <p:clrMapOvr>
     <a:masterClrMapping/>
   </p:clrMapOvr>
+</p:sld>
+</file>
+
+<file path=ppt/slides/slide43.xml><?xml version="1.0" encoding="utf-8"?>
+<p:sld xmlns:a="http://schemas.openxmlformats.org/drawingml/2006/main" xmlns:r="http://schemas.openxmlformats.org/officeDocument/2006/relationships" xmlns:p="http://schemas.openxmlformats.org/presentationml/2006/main">
+  <p:cSld>
+    <p:spTree>
+      <p:nvGrpSpPr>
+        <p:cNvPr id="1" name=""/>
+        <p:cNvGrpSpPr/>
+        <p:nvPr/>
+      </p:nvGrpSpPr>
+      <p:grpSpPr>
+        <a:xfrm>
+          <a:off x="0" y="0"/>
+          <a:ext cx="0" cy="0"/>
+          <a:chOff x="0" y="0"/>
+          <a:chExt cx="0" cy="0"/>
+        </a:xfrm>
+      </p:grpSpPr>
+      <p:pic>
+        <p:nvPicPr>
+          <p:cNvPr id="3" name="Picture 1" descr="03b_WhenOneThingDependsOnAother_files/figure-pptx/unnamed-chunk-2-1.png"/>
+          <p:cNvPicPr>
+            <a:picLocks noGrp="1" noChangeAspect="1"/>
+          </p:cNvPicPr>
+          <p:nvPr/>
+        </p:nvPicPr>
+        <p:blipFill>
+          <a:blip r:embed="rId2"/>
+          <a:stretch>
+            <a:fillRect/>
+          </a:stretch>
+        </p:blipFill>
+        <p:spPr bwMode="auto">
+          <a:xfrm>
+            <a:off x="4174603" y="149184"/>
+            <a:ext cx="4948499" cy="4948499"/>
+          </a:xfrm>
+          <a:prstGeom prst="rect">
+            <a:avLst/>
+          </a:prstGeom>
+          <a:noFill/>
+          <a:ln w="9525">
+            <a:noFill/>
+            <a:headEnd/>
+            <a:tailEnd/>
+          </a:ln>
+        </p:spPr>
+      </p:pic>
+      <p:sp>
+        <p:nvSpPr>
+          <p:cNvPr id="2" name="Title 1"/>
+          <p:cNvSpPr>
+            <a:spLocks noGrp="1"/>
+          </p:cNvSpPr>
+          <p:nvPr>
+            <p:ph type="title"/>
+          </p:nvPr>
+        </p:nvSpPr>
+        <p:spPr>
+          <a:xfrm>
+            <a:off x="413846" y="82844"/>
+            <a:ext cx="3837007" cy="414010"/>
+          </a:xfrm>
+        </p:spPr>
+        <p:txBody>
+          <a:bodyPr>
+            <a:normAutofit/>
+          </a:bodyPr>
+          <a:lstStyle/>
+          <a:p>
+            <a:pPr marL="0" lvl="0" indent="0">
+              <a:buNone/>
+            </a:pPr>
+            <a:r>
+              <a:rPr sz="2000" dirty="0"/>
+              <a:t>Example: Marginal Distribution</a:t>
+            </a:r>
+          </a:p>
+        </p:txBody>
+      </p:sp>
+      <mc:AlternateContent xmlns:mc="http://schemas.openxmlformats.org/markup-compatibility/2006" xmlns:a14="http://schemas.microsoft.com/office/drawing/2010/main">
+        <mc:Choice Requires="a14">
+          <p:sp>
+            <p:nvSpPr>
+              <p:cNvPr id="4" name="Text Placeholder 3"/>
+              <p:cNvSpPr>
+                <a:spLocks noGrp="1"/>
+              </p:cNvSpPr>
+              <p:nvPr>
+                <p:ph type="body" sz="half" idx="2"/>
+              </p:nvPr>
+            </p:nvSpPr>
+            <p:spPr>
+              <a:xfrm>
+                <a:off x="141890" y="528146"/>
+                <a:ext cx="4272455" cy="4325506"/>
+              </a:xfrm>
+            </p:spPr>
+            <p:txBody>
+              <a:bodyPr>
+                <a:noAutofit/>
+              </a:bodyPr>
+              <a:lstStyle/>
+              <a:p>
+                <a:pPr marL="0" lvl="0" indent="0">
+                  <a:buNone/>
+                </a:pPr>
+                <a:r>
+                  <a:rPr lang="en-US" sz="1600" b="1" dirty="0"/>
+                  <a:t>Marginal distributions</a:t>
+                </a:r>
+                <a:r>
+                  <a:rPr lang="en-US" sz="1600" dirty="0"/>
+                  <a:t> of bivariate  Normal</a:t>
+                </a:r>
+                <a:endParaRPr lang="en-US" sz="1600" b="0" i="1" dirty="0">
+                  <a:latin typeface="Cambria Math" panose="02040503050406030204" pitchFamily="18" charset="0"/>
+                </a:endParaRPr>
+              </a:p>
+              <a:p>
+                <a:pPr marL="0" lvl="0" indent="0">
+                  <a:buNone/>
+                </a:pPr>
+                <a14:m>
+                  <m:oMathPara xmlns:m="http://schemas.openxmlformats.org/officeDocument/2006/math">
+                    <m:oMathParaPr>
+                      <m:jc m:val="centerGroup"/>
+                    </m:oMathParaPr>
+                    <m:oMath xmlns:m="http://schemas.openxmlformats.org/officeDocument/2006/math">
+                      <m:r>
+                        <a:rPr lang="en-US" sz="1600" b="1" i="1" smtClean="0">
+                          <a:latin typeface="Cambria Math" panose="02040503050406030204" pitchFamily="18" charset="0"/>
+                        </a:rPr>
+                        <m:t>𝒙</m:t>
+                      </m:r>
+                      <m:r>
+                        <a:rPr lang="en-US" sz="1600" b="0" i="1" smtClean="0">
+                          <a:latin typeface="Cambria Math" panose="02040503050406030204" pitchFamily="18" charset="0"/>
+                        </a:rPr>
+                        <m:t>=</m:t>
+                      </m:r>
+                      <m:d>
+                        <m:dPr>
+                          <m:ctrlPr>
+                            <a:rPr lang="en-US" sz="1600" b="0" i="1" smtClean="0">
+                              <a:latin typeface="Cambria Math" panose="02040503050406030204" pitchFamily="18" charset="0"/>
+                            </a:rPr>
+                          </m:ctrlPr>
+                        </m:dPr>
+                        <m:e>
+                          <m:r>
+                            <a:rPr lang="en-US" sz="1600" b="0" i="1" smtClean="0">
+                              <a:latin typeface="Cambria Math" panose="02040503050406030204" pitchFamily="18" charset="0"/>
+                            </a:rPr>
+                            <m:t>𝑥</m:t>
+                          </m:r>
+                          <m:r>
+                            <a:rPr lang="en-US" sz="1600" b="0" i="1" smtClean="0">
+                              <a:latin typeface="Cambria Math" panose="02040503050406030204" pitchFamily="18" charset="0"/>
+                            </a:rPr>
+                            <m:t>,</m:t>
+                          </m:r>
+                          <m:r>
+                            <a:rPr lang="en-US" sz="1600" b="0" i="1" smtClean="0">
+                              <a:latin typeface="Cambria Math" panose="02040503050406030204" pitchFamily="18" charset="0"/>
+                            </a:rPr>
+                            <m:t>𝑦</m:t>
+                          </m:r>
+                        </m:e>
+                      </m:d>
+                    </m:oMath>
+                  </m:oMathPara>
+                </a14:m>
+                <a:endParaRPr lang="en-US" sz="1600" dirty="0"/>
+              </a:p>
+              <a:p>
+                <a:pPr lvl="0"/>
+                <a14:m>
+                  <m:oMathPara xmlns:m="http://schemas.openxmlformats.org/officeDocument/2006/math">
+                    <m:oMathParaPr>
+                      <m:jc m:val="centerGroup"/>
+                    </m:oMathParaPr>
+                    <m:oMath xmlns:m="http://schemas.openxmlformats.org/officeDocument/2006/math">
+                      <m:r>
+                        <a:rPr lang="en-US" sz="1600" b="0" i="1" smtClean="0">
+                          <a:latin typeface="Cambria Math" panose="02040503050406030204" pitchFamily="18" charset="0"/>
+                        </a:rPr>
+                        <m:t>𝑝</m:t>
+                      </m:r>
+                      <m:d>
+                        <m:dPr>
+                          <m:ctrlPr>
+                            <a:rPr lang="en-US" sz="1600" b="0" i="1" smtClean="0">
+                              <a:latin typeface="Cambria Math" panose="02040503050406030204" pitchFamily="18" charset="0"/>
+                            </a:rPr>
+                          </m:ctrlPr>
+                        </m:dPr>
+                        <m:e>
+                          <m:r>
+                            <a:rPr lang="en-US" sz="1600" b="1" i="1" smtClean="0">
+                              <a:latin typeface="Cambria Math" panose="02040503050406030204" pitchFamily="18" charset="0"/>
+                            </a:rPr>
+                            <m:t>𝒙</m:t>
+                          </m:r>
+                        </m:e>
+                      </m:d>
+                      <m:r>
+                        <a:rPr lang="en-US" sz="1600" b="0" i="1" smtClean="0">
+                          <a:latin typeface="Cambria Math" panose="02040503050406030204" pitchFamily="18" charset="0"/>
+                        </a:rPr>
+                        <m:t>=</m:t>
+                      </m:r>
+                      <m:f>
+                        <m:fPr>
+                          <m:ctrlPr>
+                            <a:rPr lang="en-US" sz="1600" b="0" i="1" smtClean="0">
+                              <a:latin typeface="Cambria Math" panose="02040503050406030204" pitchFamily="18" charset="0"/>
+                            </a:rPr>
+                          </m:ctrlPr>
+                        </m:fPr>
+                        <m:num>
+                          <m:r>
+                            <a:rPr lang="en-US" sz="1600" b="0" i="1" smtClean="0">
+                              <a:latin typeface="Cambria Math" panose="02040503050406030204" pitchFamily="18" charset="0"/>
+                            </a:rPr>
+                            <m:t>1</m:t>
+                          </m:r>
+                        </m:num>
+                        <m:den>
+                          <m:r>
+                            <a:rPr lang="en-US" sz="1600" b="0" i="1" smtClean="0">
+                              <a:latin typeface="Cambria Math" panose="02040503050406030204" pitchFamily="18" charset="0"/>
+                            </a:rPr>
+                            <m:t>2</m:t>
+                          </m:r>
+                          <m:r>
+                            <a:rPr lang="en-US" sz="1600" b="0" i="1" smtClean="0">
+                              <a:latin typeface="Cambria Math" panose="02040503050406030204" pitchFamily="18" charset="0"/>
+                              <a:ea typeface="Cambria Math" panose="02040503050406030204" pitchFamily="18" charset="0"/>
+                            </a:rPr>
+                            <m:t>𝜋</m:t>
+                          </m:r>
+                          <m:r>
+                            <a:rPr lang="en-US" sz="1600" b="0" i="1" smtClean="0">
+                              <a:latin typeface="Cambria Math" panose="02040503050406030204" pitchFamily="18" charset="0"/>
+                              <a:ea typeface="Cambria Math" panose="02040503050406030204" pitchFamily="18" charset="0"/>
+                            </a:rPr>
+                            <m:t> </m:t>
+                          </m:r>
+                          <m:sSup>
+                            <m:sSupPr>
+                              <m:ctrlPr>
+                                <a:rPr lang="en-US" sz="1600" b="0" i="1" smtClean="0">
+                                  <a:latin typeface="Cambria Math" panose="02040503050406030204" pitchFamily="18" charset="0"/>
+                                  <a:ea typeface="Cambria Math" panose="02040503050406030204" pitchFamily="18" charset="0"/>
+                                </a:rPr>
+                              </m:ctrlPr>
+                            </m:sSupPr>
+                            <m:e>
+                              <m:r>
+                                <a:rPr lang="en-US" sz="1600" b="0" i="1" smtClean="0">
+                                  <a:latin typeface="Cambria Math" panose="02040503050406030204" pitchFamily="18" charset="0"/>
+                                  <a:ea typeface="Cambria Math" panose="02040503050406030204" pitchFamily="18" charset="0"/>
+                                </a:rPr>
+                                <m:t>𝑑𝑒𝑡</m:t>
+                              </m:r>
+                              <m:d>
+                                <m:dPr>
+                                  <m:ctrlPr>
+                                    <a:rPr lang="en-US" sz="1600" b="0" i="1" smtClean="0">
+                                      <a:latin typeface="Cambria Math" panose="02040503050406030204" pitchFamily="18" charset="0"/>
+                                      <a:ea typeface="Cambria Math" panose="02040503050406030204" pitchFamily="18" charset="0"/>
+                                    </a:rPr>
+                                  </m:ctrlPr>
+                                </m:dPr>
+                                <m:e>
+                                  <m:r>
+                                    <m:rPr>
+                                      <m:sty m:val="p"/>
+                                    </m:rPr>
+                                    <a:rPr lang="el-GR" sz="1600" b="0" i="1" smtClean="0">
+                                      <a:latin typeface="Cambria Math" panose="02040503050406030204" pitchFamily="18" charset="0"/>
+                                      <a:ea typeface="Cambria Math" panose="02040503050406030204" pitchFamily="18" charset="0"/>
+                                    </a:rPr>
+                                    <m:t>Σ</m:t>
+                                  </m:r>
+                                </m:e>
+                              </m:d>
+                            </m:e>
+                            <m:sup>
+                              <m:r>
+                                <a:rPr lang="en-US" sz="1600" b="0" i="1" smtClean="0">
+                                  <a:latin typeface="Cambria Math" panose="02040503050406030204" pitchFamily="18" charset="0"/>
+                                  <a:ea typeface="Cambria Math" panose="02040503050406030204" pitchFamily="18" charset="0"/>
+                                </a:rPr>
+                                <m:t>1</m:t>
+                              </m:r>
+                              <m:r>
+                                <a:rPr lang="en-US" sz="1600" b="0" i="1" smtClean="0">
+                                  <a:latin typeface="Cambria Math" panose="02040503050406030204" pitchFamily="18" charset="0"/>
+                                  <a:ea typeface="Cambria Math" panose="02040503050406030204" pitchFamily="18" charset="0"/>
+                                </a:rPr>
+                                <m:t>/</m:t>
+                              </m:r>
+                              <m:r>
+                                <a:rPr lang="en-US" sz="1600" b="0" i="1" smtClean="0">
+                                  <a:latin typeface="Cambria Math" panose="02040503050406030204" pitchFamily="18" charset="0"/>
+                                  <a:ea typeface="Cambria Math" panose="02040503050406030204" pitchFamily="18" charset="0"/>
+                                </a:rPr>
+                                <m:t>2</m:t>
+                              </m:r>
+                            </m:sup>
+                          </m:sSup>
+                        </m:den>
+                      </m:f>
+                      <m:r>
+                        <a:rPr lang="en-US" sz="1600" b="0" i="1" smtClean="0">
+                          <a:latin typeface="Cambria Math" panose="02040503050406030204" pitchFamily="18" charset="0"/>
+                        </a:rPr>
+                        <m:t>𝑒𝑥𝑝</m:t>
+                      </m:r>
+                      <m:d>
+                        <m:dPr>
+                          <m:begChr m:val="["/>
+                          <m:endChr m:val="]"/>
+                          <m:ctrlPr>
+                            <a:rPr lang="en-US" sz="1600" b="0" i="1" smtClean="0">
+                              <a:latin typeface="Cambria Math" panose="02040503050406030204" pitchFamily="18" charset="0"/>
+                            </a:rPr>
+                          </m:ctrlPr>
+                        </m:dPr>
+                        <m:e>
+                          <m:f>
+                            <m:fPr>
+                              <m:ctrlPr>
+                                <a:rPr lang="en-US" sz="1600" b="0" i="1" smtClean="0">
+                                  <a:latin typeface="Cambria Math" panose="02040503050406030204" pitchFamily="18" charset="0"/>
+                                </a:rPr>
+                              </m:ctrlPr>
+                            </m:fPr>
+                            <m:num>
+                              <m:sSup>
+                                <m:sSupPr>
+                                  <m:ctrlPr>
+                                    <a:rPr lang="en-US" sz="1600" b="0" i="1" smtClean="0">
+                                      <a:latin typeface="Cambria Math" panose="02040503050406030204" pitchFamily="18" charset="0"/>
+                                    </a:rPr>
+                                  </m:ctrlPr>
+                                </m:sSupPr>
+                                <m:e>
+                                  <m:d>
+                                    <m:dPr>
+                                      <m:ctrlPr>
+                                        <a:rPr lang="en-US" sz="1600" i="1">
+                                          <a:latin typeface="Cambria Math" panose="02040503050406030204" pitchFamily="18" charset="0"/>
+                                        </a:rPr>
+                                      </m:ctrlPr>
+                                    </m:dPr>
+                                    <m:e>
+                                      <m:r>
+                                        <a:rPr lang="en-US" sz="1600" b="1" i="1">
+                                          <a:latin typeface="Cambria Math" panose="02040503050406030204" pitchFamily="18" charset="0"/>
+                                        </a:rPr>
+                                        <m:t>𝒙</m:t>
+                                      </m:r>
+                                      <m:r>
+                                        <a:rPr lang="en-US" sz="1600" i="1">
+                                          <a:latin typeface="Cambria Math" panose="02040503050406030204" pitchFamily="18" charset="0"/>
+                                        </a:rPr>
+                                        <m:t>−</m:t>
+                                      </m:r>
+                                      <m:r>
+                                        <a:rPr lang="en-US" sz="1600" i="1">
+                                          <a:latin typeface="Cambria Math" panose="02040503050406030204" pitchFamily="18" charset="0"/>
+                                          <a:ea typeface="Cambria Math" panose="02040503050406030204" pitchFamily="18" charset="0"/>
+                                        </a:rPr>
+                                        <m:t>𝜇</m:t>
+                                      </m:r>
+                                    </m:e>
+                                  </m:d>
+                                </m:e>
+                                <m:sup>
+                                  <m:r>
+                                    <a:rPr lang="en-US" sz="1600" b="0" i="1" smtClean="0">
+                                      <a:latin typeface="Cambria Math" panose="02040503050406030204" pitchFamily="18" charset="0"/>
+                                    </a:rPr>
+                                    <m:t>𝑇</m:t>
+                                  </m:r>
+                                </m:sup>
+                              </m:sSup>
+                              <m:sSup>
+                                <m:sSupPr>
+                                  <m:ctrlPr>
+                                    <a:rPr lang="en-US" sz="1600" b="0" i="1" smtClean="0">
+                                      <a:latin typeface="Cambria Math" panose="02040503050406030204" pitchFamily="18" charset="0"/>
+                                    </a:rPr>
+                                  </m:ctrlPr>
+                                </m:sSupPr>
+                                <m:e>
+                                  <m:r>
+                                    <m:rPr>
+                                      <m:sty m:val="p"/>
+                                    </m:rPr>
+                                    <a:rPr lang="el-GR" sz="1600" b="0" i="1" smtClean="0">
+                                      <a:latin typeface="Cambria Math" panose="02040503050406030204" pitchFamily="18" charset="0"/>
+                                      <a:ea typeface="Cambria Math" panose="02040503050406030204" pitchFamily="18" charset="0"/>
+                                    </a:rPr>
+                                    <m:t>Σ</m:t>
+                                  </m:r>
+                                </m:e>
+                                <m:sup>
+                                  <m:r>
+                                    <a:rPr lang="en-US" sz="1600" b="0" i="1" smtClean="0">
+                                      <a:latin typeface="Cambria Math" panose="02040503050406030204" pitchFamily="18" charset="0"/>
+                                    </a:rPr>
+                                    <m:t>−</m:t>
+                                  </m:r>
+                                  <m:r>
+                                    <a:rPr lang="en-US" sz="1600" b="0" i="1" smtClean="0">
+                                      <a:latin typeface="Cambria Math" panose="02040503050406030204" pitchFamily="18" charset="0"/>
+                                    </a:rPr>
+                                    <m:t>1</m:t>
+                                  </m:r>
+                                </m:sup>
+                              </m:sSup>
+                              <m:d>
+                                <m:dPr>
+                                  <m:ctrlPr>
+                                    <a:rPr lang="en-US" sz="1600" b="0" i="1" smtClean="0">
+                                      <a:latin typeface="Cambria Math" panose="02040503050406030204" pitchFamily="18" charset="0"/>
+                                    </a:rPr>
+                                  </m:ctrlPr>
+                                </m:dPr>
+                                <m:e>
+                                  <m:r>
+                                    <a:rPr lang="en-US" sz="1600" b="1" i="1" smtClean="0">
+                                      <a:latin typeface="Cambria Math" panose="02040503050406030204" pitchFamily="18" charset="0"/>
+                                    </a:rPr>
+                                    <m:t>𝒙</m:t>
+                                  </m:r>
+                                  <m:r>
+                                    <a:rPr lang="en-US" sz="1600" b="0" i="1" smtClean="0">
+                                      <a:latin typeface="Cambria Math" panose="02040503050406030204" pitchFamily="18" charset="0"/>
+                                    </a:rPr>
+                                    <m:t>−</m:t>
+                                  </m:r>
+                                  <m:r>
+                                    <a:rPr lang="en-US" sz="1600" b="0" i="1" smtClean="0">
+                                      <a:latin typeface="Cambria Math" panose="02040503050406030204" pitchFamily="18" charset="0"/>
+                                      <a:ea typeface="Cambria Math" panose="02040503050406030204" pitchFamily="18" charset="0"/>
+                                    </a:rPr>
+                                    <m:t>𝜇</m:t>
+                                  </m:r>
+                                </m:e>
+                              </m:d>
+                            </m:num>
+                            <m:den>
+                              <m:r>
+                                <a:rPr lang="en-US" sz="1600" b="0" i="1" smtClean="0">
+                                  <a:latin typeface="Cambria Math" panose="02040503050406030204" pitchFamily="18" charset="0"/>
+                                </a:rPr>
+                                <m:t>2</m:t>
+                              </m:r>
+                            </m:den>
+                          </m:f>
+                        </m:e>
+                      </m:d>
+                    </m:oMath>
+                  </m:oMathPara>
+                </a14:m>
+                <a:endParaRPr lang="en-US" sz="1600" dirty="0"/>
+              </a:p>
+              <a:p>
+                <a:pPr marL="0" lvl="0" indent="0">
+                  <a:buNone/>
+                </a:pPr>
+                <a:r>
+                  <a:rPr lang="en-US" sz="1600" dirty="0"/>
+                  <a:t> with </a:t>
+                </a:r>
+                <a14:m>
+                  <m:oMath xmlns:m="http://schemas.openxmlformats.org/officeDocument/2006/math">
+                    <m:r>
+                      <a:rPr lang="en-US" sz="1600">
+                        <a:latin typeface="Cambria Math" panose="02040503050406030204" pitchFamily="18" charset="0"/>
+                      </a:rPr>
+                      <m:t>𝜇</m:t>
+                    </m:r>
+                    <m:r>
+                      <a:rPr lang="en-US" sz="1600">
+                        <a:latin typeface="Cambria Math" panose="02040503050406030204" pitchFamily="18" charset="0"/>
+                      </a:rPr>
+                      <m:t>=</m:t>
+                    </m:r>
+                    <m:d>
+                      <m:dPr>
+                        <m:begChr m:val="["/>
+                        <m:endChr m:val="]"/>
+                        <m:ctrlPr>
+                          <a:rPr lang="ar-AE" sz="1600" i="1">
+                            <a:latin typeface="Cambria Math" panose="02040503050406030204" pitchFamily="18" charset="0"/>
+                          </a:rPr>
+                        </m:ctrlPr>
+                      </m:dPr>
+                      <m:e>
+                        <m:r>
+                          <a:rPr lang="ar-AE" sz="1600">
+                            <a:latin typeface="Cambria Math" panose="02040503050406030204" pitchFamily="18" charset="0"/>
+                          </a:rPr>
+                          <m:t>0</m:t>
+                        </m:r>
+                        <m:r>
+                          <a:rPr lang="ar-AE" sz="1600">
+                            <a:latin typeface="Cambria Math" panose="02040503050406030204" pitchFamily="18" charset="0"/>
+                          </a:rPr>
+                          <m:t>,</m:t>
+                        </m:r>
+                        <m:r>
+                          <a:rPr lang="ar-AE" sz="1600">
+                            <a:latin typeface="Cambria Math" panose="02040503050406030204" pitchFamily="18" charset="0"/>
+                          </a:rPr>
+                          <m:t>0</m:t>
+                        </m:r>
+                      </m:e>
+                    </m:d>
+                  </m:oMath>
+                </a14:m>
+                <a:r>
+                  <a:rPr lang="ar-AE" sz="1600" dirty="0"/>
+                  <a:t> </a:t>
+                </a:r>
+                <a:r>
+                  <a:rPr lang="en-US" sz="1600" dirty="0"/>
+                  <a:t>and </a:t>
+                </a:r>
+                <a14:m>
+                  <m:oMath xmlns:m="http://schemas.openxmlformats.org/officeDocument/2006/math">
+                    <m:r>
+                      <m:rPr>
+                        <m:sty m:val="p"/>
+                      </m:rPr>
+                      <a:rPr lang="el-GR" sz="1600" i="1" smtClean="0">
+                        <a:latin typeface="Cambria Math" panose="02040503050406030204" pitchFamily="18" charset="0"/>
+                        <a:ea typeface="Cambria Math" panose="02040503050406030204" pitchFamily="18" charset="0"/>
+                      </a:rPr>
+                      <m:t>Σ</m:t>
+                    </m:r>
+                    <m:r>
+                      <a:rPr lang="en-US" sz="1600">
+                        <a:latin typeface="Cambria Math" panose="02040503050406030204" pitchFamily="18" charset="0"/>
+                      </a:rPr>
+                      <m:t>=</m:t>
+                    </m:r>
+                    <m:d>
+                      <m:dPr>
+                        <m:begChr m:val="["/>
+                        <m:endChr m:val="]"/>
+                        <m:ctrlPr>
+                          <a:rPr lang="ar-AE" sz="1600" i="1">
+                            <a:latin typeface="Cambria Math" panose="02040503050406030204" pitchFamily="18" charset="0"/>
+                          </a:rPr>
+                        </m:ctrlPr>
+                      </m:dPr>
+                      <m:e>
+                        <m:m>
+                          <m:mPr>
+                            <m:mcs>
+                              <m:mc>
+                                <m:mcPr>
+                                  <m:count m:val="2"/>
+                                  <m:mcJc m:val="center"/>
+                                </m:mcPr>
+                              </m:mc>
+                            </m:mcs>
+                            <m:ctrlPr>
+                              <a:rPr lang="ar-AE" sz="1600" i="1">
+                                <a:latin typeface="Cambria Math" panose="02040503050406030204" pitchFamily="18" charset="0"/>
+                              </a:rPr>
+                            </m:ctrlPr>
+                          </m:mPr>
+                          <m:mr>
+                            <m:e>
+                              <m:r>
+                                <a:rPr lang="ar-AE" sz="1600">
+                                  <a:latin typeface="Cambria Math" panose="02040503050406030204" pitchFamily="18" charset="0"/>
+                                </a:rPr>
+                                <m:t>1</m:t>
+                              </m:r>
+                              <m:r>
+                                <a:rPr lang="ar-AE" sz="1600">
+                                  <a:latin typeface="Cambria Math" panose="02040503050406030204" pitchFamily="18" charset="0"/>
+                                </a:rPr>
+                                <m:t>.</m:t>
+                              </m:r>
+                              <m:r>
+                                <a:rPr lang="ar-AE" sz="1600">
+                                  <a:latin typeface="Cambria Math" panose="02040503050406030204" pitchFamily="18" charset="0"/>
+                                </a:rPr>
+                                <m:t>0</m:t>
+                              </m:r>
+                            </m:e>
+                            <m:e>
+                              <m:r>
+                                <a:rPr lang="ar-AE" sz="1600">
+                                  <a:latin typeface="Cambria Math" panose="02040503050406030204" pitchFamily="18" charset="0"/>
+                                </a:rPr>
+                                <m:t>0</m:t>
+                              </m:r>
+                              <m:r>
+                                <a:rPr lang="ar-AE" sz="1600">
+                                  <a:latin typeface="Cambria Math" panose="02040503050406030204" pitchFamily="18" charset="0"/>
+                                </a:rPr>
+                                <m:t>.</m:t>
+                              </m:r>
+                              <m:r>
+                                <a:rPr lang="ar-AE" sz="1600">
+                                  <a:latin typeface="Cambria Math" panose="02040503050406030204" pitchFamily="18" charset="0"/>
+                                </a:rPr>
+                                <m:t>0</m:t>
+                              </m:r>
+                            </m:e>
+                          </m:mr>
+                          <m:mr>
+                            <m:e>
+                              <m:r>
+                                <a:rPr lang="ar-AE" sz="1600">
+                                  <a:latin typeface="Cambria Math" panose="02040503050406030204" pitchFamily="18" charset="0"/>
+                                </a:rPr>
+                                <m:t>0</m:t>
+                              </m:r>
+                              <m:r>
+                                <a:rPr lang="ar-AE" sz="1600">
+                                  <a:latin typeface="Cambria Math" panose="02040503050406030204" pitchFamily="18" charset="0"/>
+                                </a:rPr>
+                                <m:t>.</m:t>
+                              </m:r>
+                              <m:r>
+                                <a:rPr lang="ar-AE" sz="1600">
+                                  <a:latin typeface="Cambria Math" panose="02040503050406030204" pitchFamily="18" charset="0"/>
+                                </a:rPr>
+                                <m:t>0</m:t>
+                              </m:r>
+                            </m:e>
+                            <m:e>
+                              <m:r>
+                                <a:rPr lang="ar-AE" sz="1600">
+                                  <a:latin typeface="Cambria Math" panose="02040503050406030204" pitchFamily="18" charset="0"/>
+                                </a:rPr>
+                                <m:t>1</m:t>
+                              </m:r>
+                              <m:r>
+                                <a:rPr lang="ar-AE" sz="1600">
+                                  <a:latin typeface="Cambria Math" panose="02040503050406030204" pitchFamily="18" charset="0"/>
+                                </a:rPr>
+                                <m:t>.</m:t>
+                              </m:r>
+                              <m:r>
+                                <a:rPr lang="ar-AE" sz="1600">
+                                  <a:latin typeface="Cambria Math" panose="02040503050406030204" pitchFamily="18" charset="0"/>
+                                </a:rPr>
+                                <m:t>0</m:t>
+                              </m:r>
+                            </m:e>
+                          </m:mr>
+                        </m:m>
+                      </m:e>
+                    </m:d>
+                  </m:oMath>
+                </a14:m>
+                <a:endParaRPr lang="ar-AE" sz="1600" dirty="0"/>
+              </a:p>
+              <a:p>
+                <a:pPr marL="0" lvl="0" indent="0">
+                  <a:buNone/>
+                </a:pPr>
+                <a:r>
+                  <a:rPr lang="en-US" sz="1600" dirty="0"/>
+                  <a:t>Marginal distributions </a:t>
+                </a:r>
+                <a:r>
+                  <a:rPr lang="en-US" sz="1600" b="1" dirty="0"/>
+                  <a:t>displayed on margins</a:t>
+                </a:r>
+                <a:r>
+                  <a:rPr lang="en-US" sz="1600" dirty="0"/>
+                  <a:t> of scatter plot</a:t>
+                </a:r>
+              </a:p>
+              <a:p>
+                <a:pPr lvl="0"/>
+                <a14:m>
+                  <m:oMathPara xmlns:m="http://schemas.openxmlformats.org/officeDocument/2006/math">
+                    <m:oMathParaPr>
+                      <m:jc m:val="centerGroup"/>
+                    </m:oMathParaPr>
+                    <m:oMath xmlns:m="http://schemas.openxmlformats.org/officeDocument/2006/math">
+                      <m:r>
+                        <a:rPr lang="en-US" sz="1600" b="0" i="1" smtClean="0">
+                          <a:latin typeface="Cambria Math" panose="02040503050406030204" pitchFamily="18" charset="0"/>
+                        </a:rPr>
+                        <m:t>𝑝</m:t>
+                      </m:r>
+                      <m:d>
+                        <m:dPr>
+                          <m:ctrlPr>
+                            <a:rPr lang="en-US" sz="1600" b="0" i="1" smtClean="0">
+                              <a:latin typeface="Cambria Math" panose="02040503050406030204" pitchFamily="18" charset="0"/>
+                            </a:rPr>
+                          </m:ctrlPr>
+                        </m:dPr>
+                        <m:e>
+                          <m:r>
+                            <a:rPr lang="en-US" sz="1600" b="0" i="1" smtClean="0">
+                              <a:latin typeface="Cambria Math" panose="02040503050406030204" pitchFamily="18" charset="0"/>
+                            </a:rPr>
+                            <m:t>𝑥</m:t>
+                          </m:r>
+                        </m:e>
+                      </m:d>
+                      <m:r>
+                        <a:rPr lang="en-US" sz="1600" b="0" i="1" smtClean="0">
+                          <a:latin typeface="Cambria Math" panose="02040503050406030204" pitchFamily="18" charset="0"/>
+                        </a:rPr>
+                        <m:t>=</m:t>
+                      </m:r>
+                      <m:nary>
+                        <m:naryPr>
+                          <m:chr m:val="∑"/>
+                          <m:limLoc m:val="subSup"/>
+                          <m:supHide m:val="on"/>
+                          <m:ctrlPr>
+                            <a:rPr lang="en-US" sz="1600" b="0" i="1" smtClean="0">
+                              <a:latin typeface="Cambria Math" panose="02040503050406030204" pitchFamily="18" charset="0"/>
+                            </a:rPr>
+                          </m:ctrlPr>
+                        </m:naryPr>
+                        <m:sub>
+                          <m:r>
+                            <m:rPr>
+                              <m:brk m:alnAt="9"/>
+                            </m:rPr>
+                            <a:rPr lang="en-US" sz="1600" b="0" i="1" smtClean="0">
+                              <a:latin typeface="Cambria Math" panose="02040503050406030204" pitchFamily="18" charset="0"/>
+                            </a:rPr>
+                            <m:t>𝑦</m:t>
+                          </m:r>
+                        </m:sub>
+                        <m:sup/>
+                        <m:e>
+                          <m:r>
+                            <a:rPr lang="en-US" sz="1600" i="1">
+                              <a:latin typeface="Cambria Math" panose="02040503050406030204" pitchFamily="18" charset="0"/>
+                            </a:rPr>
+                            <m:t>𝑝</m:t>
+                          </m:r>
+                          <m:d>
+                            <m:dPr>
+                              <m:ctrlPr>
+                                <a:rPr lang="en-US" sz="1600" i="1">
+                                  <a:latin typeface="Cambria Math" panose="02040503050406030204" pitchFamily="18" charset="0"/>
+                                </a:rPr>
+                              </m:ctrlPr>
+                            </m:dPr>
+                            <m:e>
+                              <m:r>
+                                <a:rPr lang="en-US" sz="1600" b="1" i="1">
+                                  <a:latin typeface="Cambria Math" panose="02040503050406030204" pitchFamily="18" charset="0"/>
+                                </a:rPr>
+                                <m:t>𝒙</m:t>
+                              </m:r>
+                            </m:e>
+                          </m:d>
+                        </m:e>
+                      </m:nary>
+                    </m:oMath>
+                  </m:oMathPara>
+                </a14:m>
+                <a:endParaRPr lang="en-US" sz="1600" dirty="0"/>
+              </a:p>
+              <a:p>
+                <a:pPr lvl="0" indent="0">
+                  <a:buNone/>
+                </a:pPr>
+                <a:r>
+                  <a:rPr lang="en-US" sz="1600" dirty="0">
+                    <a:latin typeface="Courier"/>
+                  </a:rPr>
+                  <a:t>## x mean = -0.01325  variance = 0.9566</a:t>
+                </a:r>
+              </a:p>
+              <a:p>
+                <a:pPr lvl="0"/>
+                <a14:m>
+                  <m:oMath xmlns:m="http://schemas.openxmlformats.org/officeDocument/2006/math">
+                    <m:r>
+                      <a:rPr lang="en-US" sz="1600" i="1">
+                        <a:latin typeface="Cambria Math" panose="02040503050406030204" pitchFamily="18" charset="0"/>
+                      </a:rPr>
+                      <m:t>𝑝</m:t>
+                    </m:r>
+                    <m:d>
+                      <m:dPr>
+                        <m:ctrlPr>
+                          <a:rPr lang="en-US" sz="1600" i="1">
+                            <a:latin typeface="Cambria Math" panose="02040503050406030204" pitchFamily="18" charset="0"/>
+                          </a:rPr>
+                        </m:ctrlPr>
+                      </m:dPr>
+                      <m:e>
+                        <m:r>
+                          <a:rPr lang="en-US" sz="1600" b="0" i="1" smtClean="0">
+                            <a:latin typeface="Cambria Math" panose="02040503050406030204" pitchFamily="18" charset="0"/>
+                          </a:rPr>
+                          <m:t>𝑦</m:t>
+                        </m:r>
+                      </m:e>
+                    </m:d>
+                    <m:r>
+                      <a:rPr lang="en-US" sz="1600" i="1">
+                        <a:latin typeface="Cambria Math" panose="02040503050406030204" pitchFamily="18" charset="0"/>
+                      </a:rPr>
+                      <m:t>=</m:t>
+                    </m:r>
+                    <m:nary>
+                      <m:naryPr>
+                        <m:chr m:val="∑"/>
+                        <m:limLoc m:val="subSup"/>
+                        <m:supHide m:val="on"/>
+                        <m:ctrlPr>
+                          <a:rPr lang="en-US" sz="1600" i="1">
+                            <a:latin typeface="Cambria Math" panose="02040503050406030204" pitchFamily="18" charset="0"/>
+                          </a:rPr>
+                        </m:ctrlPr>
+                      </m:naryPr>
+                      <m:sub>
+                        <m:r>
+                          <a:rPr lang="en-US" sz="1600" b="0" i="1" smtClean="0">
+                            <a:latin typeface="Cambria Math" panose="02040503050406030204" pitchFamily="18" charset="0"/>
+                          </a:rPr>
+                          <m:t>𝑥</m:t>
+                        </m:r>
+                      </m:sub>
+                      <m:sup/>
+                      <m:e>
+                        <m:r>
+                          <a:rPr lang="en-US" sz="1600" i="1">
+                            <a:latin typeface="Cambria Math" panose="02040503050406030204" pitchFamily="18" charset="0"/>
+                          </a:rPr>
+                          <m:t>𝑝</m:t>
+                        </m:r>
+                        <m:d>
+                          <m:dPr>
+                            <m:ctrlPr>
+                              <a:rPr lang="en-US" sz="1600" i="1">
+                                <a:latin typeface="Cambria Math" panose="02040503050406030204" pitchFamily="18" charset="0"/>
+                              </a:rPr>
+                            </m:ctrlPr>
+                          </m:dPr>
+                          <m:e>
+                            <m:r>
+                              <a:rPr lang="en-US" sz="1600" b="1" i="1">
+                                <a:latin typeface="Cambria Math" panose="02040503050406030204" pitchFamily="18" charset="0"/>
+                              </a:rPr>
+                              <m:t>𝒙</m:t>
+                            </m:r>
+                          </m:e>
+                        </m:d>
+                      </m:e>
+                    </m:nary>
+                    <m:r>
+                      <a:rPr lang="en-US" sz="1600" i="1">
+                        <a:latin typeface="Cambria Math" panose="02040503050406030204" pitchFamily="18" charset="0"/>
+                      </a:rPr>
+                      <m:t> </m:t>
+                    </m:r>
+                  </m:oMath>
+                </a14:m>
+                <a:r>
+                  <a:rPr lang="en-US" sz="1600" dirty="0">
+                    <a:latin typeface="Courier"/>
+                  </a:rPr>
+                  <a:t>
+## y mean = -0.02551 variance = 1.0102</a:t>
+                </a:r>
+                <a:endParaRPr sz="1600" dirty="0">
+                  <a:latin typeface="Courier"/>
+                </a:endParaRPr>
+              </a:p>
+            </p:txBody>
+          </p:sp>
+        </mc:Choice>
+        <mc:Fallback xmlns="">
+          <p:sp>
+            <p:nvSpPr>
+              <p:cNvPr id="4" name="Text Placeholder 3"/>
+              <p:cNvSpPr>
+                <a:spLocks noGrp="1" noRot="1" noChangeAspect="1" noMove="1" noResize="1" noEditPoints="1" noAdjustHandles="1" noChangeArrowheads="1" noChangeShapeType="1" noTextEdit="1"/>
+              </p:cNvSpPr>
+              <p:nvPr>
+                <p:ph type="body" sz="half" idx="2"/>
+              </p:nvPr>
+            </p:nvSpPr>
+            <p:spPr>
+              <a:xfrm>
+                <a:off x="141890" y="528146"/>
+                <a:ext cx="4272455" cy="4325506"/>
+              </a:xfrm>
+              <a:blipFill>
+                <a:blip r:embed="rId3"/>
+                <a:stretch>
+                  <a:fillRect l="-713" t="-423" b="-13963"/>
+                </a:stretch>
+              </a:blipFill>
+            </p:spPr>
+            <p:txBody>
+              <a:bodyPr/>
+              <a:lstStyle/>
+              <a:p>
+                <a:r>
+                  <a:rPr lang="en-US">
+                    <a:noFill/>
+                  </a:rPr>
+                  <a:t> </a:t>
+                </a:r>
+              </a:p>
+            </p:txBody>
+          </p:sp>
+        </mc:Fallback>
+      </mc:AlternateContent>
+    </p:spTree>
+  </p:cSld>
+  <p:clrMapOvr>
+    <a:masterClrMapping/>
+  </p:clrMapOvr>
   <p:timing>
     <p:tnLst>
       <p:par>
@@ -29021,9 +30440,71 @@
                                           </p:stCondLst>
                                         </p:cTn>
                                         <p:tgtEl>
-                                          <p:spTgt spid="3">
+                                          <p:spTgt spid="4">
                                             <p:txEl>
-                                              <p:pRg st="1" end="1"/>
+                                              <p:pRg st="4" end="4"/>
+                                            </p:txEl>
+                                          </p:spTgt>
+                                        </p:tgtEl>
+                                        <p:attrNameLst>
+                                          <p:attrName>style.visibility</p:attrName>
+                                        </p:attrNameLst>
+                                      </p:cBhvr>
+                                      <p:to>
+                                        <p:strVal val="visible"/>
+                                      </p:to>
+                                    </p:set>
+                                  </p:childTnLst>
+                                </p:cTn>
+                              </p:par>
+                              <p:par>
+                                <p:cTn id="7" presetID="1" presetClass="entr" presetSubtype="0" fill="hold" nodeType="withEffect">
+                                  <p:stCondLst>
+                                    <p:cond delay="0"/>
+                                  </p:stCondLst>
+                                  <p:childTnLst>
+                                    <p:set>
+                                      <p:cBhvr>
+                                        <p:cTn id="8" dur="1" fill="hold">
+                                          <p:stCondLst>
+                                            <p:cond delay="0"/>
+                                          </p:stCondLst>
+                                        </p:cTn>
+                                        <p:tgtEl>
+                                          <p:spTgt spid="4">
+                                            <p:txEl>
+                                              <p:pRg st="5" end="5"/>
+                                            </p:txEl>
+                                          </p:spTgt>
+                                        </p:tgtEl>
+                                        <p:attrNameLst>
+                                          <p:attrName>style.visibility</p:attrName>
+                                        </p:attrNameLst>
+                                      </p:cBhvr>
+                                      <p:to>
+                                        <p:strVal val="visible"/>
+                                      </p:to>
+                                    </p:set>
+                                  </p:childTnLst>
+                                </p:cTn>
+                              </p:par>
+                              <p:par>
+                                <p:cTn id="9" presetID="1" presetClass="entr" presetSubtype="0" fill="hold" nodeType="withEffect">
+                                  <p:stCondLst>
+                                    <p:cond delay="0"/>
+                                  </p:stCondLst>
+                                  <p:childTnLst>
+                                    <p:set>
+                                      <p:cBhvr>
+                                        <p:cTn id="10" dur="1" fill="hold">
+                                          <p:stCondLst>
+                                            <p:cond delay="0"/>
+                                          </p:stCondLst>
+                                        </p:cTn>
+                                        <p:tgtEl>
+                                          <p:spTgt spid="4">
+                                            <p:txEl>
+                                              <p:pRg st="6" end="6"/>
                                             </p:txEl>
                                           </p:spTgt>
                                         </p:tgtEl>
@@ -29045,145 +30526,34 @@
                     </p:cTn>
                   </p:par>
                   <p:par>
-                    <p:cTn id="7" fill="hold">
+                    <p:cTn id="11" fill="hold">
                       <p:stCondLst>
                         <p:cond delay="indefinite"/>
                       </p:stCondLst>
                       <p:childTnLst>
                         <p:par>
-                          <p:cTn id="8" fill="hold">
+                          <p:cTn id="12" fill="hold">
                             <p:stCondLst>
                               <p:cond delay="0"/>
                             </p:stCondLst>
                             <p:childTnLst>
                               <p:par>
-                                <p:cTn id="9" presetID="1" presetClass="entr" presetSubtype="0" fill="hold" nodeType="clickEffect">
+                                <p:cTn id="13" presetID="1" presetClass="entr" presetSubtype="0" fill="hold" nodeType="clickEffect">
                                   <p:stCondLst>
                                     <p:cond delay="0"/>
                                   </p:stCondLst>
                                   <p:childTnLst>
                                     <p:set>
                                       <p:cBhvr>
-                                        <p:cTn id="10" dur="1" fill="hold">
+                                        <p:cTn id="14" dur="1" fill="hold">
                                           <p:stCondLst>
                                             <p:cond delay="0"/>
                                           </p:stCondLst>
                                         </p:cTn>
                                         <p:tgtEl>
-                                          <p:spTgt spid="3">
+                                          <p:spTgt spid="4">
                                             <p:txEl>
-                                              <p:pRg st="2" end="2"/>
-                                            </p:txEl>
-                                          </p:spTgt>
-                                        </p:tgtEl>
-                                        <p:attrNameLst>
-                                          <p:attrName>style.visibility</p:attrName>
-                                        </p:attrNameLst>
-                                      </p:cBhvr>
-                                      <p:to>
-                                        <p:strVal val="visible"/>
-                                      </p:to>
-                                    </p:set>
-                                  </p:childTnLst>
-                                </p:cTn>
-                              </p:par>
-                              <p:par>
-                                <p:cTn id="11" presetID="1" presetClass="entr" presetSubtype="0" fill="hold" nodeType="withEffect">
-                                  <p:stCondLst>
-                                    <p:cond delay="0"/>
-                                  </p:stCondLst>
-                                  <p:childTnLst>
-                                    <p:set>
-                                      <p:cBhvr>
-                                        <p:cTn id="12" dur="1" fill="hold">
-                                          <p:stCondLst>
-                                            <p:cond delay="0"/>
-                                          </p:stCondLst>
-                                        </p:cTn>
-                                        <p:tgtEl>
-                                          <p:spTgt spid="3">
-                                            <p:txEl>
-                                              <p:pRg st="3" end="3"/>
-                                            </p:txEl>
-                                          </p:spTgt>
-                                        </p:tgtEl>
-                                        <p:attrNameLst>
-                                          <p:attrName>style.visibility</p:attrName>
-                                        </p:attrNameLst>
-                                      </p:cBhvr>
-                                      <p:to>
-                                        <p:strVal val="visible"/>
-                                      </p:to>
-                                    </p:set>
-                                  </p:childTnLst>
-                                </p:cTn>
-                              </p:par>
-                            </p:childTnLst>
-                          </p:cTn>
-                        </p:par>
-                      </p:childTnLst>
-                    </p:cTn>
-                  </p:par>
-                  <p:par>
-                    <p:cTn id="13" fill="hold">
-                      <p:stCondLst>
-                        <p:cond delay="indefinite"/>
-                      </p:stCondLst>
-                      <p:childTnLst>
-                        <p:par>
-                          <p:cTn id="14" fill="hold">
-                            <p:stCondLst>
-                              <p:cond delay="0"/>
-                            </p:stCondLst>
-                            <p:childTnLst>
-                              <p:par>
-                                <p:cTn id="15" presetID="1" presetClass="entr" presetSubtype="0" fill="hold" nodeType="clickEffect">
-                                  <p:stCondLst>
-                                    <p:cond delay="0"/>
-                                  </p:stCondLst>
-                                  <p:childTnLst>
-                                    <p:set>
-                                      <p:cBhvr>
-                                        <p:cTn id="16" dur="1" fill="hold">
-                                          <p:stCondLst>
-                                            <p:cond delay="0"/>
-                                          </p:stCondLst>
-                                        </p:cTn>
-                                        <p:tgtEl>
-                                          <p:spTgt spid="3">
-                                            <p:txEl>
-                                              <p:pRg st="4" end="4"/>
-                                            </p:txEl>
-                                          </p:spTgt>
-                                        </p:tgtEl>
-                                        <p:attrNameLst>
-                                          <p:attrName>style.visibility</p:attrName>
-                                        </p:attrNameLst>
-                                      </p:cBhvr>
-                                      <p:to>
-                                        <p:strVal val="visible"/>
-                                      </p:to>
-                                    </p:set>
-                                  </p:childTnLst>
-                                </p:cTn>
-                              </p:par>
-                              <p:par>
-                                <p:cTn id="17" presetID="1" presetClass="entr" presetSubtype="0" fill="hold" nodeType="withEffect">
-                                  <p:stCondLst>
-                                    <p:cond delay="0"/>
-                                  </p:stCondLst>
-                                  <p:childTnLst>
-                                    <p:set>
-                                      <p:cBhvr>
-                                        <p:cTn id="18" dur="1" fill="hold">
-                                          <p:stCondLst>
-                                            <p:cond delay="0"/>
-                                          </p:stCondLst>
-                                        </p:cTn>
-                                        <p:tgtEl>
-                                          <p:spTgt spid="3">
-                                            <p:txEl>
-                                              <p:pRg st="5" end="5"/>
+                                              <p:pRg st="7" end="7"/>
                                             </p:txEl>
                                           </p:spTgt>
                                         </p:tgtEl>
@@ -29226,381 +30596,6 @@
       </p:par>
     </p:tnLst>
   </p:timing>
-</p:sld>
-</file>
-
-<file path=ppt/slides/slide43.xml><?xml version="1.0" encoding="utf-8"?>
-<p:sld xmlns:a="http://schemas.openxmlformats.org/drawingml/2006/main" xmlns:r="http://schemas.openxmlformats.org/officeDocument/2006/relationships" xmlns:p="http://schemas.openxmlformats.org/presentationml/2006/main">
-  <p:cSld>
-    <p:spTree>
-      <p:nvGrpSpPr>
-        <p:cNvPr id="1" name=""/>
-        <p:cNvGrpSpPr/>
-        <p:nvPr/>
-      </p:nvGrpSpPr>
-      <p:grpSpPr>
-        <a:xfrm>
-          <a:off x="0" y="0"/>
-          <a:ext cx="0" cy="0"/>
-          <a:chOff x="0" y="0"/>
-          <a:chExt cx="0" cy="0"/>
-        </a:xfrm>
-      </p:grpSpPr>
-      <p:sp>
-        <p:nvSpPr>
-          <p:cNvPr id="2" name="Title 1"/>
-          <p:cNvSpPr>
-            <a:spLocks noGrp="1"/>
-          </p:cNvSpPr>
-          <p:nvPr>
-            <p:ph type="title"/>
-          </p:nvPr>
-        </p:nvSpPr>
-        <p:spPr>
-          <a:xfrm>
-            <a:off x="457201" y="204787"/>
-            <a:ext cx="3837007" cy="871538"/>
-          </a:xfrm>
-        </p:spPr>
-        <p:txBody>
-          <a:bodyPr>
-            <a:normAutofit/>
-          </a:bodyPr>
-          <a:lstStyle/>
-          <a:p>
-            <a:pPr marL="0" lvl="0" indent="0">
-              <a:buNone/>
-            </a:pPr>
-            <a:r>
-              <a:rPr sz="2000" dirty="0"/>
-              <a:t>Example: Marginal Distribution</a:t>
-            </a:r>
-          </a:p>
-        </p:txBody>
-      </p:sp>
-      <mc:AlternateContent xmlns:mc="http://schemas.openxmlformats.org/markup-compatibility/2006" xmlns:a14="http://schemas.microsoft.com/office/drawing/2010/main">
-        <mc:Choice Requires="a14">
-          <p:sp>
-            <p:nvSpPr>
-              <p:cNvPr id="4" name="Text Placeholder 3"/>
-              <p:cNvSpPr>
-                <a:spLocks noGrp="1"/>
-              </p:cNvSpPr>
-              <p:nvPr>
-                <p:ph type="body" sz="half" idx="2"/>
-              </p:nvPr>
-            </p:nvSpPr>
-            <p:spPr>
-              <a:xfrm>
-                <a:off x="457200" y="1076326"/>
-                <a:ext cx="3806141" cy="3777325"/>
-              </a:xfrm>
-            </p:spPr>
-            <p:txBody>
-              <a:bodyPr>
-                <a:noAutofit/>
-              </a:bodyPr>
-              <a:lstStyle/>
-              <a:p>
-                <a:pPr marL="0" lvl="0" indent="0">
-                  <a:buNone/>
-                </a:pPr>
-                <a:r>
-                  <a:rPr sz="1600" b="1" dirty="0"/>
-                  <a:t>Marginal distributions</a:t>
-                </a:r>
-                <a:r>
-                  <a:rPr sz="1600" dirty="0"/>
-                  <a:t> of multivariate Normal with </a:t>
-                </a:r>
-                <a14:m>
-                  <m:oMath xmlns:m="http://schemas.openxmlformats.org/officeDocument/2006/math">
-                    <m:r>
-                      <a:rPr sz="1600">
-                        <a:latin typeface="Cambria Math" panose="02040503050406030204" pitchFamily="18" charset="0"/>
-                      </a:rPr>
-                      <m:t>𝜇</m:t>
-                    </m:r>
-                    <m:r>
-                      <a:rPr sz="1600">
-                        <a:latin typeface="Cambria Math" panose="02040503050406030204" pitchFamily="18" charset="0"/>
-                      </a:rPr>
-                      <m:t>=</m:t>
-                    </m:r>
-                    <m:d>
-                      <m:dPr>
-                        <m:begChr m:val="["/>
-                        <m:endChr m:val="]"/>
-                        <m:ctrlPr>
-                          <a:rPr sz="1600" i="1">
-                            <a:latin typeface="Cambria Math" panose="02040503050406030204" pitchFamily="18" charset="0"/>
-                          </a:rPr>
-                        </m:ctrlPr>
-                      </m:dPr>
-                      <m:e>
-                        <m:r>
-                          <a:rPr sz="1600">
-                            <a:latin typeface="Cambria Math" panose="02040503050406030204" pitchFamily="18" charset="0"/>
-                          </a:rPr>
-                          <m:t>0</m:t>
-                        </m:r>
-                        <m:r>
-                          <a:rPr sz="1600">
-                            <a:latin typeface="Cambria Math" panose="02040503050406030204" pitchFamily="18" charset="0"/>
-                          </a:rPr>
-                          <m:t>,</m:t>
-                        </m:r>
-                        <m:r>
-                          <a:rPr sz="1600">
-                            <a:latin typeface="Cambria Math" panose="02040503050406030204" pitchFamily="18" charset="0"/>
-                          </a:rPr>
-                          <m:t>0</m:t>
-                        </m:r>
-                      </m:e>
-                    </m:d>
-                  </m:oMath>
-                </a14:m>
-                <a:r>
-                  <a:rPr sz="1600" dirty="0"/>
-                  <a:t> and </a:t>
-                </a:r>
-                <a14:m>
-                  <m:oMath xmlns:m="http://schemas.openxmlformats.org/officeDocument/2006/math">
-                    <m:r>
-                      <a:rPr sz="1600">
-                        <a:latin typeface="Cambria Math" panose="02040503050406030204" pitchFamily="18" charset="0"/>
-                      </a:rPr>
-                      <m:t>𝜎</m:t>
-                    </m:r>
-                    <m:r>
-                      <a:rPr sz="1600">
-                        <a:latin typeface="Cambria Math" panose="02040503050406030204" pitchFamily="18" charset="0"/>
-                      </a:rPr>
-                      <m:t>=</m:t>
-                    </m:r>
-                    <m:d>
-                      <m:dPr>
-                        <m:begChr m:val="["/>
-                        <m:endChr m:val="]"/>
-                        <m:ctrlPr>
-                          <a:rPr sz="1600" i="1">
-                            <a:latin typeface="Cambria Math" panose="02040503050406030204" pitchFamily="18" charset="0"/>
-                          </a:rPr>
-                        </m:ctrlPr>
-                      </m:dPr>
-                      <m:e>
-                        <m:m>
-                          <m:mPr>
-                            <m:mcs>
-                              <m:mc>
-                                <m:mcPr>
-                                  <m:count m:val="2"/>
-                                  <m:mcJc m:val="center"/>
-                                </m:mcPr>
-                              </m:mc>
-                            </m:mcs>
-                            <m:ctrlPr>
-                              <a:rPr sz="1600" i="1">
-                                <a:latin typeface="Cambria Math" panose="02040503050406030204" pitchFamily="18" charset="0"/>
-                              </a:rPr>
-                            </m:ctrlPr>
-                          </m:mPr>
-                          <m:mr>
-                            <m:e>
-                              <m:r>
-                                <a:rPr sz="1600">
-                                  <a:latin typeface="Cambria Math" panose="02040503050406030204" pitchFamily="18" charset="0"/>
-                                </a:rPr>
-                                <m:t>1</m:t>
-                              </m:r>
-                              <m:r>
-                                <a:rPr sz="1600">
-                                  <a:latin typeface="Cambria Math" panose="02040503050406030204" pitchFamily="18" charset="0"/>
-                                </a:rPr>
-                                <m:t>.</m:t>
-                              </m:r>
-                              <m:r>
-                                <a:rPr sz="1600">
-                                  <a:latin typeface="Cambria Math" panose="02040503050406030204" pitchFamily="18" charset="0"/>
-                                </a:rPr>
-                                <m:t>0</m:t>
-                              </m:r>
-                            </m:e>
-                            <m:e>
-                              <m:r>
-                                <a:rPr sz="1600">
-                                  <a:latin typeface="Cambria Math" panose="02040503050406030204" pitchFamily="18" charset="0"/>
-                                </a:rPr>
-                                <m:t>0</m:t>
-                              </m:r>
-                              <m:r>
-                                <a:rPr sz="1600">
-                                  <a:latin typeface="Cambria Math" panose="02040503050406030204" pitchFamily="18" charset="0"/>
-                                </a:rPr>
-                                <m:t>.</m:t>
-                              </m:r>
-                              <m:r>
-                                <a:rPr sz="1600">
-                                  <a:latin typeface="Cambria Math" panose="02040503050406030204" pitchFamily="18" charset="0"/>
-                                </a:rPr>
-                                <m:t>0</m:t>
-                              </m:r>
-                            </m:e>
-                          </m:mr>
-                          <m:mr>
-                            <m:e>
-                              <m:r>
-                                <a:rPr sz="1600">
-                                  <a:latin typeface="Cambria Math" panose="02040503050406030204" pitchFamily="18" charset="0"/>
-                                </a:rPr>
-                                <m:t>0</m:t>
-                              </m:r>
-                              <m:r>
-                                <a:rPr sz="1600">
-                                  <a:latin typeface="Cambria Math" panose="02040503050406030204" pitchFamily="18" charset="0"/>
-                                </a:rPr>
-                                <m:t>.</m:t>
-                              </m:r>
-                              <m:r>
-                                <a:rPr sz="1600">
-                                  <a:latin typeface="Cambria Math" panose="02040503050406030204" pitchFamily="18" charset="0"/>
-                                </a:rPr>
-                                <m:t>0</m:t>
-                              </m:r>
-                            </m:e>
-                            <m:e>
-                              <m:r>
-                                <a:rPr sz="1600">
-                                  <a:latin typeface="Cambria Math" panose="02040503050406030204" pitchFamily="18" charset="0"/>
-                                </a:rPr>
-                                <m:t>1</m:t>
-                              </m:r>
-                              <m:r>
-                                <a:rPr sz="1600">
-                                  <a:latin typeface="Cambria Math" panose="02040503050406030204" pitchFamily="18" charset="0"/>
-                                </a:rPr>
-                                <m:t>.</m:t>
-                              </m:r>
-                              <m:r>
-                                <a:rPr sz="1600">
-                                  <a:latin typeface="Cambria Math" panose="02040503050406030204" pitchFamily="18" charset="0"/>
-                                </a:rPr>
-                                <m:t>0</m:t>
-                              </m:r>
-                            </m:e>
-                          </m:mr>
-                        </m:m>
-                      </m:e>
-                    </m:d>
-                  </m:oMath>
-                </a14:m>
-                <a:endParaRPr sz="1600" dirty="0"/>
-              </a:p>
-              <a:p>
-                <a:pPr marL="0" lvl="0" indent="0">
-                  <a:buNone/>
-                </a:pPr>
-                <a:r>
-                  <a:rPr sz="1600" dirty="0"/>
-                  <a:t>Marginal distributions </a:t>
-                </a:r>
-                <a:r>
-                  <a:rPr sz="1600" b="1" dirty="0"/>
-                  <a:t>displayed on margins</a:t>
-                </a:r>
-                <a:r>
-                  <a:rPr sz="1600" dirty="0"/>
-                  <a:t> of scatter plot</a:t>
-                </a:r>
-              </a:p>
-              <a:p>
-                <a:pPr lvl="0" indent="0">
-                  <a:buNone/>
-                </a:pPr>
-                <a:r>
-                  <a:rPr sz="1600" dirty="0">
-                    <a:latin typeface="Courier"/>
-                  </a:rPr>
-                  <a:t>## For x mean = -0.01325  variance = 0.9566
-## For y mean = -0.02551 variance = 1.0102</a:t>
-                </a:r>
-              </a:p>
-            </p:txBody>
-          </p:sp>
-        </mc:Choice>
-        <mc:Fallback xmlns="">
-          <p:sp>
-            <p:nvSpPr>
-              <p:cNvPr id="4" name="Text Placeholder 3"/>
-              <p:cNvSpPr>
-                <a:spLocks noGrp="1" noRot="1" noChangeAspect="1" noMove="1" noResize="1" noEditPoints="1" noAdjustHandles="1" noChangeArrowheads="1" noChangeShapeType="1" noTextEdit="1"/>
-              </p:cNvSpPr>
-              <p:nvPr>
-                <p:ph type="body" sz="half" idx="2"/>
-              </p:nvPr>
-            </p:nvSpPr>
-            <p:spPr>
-              <a:xfrm>
-                <a:off x="457200" y="1076326"/>
-                <a:ext cx="3806141" cy="3777325"/>
-              </a:xfrm>
-              <a:blipFill>
-                <a:blip r:embed="rId2"/>
-                <a:stretch>
-                  <a:fillRect l="-801" t="-485"/>
-                </a:stretch>
-              </a:blipFill>
-            </p:spPr>
-            <p:txBody>
-              <a:bodyPr/>
-              <a:lstStyle/>
-              <a:p>
-                <a:r>
-                  <a:rPr lang="en-US">
-                    <a:noFill/>
-                  </a:rPr>
-                  <a:t> </a:t>
-                </a:r>
-              </a:p>
-            </p:txBody>
-          </p:sp>
-        </mc:Fallback>
-      </mc:AlternateContent>
-      <p:pic>
-        <p:nvPicPr>
-          <p:cNvPr id="3" name="Picture 1" descr="03b_WhenOneThingDependsOnAother_files/figure-pptx/unnamed-chunk-2-1.png"/>
-          <p:cNvPicPr>
-            <a:picLocks noGrp="1" noChangeAspect="1"/>
-          </p:cNvPicPr>
-          <p:nvPr/>
-        </p:nvPicPr>
-        <p:blipFill>
-          <a:blip r:embed="rId3"/>
-          <a:stretch>
-            <a:fillRect/>
-          </a:stretch>
-        </p:blipFill>
-        <p:spPr bwMode="auto">
-          <a:xfrm>
-            <a:off x="4174603" y="149184"/>
-            <a:ext cx="4948499" cy="4948499"/>
-          </a:xfrm>
-          <a:prstGeom prst="rect">
-            <a:avLst/>
-          </a:prstGeom>
-          <a:noFill/>
-          <a:ln w="9525">
-            <a:noFill/>
-            <a:headEnd/>
-            <a:tailEnd/>
-          </a:ln>
-        </p:spPr>
-      </p:pic>
-    </p:spTree>
-  </p:cSld>
-  <p:clrMapOvr>
-    <a:masterClrMapping/>
-  </p:clrMapOvr>
 </p:sld>
 </file>
 
@@ -29677,9 +30672,7 @@
               </a:bodyPr>
               <a:lstStyle/>
               <a:p>
-                <a:pPr marL="0" lvl="0" indent="0">
-                  <a:buNone/>
-                </a:pPr>
+                <a:pPr lvl="0"/>
                 <a:r>
                   <a:rPr sz="1600" b="1" dirty="0"/>
                   <a:t>Marginal distributions</a:t>
@@ -29737,15 +30730,23 @@
                 </a14:m>
                 <a:r>
                   <a:rPr sz="1600" dirty="0"/>
-                  <a:t> and </a:t>
+                  <a:t> and</a:t>
+                </a:r>
+                <a:r>
+                  <a:rPr lang="en-US" sz="1600" dirty="0"/>
+                  <a:t> </a:t>
                 </a:r>
                 <a14:m>
                   <m:oMath xmlns:m="http://schemas.openxmlformats.org/officeDocument/2006/math">
                     <m:r>
-                      <a:rPr sz="1600">
+                      <m:rPr>
+                        <m:sty m:val="p"/>
+                      </m:rPr>
+                      <a:rPr lang="el-GR" sz="1600" i="1">
                         <a:latin typeface="Cambria Math" panose="02040503050406030204" pitchFamily="18" charset="0"/>
+                        <a:ea typeface="Cambria Math" panose="02040503050406030204" pitchFamily="18" charset="0"/>
                       </a:rPr>
-                      <m:t>𝜎</m:t>
+                      <m:t>Σ</m:t>
                     </m:r>
                     <m:r>
                       <a:rPr sz="1600">
@@ -30052,9 +31053,7 @@
               </a:bodyPr>
               <a:lstStyle/>
               <a:p>
-                <a:pPr marL="0" lvl="0" indent="0">
-                  <a:buNone/>
-                </a:pPr>
+                <a:pPr lvl="0"/>
                 <a:r>
                   <a:rPr sz="1600" b="1" dirty="0"/>
                   <a:t>Marginal distributions</a:t>
@@ -30112,15 +31111,23 @@
                 </a14:m>
                 <a:r>
                   <a:rPr sz="1600" dirty="0"/>
-                  <a:t> and </a:t>
+                  <a:t> and</a:t>
+                </a:r>
+                <a:r>
+                  <a:rPr lang="en-US" sz="1600" dirty="0"/>
+                  <a:t> </a:t>
                 </a:r>
                 <a14:m>
                   <m:oMath xmlns:m="http://schemas.openxmlformats.org/officeDocument/2006/math">
                     <m:r>
-                      <a:rPr sz="1600">
+                      <m:rPr>
+                        <m:sty m:val="p"/>
+                      </m:rPr>
+                      <a:rPr lang="el-GR" sz="1600" i="1">
                         <a:latin typeface="Cambria Math" panose="02040503050406030204" pitchFamily="18" charset="0"/>
+                        <a:ea typeface="Cambria Math" panose="02040503050406030204" pitchFamily="18" charset="0"/>
                       </a:rPr>
-                      <m:t>𝜎</m:t>
+                      <m:t>Σ</m:t>
                     </m:r>
                     <m:r>
                       <a:rPr sz="1600">
@@ -30467,8 +31474,8 @@
           </a:p>
         </p:txBody>
       </p:sp>
-      <mc:AlternateContent xmlns:mc="http://schemas.openxmlformats.org/markup-compatibility/2006">
-        <mc:Choice xmlns:a14="http://schemas.microsoft.com/office/drawing/2010/main" Requires="a14">
+      <mc:AlternateContent xmlns:mc="http://schemas.openxmlformats.org/markup-compatibility/2006" xmlns:a14="http://schemas.microsoft.com/office/drawing/2010/main">
+        <mc:Choice Requires="a14">
           <p:sp>
             <p:nvSpPr>
               <p:cNvPr id="3" name="Content Placeholder 2"/>
@@ -30495,7 +31502,21 @@
                 </a:r>
                 <a:r>
                   <a:rPr lang="en-US" dirty="0"/>
-                  <a:t>, with PDF </a:t>
+                  <a:t> of variable </a:t>
+                </a:r>
+                <a14:m>
+                  <m:oMath xmlns:m="http://schemas.openxmlformats.org/officeDocument/2006/math">
+                    <m:r>
+                      <a:rPr lang="en-US" b="0" i="1" smtClean="0">
+                        <a:latin typeface="Cambria Math" panose="02040503050406030204" pitchFamily="18" charset="0"/>
+                      </a:rPr>
+                      <m:t>𝑥</m:t>
+                    </m:r>
+                  </m:oMath>
+                </a14:m>
+                <a:r>
+                  <a:rPr lang="en-US" dirty="0"/>
+                  <a:t> with a continuous distribution, </a:t>
                 </a:r>
                 <a14:m>
                   <m:oMath xmlns:m="http://schemas.openxmlformats.org/officeDocument/2006/math">
@@ -30503,7 +31524,7 @@
                       <m:rPr>
                         <m:sty m:val="p"/>
                       </m:rPr>
-                      <a:rPr lang="en-US" b="0" i="0" smtClean="0">
+                      <a:rPr lang="en-US">
                         <a:latin typeface="Cambria Math" panose="02040503050406030204" pitchFamily="18" charset="0"/>
                       </a:rPr>
                       <m:t>p</m:t>
@@ -30529,7 +31550,7 @@
                 </a14:m>
                 <a:r>
                   <a:rPr lang="en-US" dirty="0"/>
-                  <a:t>, of a continuous distribution</a:t>
+                  <a:t>,</a:t>
                 </a:r>
                 <a:r>
                   <a:rPr lang="ar-AE" dirty="0"/>
@@ -30784,7 +31805,7 @@
             </p:txBody>
           </p:sp>
         </mc:Choice>
-        <mc:Fallback>
+        <mc:Fallback xmlns="">
           <p:sp>
             <p:nvSpPr>
               <p:cNvPr id="3" name="Content Placeholder 2"/>
@@ -30799,7 +31820,7 @@
               <a:blipFill>
                 <a:blip r:embed="rId2"/>
                 <a:stretch>
-                  <a:fillRect l="-1111" t="-1616" r="-1481"/>
+                  <a:fillRect l="-1111" t="-1436"/>
                 </a:stretch>
               </a:blipFill>
             </p:spPr>
@@ -31007,8 +32028,8 @@
           </a:p>
         </p:txBody>
       </p:sp>
-      <mc:AlternateContent xmlns:mc="http://schemas.openxmlformats.org/markup-compatibility/2006">
-        <mc:Choice xmlns:a14="http://schemas.microsoft.com/office/drawing/2010/main" Requires="a14">
+      <mc:AlternateContent xmlns:mc="http://schemas.openxmlformats.org/markup-compatibility/2006" xmlns:a14="http://schemas.microsoft.com/office/drawing/2010/main">
+        <mc:Choice Requires="a14">
           <p:sp>
             <p:nvSpPr>
               <p:cNvPr id="3" name="Content Placeholder 2">
@@ -31389,7 +32410,7 @@
             </p:txBody>
           </p:sp>
         </mc:Choice>
-        <mc:Fallback>
+        <mc:Fallback xmlns="">
           <p:sp>
             <p:nvSpPr>
               <p:cNvPr id="3" name="Content Placeholder 2">
@@ -31583,8 +32604,8 @@
           </a:p>
         </p:txBody>
       </p:sp>
-      <mc:AlternateContent xmlns:mc="http://schemas.openxmlformats.org/markup-compatibility/2006">
-        <mc:Choice xmlns:a14="http://schemas.microsoft.com/office/drawing/2010/main" Requires="a14">
+      <mc:AlternateContent xmlns:mc="http://schemas.openxmlformats.org/markup-compatibility/2006" xmlns:a14="http://schemas.microsoft.com/office/drawing/2010/main">
+        <mc:Choice Requires="a14">
           <p:sp>
             <p:nvSpPr>
               <p:cNvPr id="3" name="Content Placeholder 2">
@@ -31613,8 +32634,22 @@
                 </a:pPr>
                 <a:r>
                   <a:rPr lang="en-US" b="1" dirty="0"/>
-                  <a:t>Expected value</a:t>
-                </a:r>
+                  <a:t>Expected value </a:t>
+                </a:r>
+                <a:r>
+                  <a:rPr lang="en-US" dirty="0"/>
+                  <a:t>of discrete variable, </a:t>
+                </a:r>
+                <a14:m>
+                  <m:oMath xmlns:m="http://schemas.openxmlformats.org/officeDocument/2006/math">
+                    <m:r>
+                      <a:rPr lang="ar-AE">
+                        <a:latin typeface="Cambria Math" panose="02040503050406030204" pitchFamily="18" charset="0"/>
+                      </a:rPr>
+                      <m:t>𝐗</m:t>
+                    </m:r>
+                  </m:oMath>
+                </a14:m>
                 <a:r>
                   <a:rPr lang="en-US" dirty="0"/>
                   <a:t>, with PMF p</a:t>
@@ -31940,7 +32975,7 @@
             </p:txBody>
           </p:sp>
         </mc:Choice>
-        <mc:Fallback>
+        <mc:Fallback xmlns="">
           <p:sp>
             <p:nvSpPr>
               <p:cNvPr id="3" name="Content Placeholder 2">
@@ -33040,8 +34075,8 @@
           </a:p>
         </p:txBody>
       </p:sp>
-      <mc:AlternateContent xmlns:mc="http://schemas.openxmlformats.org/markup-compatibility/2006">
-        <mc:Choice xmlns:a14="http://schemas.microsoft.com/office/drawing/2010/main" Requires="a14">
+      <mc:AlternateContent xmlns:mc="http://schemas.openxmlformats.org/markup-compatibility/2006" xmlns:a14="http://schemas.microsoft.com/office/drawing/2010/main">
+        <mc:Choice Requires="a14">
           <p:sp>
             <p:nvSpPr>
               <p:cNvPr id="3" name="Content Placeholder 2">
@@ -33333,7 +34368,6 @@
                 <a:endParaRPr lang="en-US" dirty="0"/>
               </a:p>
               <a:p>
-                <a:pPr/>
                 <a:r>
                   <a:rPr lang="en-US" dirty="0"/>
                   <a:t>This is a linear sum over </a:t>
@@ -33746,7 +34780,7 @@
             </p:txBody>
           </p:sp>
         </mc:Choice>
-        <mc:Fallback>
+        <mc:Fallback xmlns="">
           <p:sp>
             <p:nvSpPr>
               <p:cNvPr id="3" name="Content Placeholder 2">
@@ -33914,6 +34948,3181 @@
   <p:cSld>
     <p:spTree>
       <p:nvGrpSpPr>
+        <p:cNvPr id="1" name="">
+          <a:extLst>
+            <a:ext uri="{FF2B5EF4-FFF2-40B4-BE49-F238E27FC236}">
+              <a16:creationId xmlns:a16="http://schemas.microsoft.com/office/drawing/2014/main" id="{D05FD123-3FA8-45A8-759D-E9F688CF2174}"/>
+            </a:ext>
+          </a:extLst>
+        </p:cNvPr>
+        <p:cNvGrpSpPr/>
+        <p:nvPr/>
+      </p:nvGrpSpPr>
+      <p:grpSpPr>
+        <a:xfrm>
+          <a:off x="0" y="0"/>
+          <a:ext cx="0" cy="0"/>
+          <a:chOff x="0" y="0"/>
+          <a:chExt cx="0" cy="0"/>
+        </a:xfrm>
+      </p:grpSpPr>
+      <p:sp>
+        <p:nvSpPr>
+          <p:cNvPr id="2" name="Title 1">
+            <a:extLst>
+              <a:ext uri="{FF2B5EF4-FFF2-40B4-BE49-F238E27FC236}">
+                <a16:creationId xmlns:a16="http://schemas.microsoft.com/office/drawing/2014/main" id="{5A07A4A2-B35F-3066-CEF1-5B693ECB3A38}"/>
+              </a:ext>
+            </a:extLst>
+          </p:cNvPr>
+          <p:cNvSpPr>
+            <a:spLocks noGrp="1"/>
+          </p:cNvSpPr>
+          <p:nvPr>
+            <p:ph type="title"/>
+          </p:nvPr>
+        </p:nvSpPr>
+        <p:spPr>
+          <a:xfrm>
+            <a:off x="287721" y="205979"/>
+            <a:ext cx="8765627" cy="857250"/>
+          </a:xfrm>
+        </p:spPr>
+        <p:txBody>
+          <a:bodyPr>
+            <a:noAutofit/>
+          </a:bodyPr>
+          <a:lstStyle/>
+          <a:p>
+            <a:pPr marL="0" lvl="0" indent="0">
+              <a:buNone/>
+            </a:pPr>
+            <a:r>
+              <a:rPr sz="2800" dirty="0"/>
+              <a:t>What do you expect: </a:t>
+            </a:r>
+            <a:r>
+              <a:rPr lang="en-US" sz="2800" dirty="0"/>
+              <a:t>Expectation and Marginal Distribution</a:t>
+            </a:r>
+            <a:endParaRPr sz="2800" dirty="0"/>
+          </a:p>
+        </p:txBody>
+      </p:sp>
+      <mc:AlternateContent xmlns:mc="http://schemas.openxmlformats.org/markup-compatibility/2006" xmlns:a14="http://schemas.microsoft.com/office/drawing/2010/main">
+        <mc:Choice Requires="a14">
+          <p:sp>
+            <p:nvSpPr>
+              <p:cNvPr id="3" name="Content Placeholder 2">
+                <a:extLst>
+                  <a:ext uri="{FF2B5EF4-FFF2-40B4-BE49-F238E27FC236}">
+                    <a16:creationId xmlns:a16="http://schemas.microsoft.com/office/drawing/2014/main" id="{3805C71D-9107-8DFE-12F1-155025D7FAA2}"/>
+                  </a:ext>
+                </a:extLst>
+              </p:cNvPr>
+              <p:cNvSpPr>
+                <a:spLocks noGrp="1"/>
+              </p:cNvSpPr>
+              <p:nvPr>
+                <p:ph idx="1"/>
+              </p:nvPr>
+            </p:nvSpPr>
+            <p:spPr/>
+            <p:txBody>
+              <a:bodyPr>
+                <a:normAutofit fontScale="92500"/>
+              </a:bodyPr>
+              <a:lstStyle/>
+              <a:p>
+                <a:pPr marL="0" lvl="0" indent="0">
+                  <a:buNone/>
+                </a:pPr>
+                <a:r>
+                  <a:rPr lang="en-US" dirty="0"/>
+                  <a:t>We can write the log marginal distribution of </a:t>
+                </a:r>
+                <a14:m>
+                  <m:oMath xmlns:m="http://schemas.openxmlformats.org/officeDocument/2006/math">
+                    <m:sSub>
+                      <m:sSubPr>
+                        <m:ctrlPr>
+                          <a:rPr lang="en-US" i="1">
+                            <a:latin typeface="Cambria Math" panose="02040503050406030204" pitchFamily="18" charset="0"/>
+                          </a:rPr>
+                        </m:ctrlPr>
+                      </m:sSubPr>
+                      <m:e>
+                        <m:r>
+                          <a:rPr lang="en-US" i="1">
+                            <a:latin typeface="Cambria Math" panose="02040503050406030204" pitchFamily="18" charset="0"/>
+                          </a:rPr>
+                          <m:t>𝑝</m:t>
+                        </m:r>
+                      </m:e>
+                      <m:sub>
+                        <m:r>
+                          <a:rPr lang="en-US" i="1">
+                            <a:latin typeface="Cambria Math" panose="02040503050406030204" pitchFamily="18" charset="0"/>
+                          </a:rPr>
+                          <m:t> </m:t>
+                        </m:r>
+                      </m:sub>
+                    </m:sSub>
+                    <m:d>
+                      <m:dPr>
+                        <m:ctrlPr>
+                          <a:rPr lang="en-US" i="1">
+                            <a:latin typeface="Cambria Math" panose="02040503050406030204" pitchFamily="18" charset="0"/>
+                          </a:rPr>
+                        </m:ctrlPr>
+                      </m:dPr>
+                      <m:e>
+                        <m:r>
+                          <a:rPr lang="en-US" i="1">
+                            <a:latin typeface="Cambria Math" panose="02040503050406030204" pitchFamily="18" charset="0"/>
+                          </a:rPr>
+                          <m:t>𝑥</m:t>
+                        </m:r>
+                        <m:r>
+                          <a:rPr lang="en-US" i="1">
+                            <a:latin typeface="Cambria Math" panose="02040503050406030204" pitchFamily="18" charset="0"/>
+                          </a:rPr>
+                          <m:t>,</m:t>
+                        </m:r>
+                        <m:r>
+                          <a:rPr lang="en-US" i="1">
+                            <a:latin typeface="Cambria Math" panose="02040503050406030204" pitchFamily="18" charset="0"/>
+                          </a:rPr>
+                          <m:t>𝑧</m:t>
+                        </m:r>
+                      </m:e>
+                    </m:d>
+                  </m:oMath>
+                </a14:m>
+                <a:r>
+                  <a:rPr lang="en-US" dirty="0"/>
+                  <a:t> as an expectation</a:t>
+                </a:r>
+              </a:p>
+              <a:p>
+                <a:pPr marL="0" lvl="0" indent="0">
+                  <a:buNone/>
+                </a:pPr>
+                <a14:m>
+                  <m:oMathPara xmlns:m="http://schemas.openxmlformats.org/officeDocument/2006/math">
+                    <m:oMathParaPr>
+                      <m:jc m:val="center"/>
+                    </m:oMathParaPr>
+                    <m:oMath xmlns:m="http://schemas.openxmlformats.org/officeDocument/2006/math">
+                      <m:func>
+                        <m:funcPr>
+                          <m:ctrlPr>
+                            <a:rPr lang="en-US" i="1">
+                              <a:latin typeface="Cambria Math" panose="02040503050406030204" pitchFamily="18" charset="0"/>
+                            </a:rPr>
+                          </m:ctrlPr>
+                        </m:funcPr>
+                        <m:fName>
+                          <m:r>
+                            <m:rPr>
+                              <m:sty m:val="p"/>
+                            </m:rPr>
+                            <a:rPr lang="en-US">
+                              <a:latin typeface="Cambria Math" panose="02040503050406030204" pitchFamily="18" charset="0"/>
+                            </a:rPr>
+                            <m:t>log</m:t>
+                          </m:r>
+                        </m:fName>
+                        <m:e>
+                          <m:d>
+                            <m:dPr>
+                              <m:ctrlPr>
+                                <a:rPr lang="en-US" i="1">
+                                  <a:latin typeface="Cambria Math" panose="02040503050406030204" pitchFamily="18" charset="0"/>
+                                </a:rPr>
+                              </m:ctrlPr>
+                            </m:dPr>
+                            <m:e>
+                              <m:r>
+                                <a:rPr lang="en-US" i="1">
+                                  <a:latin typeface="Cambria Math" panose="02040503050406030204" pitchFamily="18" charset="0"/>
+                                </a:rPr>
+                                <m:t>𝑝</m:t>
+                              </m:r>
+                              <m:d>
+                                <m:dPr>
+                                  <m:ctrlPr>
+                                    <a:rPr lang="en-US" i="1">
+                                      <a:latin typeface="Cambria Math" panose="02040503050406030204" pitchFamily="18" charset="0"/>
+                                    </a:rPr>
+                                  </m:ctrlPr>
+                                </m:dPr>
+                                <m:e>
+                                  <m:r>
+                                    <a:rPr lang="en-US" i="1">
+                                      <a:latin typeface="Cambria Math" panose="02040503050406030204" pitchFamily="18" charset="0"/>
+                                    </a:rPr>
+                                    <m:t>𝑥</m:t>
+                                  </m:r>
+                                </m:e>
+                              </m:d>
+                            </m:e>
+                          </m:d>
+                        </m:e>
+                      </m:func>
+                      <m:r>
+                        <a:rPr lang="en-US" i="1">
+                          <a:latin typeface="Cambria Math" panose="02040503050406030204" pitchFamily="18" charset="0"/>
+                        </a:rPr>
+                        <m:t>=</m:t>
+                      </m:r>
+                      <m:r>
+                        <a:rPr lang="en-US" i="1">
+                          <a:latin typeface="Cambria Math" panose="02040503050406030204" pitchFamily="18" charset="0"/>
+                        </a:rPr>
+                        <m:t>𝑙𝑜𝑔</m:t>
+                      </m:r>
+                      <m:nary>
+                        <m:naryPr>
+                          <m:limLoc m:val="undOvr"/>
+                          <m:subHide m:val="on"/>
+                          <m:supHide m:val="on"/>
+                          <m:ctrlPr>
+                            <a:rPr lang="en-US" i="1">
+                              <a:latin typeface="Cambria Math" panose="02040503050406030204" pitchFamily="18" charset="0"/>
+                            </a:rPr>
+                          </m:ctrlPr>
+                        </m:naryPr>
+                        <m:sub/>
+                        <m:sup/>
+                        <m:e>
+                          <m:sSub>
+                            <m:sSubPr>
+                              <m:ctrlPr>
+                                <a:rPr lang="en-US" i="1">
+                                  <a:latin typeface="Cambria Math" panose="02040503050406030204" pitchFamily="18" charset="0"/>
+                                </a:rPr>
+                              </m:ctrlPr>
+                            </m:sSubPr>
+                            <m:e>
+                              <m:r>
+                                <a:rPr lang="en-US" i="1">
+                                  <a:latin typeface="Cambria Math" panose="02040503050406030204" pitchFamily="18" charset="0"/>
+                                </a:rPr>
+                                <m:t>𝑝</m:t>
+                              </m:r>
+                            </m:e>
+                            <m:sub>
+                              <m:r>
+                                <a:rPr lang="en-US" i="1">
+                                  <a:latin typeface="Cambria Math" panose="02040503050406030204" pitchFamily="18" charset="0"/>
+                                </a:rPr>
+                                <m:t> </m:t>
+                              </m:r>
+                            </m:sub>
+                          </m:sSub>
+                          <m:d>
+                            <m:dPr>
+                              <m:ctrlPr>
+                                <a:rPr lang="en-US" i="1">
+                                  <a:latin typeface="Cambria Math" panose="02040503050406030204" pitchFamily="18" charset="0"/>
+                                </a:rPr>
+                              </m:ctrlPr>
+                            </m:dPr>
+                            <m:e>
+                              <m:r>
+                                <a:rPr lang="en-US" i="1">
+                                  <a:latin typeface="Cambria Math" panose="02040503050406030204" pitchFamily="18" charset="0"/>
+                                </a:rPr>
+                                <m:t>𝑥</m:t>
+                              </m:r>
+                              <m:r>
+                                <a:rPr lang="en-US" i="1">
+                                  <a:latin typeface="Cambria Math" panose="02040503050406030204" pitchFamily="18" charset="0"/>
+                                </a:rPr>
+                                <m:t>,</m:t>
+                              </m:r>
+                              <m:r>
+                                <a:rPr lang="en-US" i="1">
+                                  <a:latin typeface="Cambria Math" panose="02040503050406030204" pitchFamily="18" charset="0"/>
+                                </a:rPr>
+                                <m:t>𝑧</m:t>
+                              </m:r>
+                            </m:e>
+                          </m:d>
+                          <m:r>
+                            <a:rPr lang="en-US" i="1">
+                              <a:latin typeface="Cambria Math" panose="02040503050406030204" pitchFamily="18" charset="0"/>
+                            </a:rPr>
+                            <m:t> </m:t>
+                          </m:r>
+                          <m:r>
+                            <a:rPr lang="en-US" i="1">
+                              <a:latin typeface="Cambria Math" panose="02040503050406030204" pitchFamily="18" charset="0"/>
+                            </a:rPr>
+                            <m:t>𝑑𝑧</m:t>
+                          </m:r>
+                        </m:e>
+                      </m:nary>
+                      <m:r>
+                        <a:rPr lang="en-US" i="1">
+                          <a:latin typeface="Cambria Math" panose="02040503050406030204" pitchFamily="18" charset="0"/>
+                        </a:rPr>
+                        <m:t>=</m:t>
+                      </m:r>
+                      <m:r>
+                        <a:rPr lang="en-US" i="1">
+                          <a:latin typeface="Cambria Math" panose="02040503050406030204" pitchFamily="18" charset="0"/>
+                        </a:rPr>
+                        <m:t>𝑙𝑜𝑔</m:t>
+                      </m:r>
+                      <m:nary>
+                        <m:naryPr>
+                          <m:limLoc m:val="undOvr"/>
+                          <m:subHide m:val="on"/>
+                          <m:supHide m:val="on"/>
+                          <m:ctrlPr>
+                            <a:rPr lang="en-US" i="1">
+                              <a:latin typeface="Cambria Math" panose="02040503050406030204" pitchFamily="18" charset="0"/>
+                            </a:rPr>
+                          </m:ctrlPr>
+                        </m:naryPr>
+                        <m:sub/>
+                        <m:sup/>
+                        <m:e>
+                          <m:sSub>
+                            <m:sSubPr>
+                              <m:ctrlPr>
+                                <a:rPr lang="en-US" i="1">
+                                  <a:latin typeface="Cambria Math" panose="02040503050406030204" pitchFamily="18" charset="0"/>
+                                </a:rPr>
+                              </m:ctrlPr>
+                            </m:sSubPr>
+                            <m:e>
+                              <m:r>
+                                <a:rPr lang="en-US" i="1">
+                                  <a:latin typeface="Cambria Math" panose="02040503050406030204" pitchFamily="18" charset="0"/>
+                                </a:rPr>
+                                <m:t>𝑝</m:t>
+                              </m:r>
+                            </m:e>
+                            <m:sub>
+                              <m:r>
+                                <a:rPr lang="en-US" i="1">
+                                  <a:latin typeface="Cambria Math" panose="02040503050406030204" pitchFamily="18" charset="0"/>
+                                  <a:ea typeface="Cambria Math" panose="02040503050406030204" pitchFamily="18" charset="0"/>
+                                </a:rPr>
+                                <m:t> </m:t>
+                              </m:r>
+                            </m:sub>
+                          </m:sSub>
+                          <m:d>
+                            <m:dPr>
+                              <m:ctrlPr>
+                                <a:rPr lang="en-US" i="1">
+                                  <a:latin typeface="Cambria Math" panose="02040503050406030204" pitchFamily="18" charset="0"/>
+                                </a:rPr>
+                              </m:ctrlPr>
+                            </m:dPr>
+                            <m:e>
+                              <m:r>
+                                <a:rPr lang="en-US" i="1">
+                                  <a:latin typeface="Cambria Math" panose="02040503050406030204" pitchFamily="18" charset="0"/>
+                                </a:rPr>
+                                <m:t>𝑥</m:t>
+                              </m:r>
+                              <m:r>
+                                <a:rPr lang="en-US" i="1">
+                                  <a:latin typeface="Cambria Math" panose="02040503050406030204" pitchFamily="18" charset="0"/>
+                                </a:rPr>
+                                <m:t> | </m:t>
+                              </m:r>
+                              <m:r>
+                                <a:rPr lang="en-US" i="1">
+                                  <a:latin typeface="Cambria Math" panose="02040503050406030204" pitchFamily="18" charset="0"/>
+                                </a:rPr>
+                                <m:t>𝑧</m:t>
+                              </m:r>
+                            </m:e>
+                          </m:d>
+                          <m:r>
+                            <a:rPr lang="en-US" i="1">
+                              <a:latin typeface="Cambria Math" panose="02040503050406030204" pitchFamily="18" charset="0"/>
+                            </a:rPr>
+                            <m:t>𝑝</m:t>
+                          </m:r>
+                          <m:d>
+                            <m:dPr>
+                              <m:ctrlPr>
+                                <a:rPr lang="en-US" i="1">
+                                  <a:latin typeface="Cambria Math" panose="02040503050406030204" pitchFamily="18" charset="0"/>
+                                </a:rPr>
+                              </m:ctrlPr>
+                            </m:dPr>
+                            <m:e>
+                              <m:r>
+                                <a:rPr lang="en-US" i="1">
+                                  <a:latin typeface="Cambria Math" panose="02040503050406030204" pitchFamily="18" charset="0"/>
+                                </a:rPr>
+                                <m:t>𝑧</m:t>
+                              </m:r>
+                            </m:e>
+                          </m:d>
+                          <m:r>
+                            <a:rPr lang="en-US" i="1">
+                              <a:latin typeface="Cambria Math" panose="02040503050406030204" pitchFamily="18" charset="0"/>
+                            </a:rPr>
+                            <m:t>𝑑𝑧</m:t>
+                          </m:r>
+                        </m:e>
+                      </m:nary>
+                    </m:oMath>
+                  </m:oMathPara>
+                </a14:m>
+                <a:endParaRPr lang="ar-AE" dirty="0"/>
+              </a:p>
+              <a:p>
+                <a:pPr lvl="0"/>
+                <a:r>
+                  <a:rPr lang="en-US" dirty="0"/>
+                  <a:t>Or, we can introduce another distribution </a:t>
+                </a:r>
+                <a14:m>
+                  <m:oMath xmlns:m="http://schemas.openxmlformats.org/officeDocument/2006/math">
+                    <m:sSub>
+                      <m:sSubPr>
+                        <m:ctrlPr>
+                          <a:rPr lang="en-US" i="1">
+                            <a:latin typeface="Cambria Math" panose="02040503050406030204" pitchFamily="18" charset="0"/>
+                          </a:rPr>
+                        </m:ctrlPr>
+                      </m:sSubPr>
+                      <m:e>
+                        <m:r>
+                          <a:rPr lang="en-US" i="1">
+                            <a:latin typeface="Cambria Math" panose="02040503050406030204" pitchFamily="18" charset="0"/>
+                          </a:rPr>
+                          <m:t>𝑞</m:t>
+                        </m:r>
+                      </m:e>
+                      <m:sub>
+                        <m:r>
+                          <a:rPr lang="en-US" i="1">
+                            <a:latin typeface="Cambria Math" panose="02040503050406030204" pitchFamily="18" charset="0"/>
+                            <a:ea typeface="Cambria Math" panose="02040503050406030204" pitchFamily="18" charset="0"/>
+                          </a:rPr>
+                          <m:t>𝜑</m:t>
+                        </m:r>
+                      </m:sub>
+                    </m:sSub>
+                    <m:r>
+                      <a:rPr lang="en-US" i="1">
+                        <a:latin typeface="Cambria Math" panose="02040503050406030204" pitchFamily="18" charset="0"/>
+                      </a:rPr>
+                      <m:t>(</m:t>
+                    </m:r>
+                    <m:r>
+                      <a:rPr lang="en-US" i="1">
+                        <a:latin typeface="Cambria Math" panose="02040503050406030204" pitchFamily="18" charset="0"/>
+                      </a:rPr>
+                      <m:t>𝑧</m:t>
+                    </m:r>
+                    <m:r>
+                      <a:rPr lang="en-US" i="1">
+                        <a:latin typeface="Cambria Math" panose="02040503050406030204" pitchFamily="18" charset="0"/>
+                      </a:rPr>
+                      <m:t>|</m:t>
+                    </m:r>
+                    <m:r>
+                      <a:rPr lang="en-US" i="1">
+                        <a:latin typeface="Cambria Math" panose="02040503050406030204" pitchFamily="18" charset="0"/>
+                      </a:rPr>
+                      <m:t>𝑥</m:t>
+                    </m:r>
+                    <m:r>
+                      <a:rPr lang="en-US" i="1">
+                        <a:latin typeface="Cambria Math" panose="02040503050406030204" pitchFamily="18" charset="0"/>
+                      </a:rPr>
+                      <m:t>)</m:t>
+                    </m:r>
+                  </m:oMath>
+                </a14:m>
+                <a:r>
+                  <a:rPr lang="en-US" dirty="0"/>
+                  <a:t>, integrating out the variable </a:t>
+                </a:r>
+                <a14:m>
+                  <m:oMath xmlns:m="http://schemas.openxmlformats.org/officeDocument/2006/math">
+                    <m:r>
+                      <a:rPr lang="en-US" i="1">
+                        <a:latin typeface="Cambria Math" panose="02040503050406030204" pitchFamily="18" charset="0"/>
+                      </a:rPr>
+                      <m:t>𝑧</m:t>
+                    </m:r>
+                  </m:oMath>
+                </a14:m>
+                <a:endParaRPr lang="en-US" dirty="0"/>
+              </a:p>
+              <a:p>
+                <a:pPr marL="0" lvl="0" indent="0">
+                  <a:buNone/>
+                </a:pPr>
+                <a14:m>
+                  <m:oMathPara xmlns:m="http://schemas.openxmlformats.org/officeDocument/2006/math">
+                    <m:oMathParaPr>
+                      <m:jc m:val="centerGroup"/>
+                    </m:oMathParaPr>
+                    <m:oMath xmlns:m="http://schemas.openxmlformats.org/officeDocument/2006/math">
+                      <m:r>
+                        <m:rPr>
+                          <m:sty m:val="p"/>
+                        </m:rPr>
+                        <a:rPr lang="en-US">
+                          <a:latin typeface="Cambria Math" panose="02040503050406030204" pitchFamily="18" charset="0"/>
+                        </a:rPr>
+                        <m:t>log</m:t>
+                      </m:r>
+                      <m:r>
+                        <a:rPr lang="en-US" i="1">
+                          <a:latin typeface="Cambria Math" panose="02040503050406030204" pitchFamily="18" charset="0"/>
+                        </a:rPr>
+                        <m:t>⁡(</m:t>
+                      </m:r>
+                      <m:r>
+                        <a:rPr lang="en-US" i="1">
+                          <a:latin typeface="Cambria Math" panose="02040503050406030204" pitchFamily="18" charset="0"/>
+                        </a:rPr>
+                        <m:t>𝑝</m:t>
+                      </m:r>
+                      <m:d>
+                        <m:dPr>
+                          <m:ctrlPr>
+                            <a:rPr lang="en-US" i="1">
+                              <a:latin typeface="Cambria Math" panose="02040503050406030204" pitchFamily="18" charset="0"/>
+                            </a:rPr>
+                          </m:ctrlPr>
+                        </m:dPr>
+                        <m:e>
+                          <m:r>
+                            <a:rPr lang="en-US" i="1">
+                              <a:latin typeface="Cambria Math" panose="02040503050406030204" pitchFamily="18" charset="0"/>
+                            </a:rPr>
+                            <m:t>𝑥</m:t>
+                          </m:r>
+                        </m:e>
+                      </m:d>
+                      <m:r>
+                        <a:rPr lang="en-US" i="1">
+                          <a:latin typeface="Cambria Math" panose="02040503050406030204" pitchFamily="18" charset="0"/>
+                        </a:rPr>
+                        <m:t>)=</m:t>
+                      </m:r>
+                      <m:r>
+                        <a:rPr lang="en-US" i="1">
+                          <a:latin typeface="Cambria Math" panose="02040503050406030204" pitchFamily="18" charset="0"/>
+                        </a:rPr>
+                        <m:t>𝑙𝑜𝑔</m:t>
+                      </m:r>
+                      <m:nary>
+                        <m:naryPr>
+                          <m:limLoc m:val="undOvr"/>
+                          <m:subHide m:val="on"/>
+                          <m:supHide m:val="on"/>
+                          <m:ctrlPr>
+                            <a:rPr lang="en-US" i="1">
+                              <a:latin typeface="Cambria Math" panose="02040503050406030204" pitchFamily="18" charset="0"/>
+                            </a:rPr>
+                          </m:ctrlPr>
+                        </m:naryPr>
+                        <m:sub/>
+                        <m:sup/>
+                        <m:e>
+                          <m:sSub>
+                            <m:sSubPr>
+                              <m:ctrlPr>
+                                <a:rPr lang="en-US" i="1">
+                                  <a:latin typeface="Cambria Math" panose="02040503050406030204" pitchFamily="18" charset="0"/>
+                                </a:rPr>
+                              </m:ctrlPr>
+                            </m:sSubPr>
+                            <m:e>
+                              <m:r>
+                                <a:rPr lang="en-US" i="1">
+                                  <a:latin typeface="Cambria Math" panose="02040503050406030204" pitchFamily="18" charset="0"/>
+                                </a:rPr>
+                                <m:t>𝑝</m:t>
+                              </m:r>
+                            </m:e>
+                            <m:sub>
+                              <m:r>
+                                <a:rPr lang="en-US" i="1">
+                                  <a:latin typeface="Cambria Math" panose="02040503050406030204" pitchFamily="18" charset="0"/>
+                                </a:rPr>
+                                <m:t> </m:t>
+                              </m:r>
+                            </m:sub>
+                          </m:sSub>
+                          <m:d>
+                            <m:dPr>
+                              <m:ctrlPr>
+                                <a:rPr lang="en-US" i="1">
+                                  <a:latin typeface="Cambria Math" panose="02040503050406030204" pitchFamily="18" charset="0"/>
+                                </a:rPr>
+                              </m:ctrlPr>
+                            </m:dPr>
+                            <m:e>
+                              <m:r>
+                                <a:rPr lang="en-US" i="1">
+                                  <a:latin typeface="Cambria Math" panose="02040503050406030204" pitchFamily="18" charset="0"/>
+                                </a:rPr>
+                                <m:t>𝑥</m:t>
+                              </m:r>
+                              <m:r>
+                                <a:rPr lang="en-US" i="1">
+                                  <a:latin typeface="Cambria Math" panose="02040503050406030204" pitchFamily="18" charset="0"/>
+                                </a:rPr>
+                                <m:t>,</m:t>
+                              </m:r>
+                              <m:r>
+                                <a:rPr lang="en-US" i="1">
+                                  <a:latin typeface="Cambria Math" panose="02040503050406030204" pitchFamily="18" charset="0"/>
+                                </a:rPr>
+                                <m:t>𝑧</m:t>
+                              </m:r>
+                            </m:e>
+                          </m:d>
+                          <m:r>
+                            <a:rPr lang="en-US" i="1">
+                              <a:latin typeface="Cambria Math" panose="02040503050406030204" pitchFamily="18" charset="0"/>
+                            </a:rPr>
+                            <m:t> </m:t>
+                          </m:r>
+                          <m:r>
+                            <a:rPr lang="en-US" i="1">
+                              <a:latin typeface="Cambria Math" panose="02040503050406030204" pitchFamily="18" charset="0"/>
+                            </a:rPr>
+                            <m:t>𝑑𝑧</m:t>
+                          </m:r>
+                        </m:e>
+                      </m:nary>
+                      <m:r>
+                        <a:rPr lang="en-US" i="1">
+                          <a:latin typeface="Cambria Math" panose="02040503050406030204" pitchFamily="18" charset="0"/>
+                        </a:rPr>
+                        <m:t>=</m:t>
+                      </m:r>
+                      <m:r>
+                        <a:rPr lang="en-US" i="1">
+                          <a:latin typeface="Cambria Math" panose="02040503050406030204" pitchFamily="18" charset="0"/>
+                        </a:rPr>
+                        <m:t>𝑙𝑜𝑔</m:t>
+                      </m:r>
+                      <m:nary>
+                        <m:naryPr>
+                          <m:limLoc m:val="undOvr"/>
+                          <m:subHide m:val="on"/>
+                          <m:supHide m:val="on"/>
+                          <m:ctrlPr>
+                            <a:rPr lang="en-US" i="1">
+                              <a:latin typeface="Cambria Math" panose="02040503050406030204" pitchFamily="18" charset="0"/>
+                            </a:rPr>
+                          </m:ctrlPr>
+                        </m:naryPr>
+                        <m:sub/>
+                        <m:sup/>
+                        <m:e>
+                          <m:f>
+                            <m:fPr>
+                              <m:ctrlPr>
+                                <a:rPr lang="en-US" i="1">
+                                  <a:latin typeface="Cambria Math" panose="02040503050406030204" pitchFamily="18" charset="0"/>
+                                </a:rPr>
+                              </m:ctrlPr>
+                            </m:fPr>
+                            <m:num>
+                              <m:r>
+                                <a:rPr lang="en-US" i="1">
+                                  <a:latin typeface="Cambria Math" panose="02040503050406030204" pitchFamily="18" charset="0"/>
+                                </a:rPr>
+                                <m:t>𝑝</m:t>
+                              </m:r>
+                              <m:d>
+                                <m:dPr>
+                                  <m:ctrlPr>
+                                    <a:rPr lang="en-US" i="1">
+                                      <a:latin typeface="Cambria Math" panose="02040503050406030204" pitchFamily="18" charset="0"/>
+                                    </a:rPr>
+                                  </m:ctrlPr>
+                                </m:dPr>
+                                <m:e>
+                                  <m:r>
+                                    <a:rPr lang="en-US" i="1">
+                                      <a:latin typeface="Cambria Math" panose="02040503050406030204" pitchFamily="18" charset="0"/>
+                                    </a:rPr>
+                                    <m:t>𝑥</m:t>
+                                  </m:r>
+                                  <m:r>
+                                    <a:rPr lang="en-US" i="1">
+                                      <a:latin typeface="Cambria Math" panose="02040503050406030204" pitchFamily="18" charset="0"/>
+                                    </a:rPr>
+                                    <m:t>,</m:t>
+                                  </m:r>
+                                  <m:r>
+                                    <a:rPr lang="en-US" i="1">
+                                      <a:latin typeface="Cambria Math" panose="02040503050406030204" pitchFamily="18" charset="0"/>
+                                    </a:rPr>
+                                    <m:t>𝑧</m:t>
+                                  </m:r>
+                                </m:e>
+                              </m:d>
+                              <m:sSub>
+                                <m:sSubPr>
+                                  <m:ctrlPr>
+                                    <a:rPr lang="en-US" i="1">
+                                      <a:latin typeface="Cambria Math" panose="02040503050406030204" pitchFamily="18" charset="0"/>
+                                    </a:rPr>
+                                  </m:ctrlPr>
+                                </m:sSubPr>
+                                <m:e>
+                                  <m:r>
+                                    <a:rPr lang="en-US" i="1">
+                                      <a:latin typeface="Cambria Math" panose="02040503050406030204" pitchFamily="18" charset="0"/>
+                                    </a:rPr>
+                                    <m:t>𝑞</m:t>
+                                  </m:r>
+                                </m:e>
+                                <m:sub>
+                                  <m:r>
+                                    <a:rPr lang="en-US" i="1">
+                                      <a:latin typeface="Cambria Math" panose="02040503050406030204" pitchFamily="18" charset="0"/>
+                                      <a:ea typeface="Cambria Math" panose="02040503050406030204" pitchFamily="18" charset="0"/>
+                                    </a:rPr>
+                                    <m:t>𝜑</m:t>
+                                  </m:r>
+                                </m:sub>
+                              </m:sSub>
+                              <m:r>
+                                <a:rPr lang="en-US" i="1">
+                                  <a:latin typeface="Cambria Math" panose="02040503050406030204" pitchFamily="18" charset="0"/>
+                                </a:rPr>
+                                <m:t>(</m:t>
+                              </m:r>
+                              <m:r>
+                                <a:rPr lang="en-US" i="1">
+                                  <a:latin typeface="Cambria Math" panose="02040503050406030204" pitchFamily="18" charset="0"/>
+                                </a:rPr>
+                                <m:t>𝑧</m:t>
+                              </m:r>
+                              <m:r>
+                                <a:rPr lang="en-US" i="1">
+                                  <a:latin typeface="Cambria Math" panose="02040503050406030204" pitchFamily="18" charset="0"/>
+                                </a:rPr>
+                                <m:t>|</m:t>
+                              </m:r>
+                              <m:r>
+                                <a:rPr lang="en-US" i="1">
+                                  <a:latin typeface="Cambria Math" panose="02040503050406030204" pitchFamily="18" charset="0"/>
+                                </a:rPr>
+                                <m:t>𝑥</m:t>
+                              </m:r>
+                              <m:r>
+                                <a:rPr lang="en-US" i="1">
+                                  <a:latin typeface="Cambria Math" panose="02040503050406030204" pitchFamily="18" charset="0"/>
+                                </a:rPr>
+                                <m:t>)</m:t>
+                              </m:r>
+                            </m:num>
+                            <m:den>
+                              <m:sSub>
+                                <m:sSubPr>
+                                  <m:ctrlPr>
+                                    <a:rPr lang="en-US" i="1">
+                                      <a:latin typeface="Cambria Math" panose="02040503050406030204" pitchFamily="18" charset="0"/>
+                                    </a:rPr>
+                                  </m:ctrlPr>
+                                </m:sSubPr>
+                                <m:e>
+                                  <m:r>
+                                    <a:rPr lang="en-US" i="1">
+                                      <a:latin typeface="Cambria Math" panose="02040503050406030204" pitchFamily="18" charset="0"/>
+                                    </a:rPr>
+                                    <m:t>𝑞</m:t>
+                                  </m:r>
+                                </m:e>
+                                <m:sub>
+                                  <m:r>
+                                    <a:rPr lang="en-US" i="1">
+                                      <a:latin typeface="Cambria Math" panose="02040503050406030204" pitchFamily="18" charset="0"/>
+                                      <a:ea typeface="Cambria Math" panose="02040503050406030204" pitchFamily="18" charset="0"/>
+                                    </a:rPr>
+                                    <m:t>𝜑</m:t>
+                                  </m:r>
+                                </m:sub>
+                              </m:sSub>
+                              <m:r>
+                                <a:rPr lang="en-US" i="1">
+                                  <a:latin typeface="Cambria Math" panose="02040503050406030204" pitchFamily="18" charset="0"/>
+                                </a:rPr>
+                                <m:t>(</m:t>
+                              </m:r>
+                              <m:r>
+                                <a:rPr lang="en-US" i="1">
+                                  <a:latin typeface="Cambria Math" panose="02040503050406030204" pitchFamily="18" charset="0"/>
+                                </a:rPr>
+                                <m:t>𝑧</m:t>
+                              </m:r>
+                              <m:r>
+                                <a:rPr lang="en-US" i="1">
+                                  <a:latin typeface="Cambria Math" panose="02040503050406030204" pitchFamily="18" charset="0"/>
+                                </a:rPr>
+                                <m:t>|</m:t>
+                              </m:r>
+                              <m:r>
+                                <a:rPr lang="en-US" i="1">
+                                  <a:latin typeface="Cambria Math" panose="02040503050406030204" pitchFamily="18" charset="0"/>
+                                </a:rPr>
+                                <m:t>𝑥</m:t>
+                              </m:r>
+                              <m:r>
+                                <a:rPr lang="en-US" i="1">
+                                  <a:latin typeface="Cambria Math" panose="02040503050406030204" pitchFamily="18" charset="0"/>
+                                </a:rPr>
+                                <m:t>)</m:t>
+                              </m:r>
+                            </m:den>
+                          </m:f>
+                          <m:r>
+                            <a:rPr lang="en-US" i="1">
+                              <a:latin typeface="Cambria Math" panose="02040503050406030204" pitchFamily="18" charset="0"/>
+                            </a:rPr>
+                            <m:t>𝑑𝑥</m:t>
+                          </m:r>
+                        </m:e>
+                      </m:nary>
+                    </m:oMath>
+                  </m:oMathPara>
+                </a14:m>
+                <a:endParaRPr lang="en-US" dirty="0"/>
+              </a:p>
+            </p:txBody>
+          </p:sp>
+        </mc:Choice>
+        <mc:Fallback xmlns="">
+          <p:sp>
+            <p:nvSpPr>
+              <p:cNvPr id="3" name="Content Placeholder 2">
+                <a:extLst>
+                  <a:ext uri="{FF2B5EF4-FFF2-40B4-BE49-F238E27FC236}">
+                    <a16:creationId xmlns:a16="http://schemas.microsoft.com/office/drawing/2014/main" id="{3805C71D-9107-8DFE-12F1-155025D7FAA2}"/>
+                  </a:ext>
+                </a:extLst>
+              </p:cNvPr>
+              <p:cNvSpPr>
+                <a:spLocks noGrp="1" noRot="1" noChangeAspect="1" noMove="1" noResize="1" noEditPoints="1" noAdjustHandles="1" noChangeArrowheads="1" noChangeShapeType="1" noTextEdit="1"/>
+              </p:cNvSpPr>
+              <p:nvPr>
+                <p:ph idx="1"/>
+              </p:nvPr>
+            </p:nvSpPr>
+            <p:spPr>
+              <a:blipFill>
+                <a:blip r:embed="rId2"/>
+                <a:stretch>
+                  <a:fillRect l="-963" t="-1257" r="-444"/>
+                </a:stretch>
+              </a:blipFill>
+            </p:spPr>
+            <p:txBody>
+              <a:bodyPr/>
+              <a:lstStyle/>
+              <a:p>
+                <a:r>
+                  <a:rPr lang="en-US">
+                    <a:noFill/>
+                  </a:rPr>
+                  <a:t> </a:t>
+                </a:r>
+              </a:p>
+            </p:txBody>
+          </p:sp>
+        </mc:Fallback>
+      </mc:AlternateContent>
+    </p:spTree>
+    <p:extLst>
+      <p:ext uri="{BB962C8B-B14F-4D97-AF65-F5344CB8AC3E}">
+        <p14:creationId xmlns:p14="http://schemas.microsoft.com/office/powerpoint/2010/main" val="786262148"/>
+      </p:ext>
+    </p:extLst>
+  </p:cSld>
+  <p:clrMapOvr>
+    <a:masterClrMapping/>
+  </p:clrMapOvr>
+  <p:timing>
+    <p:tnLst>
+      <p:par>
+        <p:cTn id="1" dur="indefinite" restart="never" nodeType="tmRoot">
+          <p:childTnLst>
+            <p:seq concurrent="1" nextAc="seek">
+              <p:cTn id="2" dur="indefinite" nodeType="mainSeq">
+                <p:childTnLst>
+                  <p:par>
+                    <p:cTn id="3" fill="hold">
+                      <p:stCondLst>
+                        <p:cond delay="indefinite"/>
+                      </p:stCondLst>
+                      <p:childTnLst>
+                        <p:par>
+                          <p:cTn id="4" fill="hold">
+                            <p:stCondLst>
+                              <p:cond delay="0"/>
+                            </p:stCondLst>
+                            <p:childTnLst>
+                              <p:par>
+                                <p:cTn id="5" presetID="1" presetClass="entr" presetSubtype="0" fill="hold" nodeType="clickEffect">
+                                  <p:stCondLst>
+                                    <p:cond delay="0"/>
+                                  </p:stCondLst>
+                                  <p:childTnLst>
+                                    <p:set>
+                                      <p:cBhvr>
+                                        <p:cTn id="6" dur="1" fill="hold">
+                                          <p:stCondLst>
+                                            <p:cond delay="0"/>
+                                          </p:stCondLst>
+                                        </p:cTn>
+                                        <p:tgtEl>
+                                          <p:spTgt spid="3">
+                                            <p:txEl>
+                                              <p:pRg st="2" end="2"/>
+                                            </p:txEl>
+                                          </p:spTgt>
+                                        </p:tgtEl>
+                                        <p:attrNameLst>
+                                          <p:attrName>style.visibility</p:attrName>
+                                        </p:attrNameLst>
+                                      </p:cBhvr>
+                                      <p:to>
+                                        <p:strVal val="visible"/>
+                                      </p:to>
+                                    </p:set>
+                                  </p:childTnLst>
+                                </p:cTn>
+                              </p:par>
+                              <p:par>
+                                <p:cTn id="7" presetID="1" presetClass="entr" presetSubtype="0" fill="hold" nodeType="withEffect">
+                                  <p:stCondLst>
+                                    <p:cond delay="0"/>
+                                  </p:stCondLst>
+                                  <p:childTnLst>
+                                    <p:set>
+                                      <p:cBhvr>
+                                        <p:cTn id="8" dur="1" fill="hold">
+                                          <p:stCondLst>
+                                            <p:cond delay="0"/>
+                                          </p:stCondLst>
+                                        </p:cTn>
+                                        <p:tgtEl>
+                                          <p:spTgt spid="3">
+                                            <p:txEl>
+                                              <p:pRg st="3" end="3"/>
+                                            </p:txEl>
+                                          </p:spTgt>
+                                        </p:tgtEl>
+                                        <p:attrNameLst>
+                                          <p:attrName>style.visibility</p:attrName>
+                                        </p:attrNameLst>
+                                      </p:cBhvr>
+                                      <p:to>
+                                        <p:strVal val="visible"/>
+                                      </p:to>
+                                    </p:set>
+                                  </p:childTnLst>
+                                </p:cTn>
+                              </p:par>
+                            </p:childTnLst>
+                          </p:cTn>
+                        </p:par>
+                      </p:childTnLst>
+                    </p:cTn>
+                  </p:par>
+                </p:childTnLst>
+              </p:cTn>
+              <p:prevCondLst>
+                <p:cond evt="onPrev" delay="0">
+                  <p:tgtEl>
+                    <p:sldTgt/>
+                  </p:tgtEl>
+                </p:cond>
+              </p:prevCondLst>
+              <p:nextCondLst>
+                <p:cond evt="onNext" delay="0">
+                  <p:tgtEl>
+                    <p:sldTgt/>
+                  </p:tgtEl>
+                </p:cond>
+              </p:nextCondLst>
+            </p:seq>
+          </p:childTnLst>
+        </p:cTn>
+      </p:par>
+    </p:tnLst>
+  </p:timing>
+</p:sld>
+</file>
+
+<file path=ppt/slides/slide52.xml><?xml version="1.0" encoding="utf-8"?>
+<p:sld xmlns:a="http://schemas.openxmlformats.org/drawingml/2006/main" xmlns:r="http://schemas.openxmlformats.org/officeDocument/2006/relationships" xmlns:p="http://schemas.openxmlformats.org/presentationml/2006/main">
+  <p:cSld>
+    <p:spTree>
+      <p:nvGrpSpPr>
+        <p:cNvPr id="1" name="">
+          <a:extLst>
+            <a:ext uri="{FF2B5EF4-FFF2-40B4-BE49-F238E27FC236}">
+              <a16:creationId xmlns:a16="http://schemas.microsoft.com/office/drawing/2014/main" id="{078717F0-0353-B122-6A19-A215E2B082E5}"/>
+            </a:ext>
+          </a:extLst>
+        </p:cNvPr>
+        <p:cNvGrpSpPr/>
+        <p:nvPr/>
+      </p:nvGrpSpPr>
+      <p:grpSpPr>
+        <a:xfrm>
+          <a:off x="0" y="0"/>
+          <a:ext cx="0" cy="0"/>
+          <a:chOff x="0" y="0"/>
+          <a:chExt cx="0" cy="0"/>
+        </a:xfrm>
+      </p:grpSpPr>
+      <p:sp>
+        <p:nvSpPr>
+          <p:cNvPr id="2" name="Title 1">
+            <a:extLst>
+              <a:ext uri="{FF2B5EF4-FFF2-40B4-BE49-F238E27FC236}">
+                <a16:creationId xmlns:a16="http://schemas.microsoft.com/office/drawing/2014/main" id="{642820E4-1DA5-7E2A-B8FB-8A2A4E513190}"/>
+              </a:ext>
+            </a:extLst>
+          </p:cNvPr>
+          <p:cNvSpPr>
+            <a:spLocks noGrp="1"/>
+          </p:cNvSpPr>
+          <p:nvPr>
+            <p:ph type="title"/>
+          </p:nvPr>
+        </p:nvSpPr>
+        <p:spPr>
+          <a:xfrm>
+            <a:off x="287721" y="205979"/>
+            <a:ext cx="8765627" cy="857250"/>
+          </a:xfrm>
+        </p:spPr>
+        <p:txBody>
+          <a:bodyPr>
+            <a:noAutofit/>
+          </a:bodyPr>
+          <a:lstStyle/>
+          <a:p>
+            <a:pPr marL="0" lvl="0" indent="0">
+              <a:buNone/>
+            </a:pPr>
+            <a:r>
+              <a:rPr sz="2800" dirty="0"/>
+              <a:t>What do you expect: </a:t>
+            </a:r>
+            <a:r>
+              <a:rPr lang="en-US" sz="2800" dirty="0"/>
+              <a:t>Expectation and Marginal Distribution</a:t>
+            </a:r>
+            <a:endParaRPr sz="2800" dirty="0"/>
+          </a:p>
+        </p:txBody>
+      </p:sp>
+      <mc:AlternateContent xmlns:mc="http://schemas.openxmlformats.org/markup-compatibility/2006" xmlns:a14="http://schemas.microsoft.com/office/drawing/2010/main">
+        <mc:Choice Requires="a14">
+          <p:sp>
+            <p:nvSpPr>
+              <p:cNvPr id="3" name="Content Placeholder 2">
+                <a:extLst>
+                  <a:ext uri="{FF2B5EF4-FFF2-40B4-BE49-F238E27FC236}">
+                    <a16:creationId xmlns:a16="http://schemas.microsoft.com/office/drawing/2014/main" id="{43B72DE9-4B50-2F87-683A-F4005205C162}"/>
+                  </a:ext>
+                </a:extLst>
+              </p:cNvPr>
+              <p:cNvSpPr>
+                <a:spLocks noGrp="1"/>
+              </p:cNvSpPr>
+              <p:nvPr>
+                <p:ph idx="1"/>
+              </p:nvPr>
+            </p:nvSpPr>
+            <p:spPr/>
+            <p:txBody>
+              <a:bodyPr>
+                <a:normAutofit/>
+              </a:bodyPr>
+              <a:lstStyle/>
+              <a:p>
+                <a:pPr marL="0" lvl="0" indent="0">
+                  <a:buNone/>
+                </a:pPr>
+                <a:r>
+                  <a:rPr lang="en-US" dirty="0"/>
+                  <a:t>We can write the log marginal distribution of </a:t>
+                </a:r>
+                <a14:m>
+                  <m:oMath xmlns:m="http://schemas.openxmlformats.org/officeDocument/2006/math">
+                    <m:sSub>
+                      <m:sSubPr>
+                        <m:ctrlPr>
+                          <a:rPr lang="en-US" i="1">
+                            <a:latin typeface="Cambria Math" panose="02040503050406030204" pitchFamily="18" charset="0"/>
+                          </a:rPr>
+                        </m:ctrlPr>
+                      </m:sSubPr>
+                      <m:e>
+                        <m:r>
+                          <a:rPr lang="en-US" i="1">
+                            <a:latin typeface="Cambria Math" panose="02040503050406030204" pitchFamily="18" charset="0"/>
+                          </a:rPr>
+                          <m:t>𝑝</m:t>
+                        </m:r>
+                      </m:e>
+                      <m:sub>
+                        <m:r>
+                          <a:rPr lang="en-US" i="1">
+                            <a:latin typeface="Cambria Math" panose="02040503050406030204" pitchFamily="18" charset="0"/>
+                          </a:rPr>
+                          <m:t> </m:t>
+                        </m:r>
+                      </m:sub>
+                    </m:sSub>
+                    <m:d>
+                      <m:dPr>
+                        <m:ctrlPr>
+                          <a:rPr lang="en-US" i="1">
+                            <a:latin typeface="Cambria Math" panose="02040503050406030204" pitchFamily="18" charset="0"/>
+                          </a:rPr>
+                        </m:ctrlPr>
+                      </m:dPr>
+                      <m:e>
+                        <m:r>
+                          <a:rPr lang="en-US" i="1">
+                            <a:latin typeface="Cambria Math" panose="02040503050406030204" pitchFamily="18" charset="0"/>
+                          </a:rPr>
+                          <m:t>𝑥</m:t>
+                        </m:r>
+                        <m:r>
+                          <a:rPr lang="en-US" i="1">
+                            <a:latin typeface="Cambria Math" panose="02040503050406030204" pitchFamily="18" charset="0"/>
+                          </a:rPr>
+                          <m:t>,</m:t>
+                        </m:r>
+                        <m:r>
+                          <a:rPr lang="en-US" i="1">
+                            <a:latin typeface="Cambria Math" panose="02040503050406030204" pitchFamily="18" charset="0"/>
+                          </a:rPr>
+                          <m:t>𝑧</m:t>
+                        </m:r>
+                      </m:e>
+                    </m:d>
+                  </m:oMath>
+                </a14:m>
+                <a:r>
+                  <a:rPr lang="en-US" dirty="0"/>
+                  <a:t> as an expectation with respect to another distribution </a:t>
+                </a:r>
+                <a14:m>
+                  <m:oMath xmlns:m="http://schemas.openxmlformats.org/officeDocument/2006/math">
+                    <m:sSub>
+                      <m:sSubPr>
+                        <m:ctrlPr>
+                          <a:rPr lang="en-US" i="1">
+                            <a:latin typeface="Cambria Math" panose="02040503050406030204" pitchFamily="18" charset="0"/>
+                          </a:rPr>
+                        </m:ctrlPr>
+                      </m:sSubPr>
+                      <m:e>
+                        <m:r>
+                          <a:rPr lang="en-US" i="1">
+                            <a:latin typeface="Cambria Math" panose="02040503050406030204" pitchFamily="18" charset="0"/>
+                          </a:rPr>
+                          <m:t>𝑞</m:t>
+                        </m:r>
+                      </m:e>
+                      <m:sub>
+                        <m:r>
+                          <a:rPr lang="en-US" b="0" i="1" smtClean="0">
+                            <a:latin typeface="Cambria Math" panose="02040503050406030204" pitchFamily="18" charset="0"/>
+                          </a:rPr>
+                          <m:t> </m:t>
+                        </m:r>
+                      </m:sub>
+                    </m:sSub>
+                    <m:d>
+                      <m:dPr>
+                        <m:ctrlPr>
+                          <a:rPr lang="en-US" i="1">
+                            <a:latin typeface="Cambria Math" panose="02040503050406030204" pitchFamily="18" charset="0"/>
+                            <a:ea typeface="Cambria Math" panose="02040503050406030204" pitchFamily="18" charset="0"/>
+                          </a:rPr>
+                        </m:ctrlPr>
+                      </m:dPr>
+                      <m:e>
+                        <m:r>
+                          <a:rPr lang="en-US" i="1">
+                            <a:latin typeface="Cambria Math" panose="02040503050406030204" pitchFamily="18" charset="0"/>
+                          </a:rPr>
+                          <m:t>𝑧</m:t>
+                        </m:r>
+                      </m:e>
+                      <m:e>
+                        <m:r>
+                          <a:rPr lang="en-US" i="1">
+                            <a:latin typeface="Cambria Math" panose="02040503050406030204" pitchFamily="18" charset="0"/>
+                          </a:rPr>
+                          <m:t>𝑥</m:t>
+                        </m:r>
+                      </m:e>
+                    </m:d>
+                  </m:oMath>
+                </a14:m>
+                <a:endParaRPr lang="en-US" i="1" dirty="0">
+                  <a:latin typeface="Cambria Math" panose="02040503050406030204" pitchFamily="18" charset="0"/>
+                </a:endParaRPr>
+              </a:p>
+              <a:p>
+                <a:pPr marL="0" lvl="0" indent="0">
+                  <a:buNone/>
+                </a:pPr>
+                <a14:m>
+                  <m:oMathPara xmlns:m="http://schemas.openxmlformats.org/officeDocument/2006/math">
+                    <m:oMathParaPr>
+                      <m:jc m:val="centerGroup"/>
+                    </m:oMathParaPr>
+                    <m:oMath xmlns:m="http://schemas.openxmlformats.org/officeDocument/2006/math">
+                      <m:r>
+                        <m:rPr>
+                          <m:sty m:val="p"/>
+                        </m:rPr>
+                        <a:rPr lang="en-US">
+                          <a:latin typeface="Cambria Math" panose="02040503050406030204" pitchFamily="18" charset="0"/>
+                        </a:rPr>
+                        <m:t>log</m:t>
+                      </m:r>
+                      <m:r>
+                        <a:rPr lang="en-US" i="1">
+                          <a:latin typeface="Cambria Math" panose="02040503050406030204" pitchFamily="18" charset="0"/>
+                        </a:rPr>
+                        <m:t>⁡(</m:t>
+                      </m:r>
+                      <m:r>
+                        <a:rPr lang="en-US" i="1">
+                          <a:latin typeface="Cambria Math" panose="02040503050406030204" pitchFamily="18" charset="0"/>
+                        </a:rPr>
+                        <m:t>𝑝</m:t>
+                      </m:r>
+                      <m:d>
+                        <m:dPr>
+                          <m:ctrlPr>
+                            <a:rPr lang="en-US" i="1">
+                              <a:latin typeface="Cambria Math" panose="02040503050406030204" pitchFamily="18" charset="0"/>
+                            </a:rPr>
+                          </m:ctrlPr>
+                        </m:dPr>
+                        <m:e>
+                          <m:r>
+                            <a:rPr lang="en-US" i="1">
+                              <a:latin typeface="Cambria Math" panose="02040503050406030204" pitchFamily="18" charset="0"/>
+                            </a:rPr>
+                            <m:t>𝑥</m:t>
+                          </m:r>
+                        </m:e>
+                      </m:d>
+                      <m:r>
+                        <a:rPr lang="en-US" i="1">
+                          <a:latin typeface="Cambria Math" panose="02040503050406030204" pitchFamily="18" charset="0"/>
+                        </a:rPr>
+                        <m:t>)=</m:t>
+                      </m:r>
+                      <m:r>
+                        <a:rPr lang="en-US" i="1">
+                          <a:latin typeface="Cambria Math" panose="02040503050406030204" pitchFamily="18" charset="0"/>
+                        </a:rPr>
+                        <m:t>𝑙𝑜𝑔</m:t>
+                      </m:r>
+                      <m:nary>
+                        <m:naryPr>
+                          <m:limLoc m:val="undOvr"/>
+                          <m:subHide m:val="on"/>
+                          <m:supHide m:val="on"/>
+                          <m:ctrlPr>
+                            <a:rPr lang="en-US" i="1">
+                              <a:latin typeface="Cambria Math" panose="02040503050406030204" pitchFamily="18" charset="0"/>
+                            </a:rPr>
+                          </m:ctrlPr>
+                        </m:naryPr>
+                        <m:sub/>
+                        <m:sup/>
+                        <m:e>
+                          <m:sSub>
+                            <m:sSubPr>
+                              <m:ctrlPr>
+                                <a:rPr lang="en-US" i="1">
+                                  <a:latin typeface="Cambria Math" panose="02040503050406030204" pitchFamily="18" charset="0"/>
+                                </a:rPr>
+                              </m:ctrlPr>
+                            </m:sSubPr>
+                            <m:e>
+                              <m:r>
+                                <a:rPr lang="en-US" i="1">
+                                  <a:latin typeface="Cambria Math" panose="02040503050406030204" pitchFamily="18" charset="0"/>
+                                </a:rPr>
+                                <m:t>𝑝</m:t>
+                              </m:r>
+                            </m:e>
+                            <m:sub>
+                              <m:r>
+                                <a:rPr lang="en-US" i="1">
+                                  <a:latin typeface="Cambria Math" panose="02040503050406030204" pitchFamily="18" charset="0"/>
+                                </a:rPr>
+                                <m:t> </m:t>
+                              </m:r>
+                            </m:sub>
+                          </m:sSub>
+                          <m:d>
+                            <m:dPr>
+                              <m:ctrlPr>
+                                <a:rPr lang="en-US" i="1">
+                                  <a:latin typeface="Cambria Math" panose="02040503050406030204" pitchFamily="18" charset="0"/>
+                                </a:rPr>
+                              </m:ctrlPr>
+                            </m:dPr>
+                            <m:e>
+                              <m:r>
+                                <a:rPr lang="en-US" i="1">
+                                  <a:latin typeface="Cambria Math" panose="02040503050406030204" pitchFamily="18" charset="0"/>
+                                </a:rPr>
+                                <m:t>𝑥</m:t>
+                              </m:r>
+                              <m:r>
+                                <a:rPr lang="en-US" i="1">
+                                  <a:latin typeface="Cambria Math" panose="02040503050406030204" pitchFamily="18" charset="0"/>
+                                </a:rPr>
+                                <m:t>,</m:t>
+                              </m:r>
+                              <m:r>
+                                <a:rPr lang="en-US" i="1">
+                                  <a:latin typeface="Cambria Math" panose="02040503050406030204" pitchFamily="18" charset="0"/>
+                                </a:rPr>
+                                <m:t>𝑧</m:t>
+                              </m:r>
+                            </m:e>
+                          </m:d>
+                          <m:r>
+                            <a:rPr lang="en-US" i="1">
+                              <a:latin typeface="Cambria Math" panose="02040503050406030204" pitchFamily="18" charset="0"/>
+                            </a:rPr>
+                            <m:t> </m:t>
+                          </m:r>
+                          <m:r>
+                            <a:rPr lang="en-US" i="1">
+                              <a:latin typeface="Cambria Math" panose="02040503050406030204" pitchFamily="18" charset="0"/>
+                            </a:rPr>
+                            <m:t>𝑑𝑧</m:t>
+                          </m:r>
+                        </m:e>
+                      </m:nary>
+                      <m:r>
+                        <a:rPr lang="en-US" i="1">
+                          <a:latin typeface="Cambria Math" panose="02040503050406030204" pitchFamily="18" charset="0"/>
+                        </a:rPr>
+                        <m:t>=</m:t>
+                      </m:r>
+                      <m:r>
+                        <a:rPr lang="en-US" i="1">
+                          <a:latin typeface="Cambria Math" panose="02040503050406030204" pitchFamily="18" charset="0"/>
+                        </a:rPr>
+                        <m:t>𝑙𝑜𝑔</m:t>
+                      </m:r>
+                      <m:nary>
+                        <m:naryPr>
+                          <m:limLoc m:val="undOvr"/>
+                          <m:subHide m:val="on"/>
+                          <m:supHide m:val="on"/>
+                          <m:ctrlPr>
+                            <a:rPr lang="en-US" i="1">
+                              <a:latin typeface="Cambria Math" panose="02040503050406030204" pitchFamily="18" charset="0"/>
+                            </a:rPr>
+                          </m:ctrlPr>
+                        </m:naryPr>
+                        <m:sub/>
+                        <m:sup/>
+                        <m:e>
+                          <m:f>
+                            <m:fPr>
+                              <m:ctrlPr>
+                                <a:rPr lang="en-US" i="1">
+                                  <a:latin typeface="Cambria Math" panose="02040503050406030204" pitchFamily="18" charset="0"/>
+                                </a:rPr>
+                              </m:ctrlPr>
+                            </m:fPr>
+                            <m:num>
+                              <m:r>
+                                <a:rPr lang="en-US" i="1">
+                                  <a:latin typeface="Cambria Math" panose="02040503050406030204" pitchFamily="18" charset="0"/>
+                                </a:rPr>
+                                <m:t>𝑝</m:t>
+                              </m:r>
+                              <m:d>
+                                <m:dPr>
+                                  <m:ctrlPr>
+                                    <a:rPr lang="en-US" i="1">
+                                      <a:latin typeface="Cambria Math" panose="02040503050406030204" pitchFamily="18" charset="0"/>
+                                    </a:rPr>
+                                  </m:ctrlPr>
+                                </m:dPr>
+                                <m:e>
+                                  <m:r>
+                                    <a:rPr lang="en-US" i="1">
+                                      <a:latin typeface="Cambria Math" panose="02040503050406030204" pitchFamily="18" charset="0"/>
+                                    </a:rPr>
+                                    <m:t>𝑥</m:t>
+                                  </m:r>
+                                  <m:r>
+                                    <a:rPr lang="en-US" i="1">
+                                      <a:latin typeface="Cambria Math" panose="02040503050406030204" pitchFamily="18" charset="0"/>
+                                    </a:rPr>
+                                    <m:t>,</m:t>
+                                  </m:r>
+                                  <m:r>
+                                    <a:rPr lang="en-US" i="1">
+                                      <a:latin typeface="Cambria Math" panose="02040503050406030204" pitchFamily="18" charset="0"/>
+                                    </a:rPr>
+                                    <m:t>𝑧</m:t>
+                                  </m:r>
+                                </m:e>
+                              </m:d>
+                              <m:sSub>
+                                <m:sSubPr>
+                                  <m:ctrlPr>
+                                    <a:rPr lang="en-US" i="1">
+                                      <a:latin typeface="Cambria Math" panose="02040503050406030204" pitchFamily="18" charset="0"/>
+                                    </a:rPr>
+                                  </m:ctrlPr>
+                                </m:sSubPr>
+                                <m:e>
+                                  <m:r>
+                                    <a:rPr lang="en-US" i="1">
+                                      <a:latin typeface="Cambria Math" panose="02040503050406030204" pitchFamily="18" charset="0"/>
+                                    </a:rPr>
+                                    <m:t>𝑞</m:t>
+                                  </m:r>
+                                </m:e>
+                                <m:sub>
+                                  <m:r>
+                                    <a:rPr lang="en-US" b="0" i="1" smtClean="0">
+                                      <a:latin typeface="Cambria Math" panose="02040503050406030204" pitchFamily="18" charset="0"/>
+                                    </a:rPr>
+                                    <m:t> </m:t>
+                                  </m:r>
+                                </m:sub>
+                              </m:sSub>
+                              <m:r>
+                                <a:rPr lang="en-US" i="1">
+                                  <a:latin typeface="Cambria Math" panose="02040503050406030204" pitchFamily="18" charset="0"/>
+                                </a:rPr>
+                                <m:t>(</m:t>
+                              </m:r>
+                              <m:r>
+                                <a:rPr lang="en-US" i="1">
+                                  <a:latin typeface="Cambria Math" panose="02040503050406030204" pitchFamily="18" charset="0"/>
+                                </a:rPr>
+                                <m:t>𝑧</m:t>
+                              </m:r>
+                              <m:r>
+                                <a:rPr lang="en-US" i="1">
+                                  <a:latin typeface="Cambria Math" panose="02040503050406030204" pitchFamily="18" charset="0"/>
+                                </a:rPr>
+                                <m:t>|</m:t>
+                              </m:r>
+                              <m:r>
+                                <a:rPr lang="en-US" i="1">
+                                  <a:latin typeface="Cambria Math" panose="02040503050406030204" pitchFamily="18" charset="0"/>
+                                </a:rPr>
+                                <m:t>𝑥</m:t>
+                              </m:r>
+                              <m:r>
+                                <a:rPr lang="en-US" i="1">
+                                  <a:latin typeface="Cambria Math" panose="02040503050406030204" pitchFamily="18" charset="0"/>
+                                </a:rPr>
+                                <m:t>)</m:t>
+                              </m:r>
+                            </m:num>
+                            <m:den>
+                              <m:sSub>
+                                <m:sSubPr>
+                                  <m:ctrlPr>
+                                    <a:rPr lang="en-US" i="1">
+                                      <a:latin typeface="Cambria Math" panose="02040503050406030204" pitchFamily="18" charset="0"/>
+                                    </a:rPr>
+                                  </m:ctrlPr>
+                                </m:sSubPr>
+                                <m:e>
+                                  <m:r>
+                                    <a:rPr lang="en-US" i="1">
+                                      <a:latin typeface="Cambria Math" panose="02040503050406030204" pitchFamily="18" charset="0"/>
+                                    </a:rPr>
+                                    <m:t>𝑞</m:t>
+                                  </m:r>
+                                </m:e>
+                                <m:sub>
+                                  <m:r>
+                                    <a:rPr lang="en-US" b="0" i="1" smtClean="0">
+                                      <a:latin typeface="Cambria Math" panose="02040503050406030204" pitchFamily="18" charset="0"/>
+                                    </a:rPr>
+                                    <m:t> </m:t>
+                                  </m:r>
+                                </m:sub>
+                              </m:sSub>
+                              <m:r>
+                                <a:rPr lang="en-US" i="1">
+                                  <a:latin typeface="Cambria Math" panose="02040503050406030204" pitchFamily="18" charset="0"/>
+                                </a:rPr>
+                                <m:t>(</m:t>
+                              </m:r>
+                              <m:r>
+                                <a:rPr lang="en-US" i="1">
+                                  <a:latin typeface="Cambria Math" panose="02040503050406030204" pitchFamily="18" charset="0"/>
+                                </a:rPr>
+                                <m:t>𝑧</m:t>
+                              </m:r>
+                              <m:r>
+                                <a:rPr lang="en-US" i="1">
+                                  <a:latin typeface="Cambria Math" panose="02040503050406030204" pitchFamily="18" charset="0"/>
+                                </a:rPr>
+                                <m:t>|</m:t>
+                              </m:r>
+                              <m:r>
+                                <a:rPr lang="en-US" i="1">
+                                  <a:latin typeface="Cambria Math" panose="02040503050406030204" pitchFamily="18" charset="0"/>
+                                </a:rPr>
+                                <m:t>𝑥</m:t>
+                              </m:r>
+                              <m:r>
+                                <a:rPr lang="en-US" i="1">
+                                  <a:latin typeface="Cambria Math" panose="02040503050406030204" pitchFamily="18" charset="0"/>
+                                </a:rPr>
+                                <m:t>)</m:t>
+                              </m:r>
+                            </m:den>
+                          </m:f>
+                          <m:r>
+                            <a:rPr lang="en-US" i="1">
+                              <a:latin typeface="Cambria Math" panose="02040503050406030204" pitchFamily="18" charset="0"/>
+                            </a:rPr>
+                            <m:t>𝑑𝑥</m:t>
+                          </m:r>
+                        </m:e>
+                      </m:nary>
+                    </m:oMath>
+                  </m:oMathPara>
+                </a14:m>
+                <a:endParaRPr lang="en-US" dirty="0"/>
+              </a:p>
+              <a:p>
+                <a:r>
+                  <a:rPr lang="en-US" dirty="0"/>
+                  <a:t>Expressing in terms of expected value</a:t>
+                </a:r>
+              </a:p>
+              <a:p>
+                <a:pPr marL="0" indent="0">
+                  <a:buNone/>
+                </a:pPr>
+                <a14:m>
+                  <m:oMathPara xmlns:m="http://schemas.openxmlformats.org/officeDocument/2006/math">
+                    <m:oMathParaPr>
+                      <m:jc m:val="centerGroup"/>
+                    </m:oMathParaPr>
+                    <m:oMath xmlns:m="http://schemas.openxmlformats.org/officeDocument/2006/math">
+                      <m:r>
+                        <m:rPr>
+                          <m:sty m:val="p"/>
+                        </m:rPr>
+                        <a:rPr lang="en-US">
+                          <a:latin typeface="Cambria Math" panose="02040503050406030204" pitchFamily="18" charset="0"/>
+                        </a:rPr>
+                        <m:t>log</m:t>
+                      </m:r>
+                      <m:r>
+                        <a:rPr lang="en-US" i="1">
+                          <a:latin typeface="Cambria Math" panose="02040503050406030204" pitchFamily="18" charset="0"/>
+                        </a:rPr>
+                        <m:t>⁡(</m:t>
+                      </m:r>
+                      <m:r>
+                        <a:rPr lang="en-US" i="1">
+                          <a:latin typeface="Cambria Math" panose="02040503050406030204" pitchFamily="18" charset="0"/>
+                        </a:rPr>
+                        <m:t>𝑝</m:t>
+                      </m:r>
+                      <m:d>
+                        <m:dPr>
+                          <m:ctrlPr>
+                            <a:rPr lang="en-US" i="1">
+                              <a:latin typeface="Cambria Math" panose="02040503050406030204" pitchFamily="18" charset="0"/>
+                            </a:rPr>
+                          </m:ctrlPr>
+                        </m:dPr>
+                        <m:e>
+                          <m:r>
+                            <a:rPr lang="en-US" i="1">
+                              <a:latin typeface="Cambria Math" panose="02040503050406030204" pitchFamily="18" charset="0"/>
+                            </a:rPr>
+                            <m:t>𝑥</m:t>
+                          </m:r>
+                        </m:e>
+                      </m:d>
+                      <m:r>
+                        <a:rPr lang="en-US" i="1">
+                          <a:latin typeface="Cambria Math" panose="02040503050406030204" pitchFamily="18" charset="0"/>
+                        </a:rPr>
+                        <m:t>)=</m:t>
+                      </m:r>
+                      <m:func>
+                        <m:funcPr>
+                          <m:ctrlPr>
+                            <a:rPr lang="en-US" i="1">
+                              <a:latin typeface="Cambria Math" panose="02040503050406030204" pitchFamily="18" charset="0"/>
+                            </a:rPr>
+                          </m:ctrlPr>
+                        </m:funcPr>
+                        <m:fName>
+                          <m:r>
+                            <m:rPr>
+                              <m:sty m:val="p"/>
+                            </m:rPr>
+                            <a:rPr lang="en-US">
+                              <a:latin typeface="Cambria Math" panose="02040503050406030204" pitchFamily="18" charset="0"/>
+                            </a:rPr>
+                            <m:t>log</m:t>
+                          </m:r>
+                        </m:fName>
+                        <m:e>
+                          <m:r>
+                            <a:rPr lang="en-US" i="1">
+                              <a:latin typeface="Cambria Math" panose="02040503050406030204" pitchFamily="18" charset="0"/>
+                            </a:rPr>
+                            <m:t> </m:t>
+                          </m:r>
+                        </m:e>
+                      </m:func>
+                      <m:sSub>
+                        <m:sSubPr>
+                          <m:ctrlPr>
+                            <a:rPr lang="en-US" i="1">
+                              <a:latin typeface="Cambria Math" panose="02040503050406030204" pitchFamily="18" charset="0"/>
+                            </a:rPr>
+                          </m:ctrlPr>
+                        </m:sSubPr>
+                        <m:e>
+                          <m:r>
+                            <a:rPr lang="en-US" i="1">
+                              <a:latin typeface="Cambria Math" panose="02040503050406030204" pitchFamily="18" charset="0"/>
+                            </a:rPr>
+                            <m:t>𝐸</m:t>
+                          </m:r>
+                        </m:e>
+                        <m:sub>
+                          <m:sSub>
+                            <m:sSubPr>
+                              <m:ctrlPr>
+                                <a:rPr lang="en-US" i="1">
+                                  <a:latin typeface="Cambria Math" panose="02040503050406030204" pitchFamily="18" charset="0"/>
+                                </a:rPr>
+                              </m:ctrlPr>
+                            </m:sSubPr>
+                            <m:e>
+                              <m:r>
+                                <a:rPr lang="en-US" i="1">
+                                  <a:latin typeface="Cambria Math" panose="02040503050406030204" pitchFamily="18" charset="0"/>
+                                </a:rPr>
+                                <m:t>𝑞</m:t>
+                              </m:r>
+                            </m:e>
+                            <m:sub>
+                              <m:r>
+                                <a:rPr lang="en-US" b="0" i="1" smtClean="0">
+                                  <a:latin typeface="Cambria Math" panose="02040503050406030204" pitchFamily="18" charset="0"/>
+                                </a:rPr>
+                                <m:t> </m:t>
+                              </m:r>
+                            </m:sub>
+                          </m:sSub>
+                          <m:r>
+                            <a:rPr lang="en-US" i="1">
+                              <a:latin typeface="Cambria Math" panose="02040503050406030204" pitchFamily="18" charset="0"/>
+                            </a:rPr>
+                            <m:t>(</m:t>
+                          </m:r>
+                          <m:r>
+                            <a:rPr lang="en-US" i="1">
+                              <a:latin typeface="Cambria Math" panose="02040503050406030204" pitchFamily="18" charset="0"/>
+                            </a:rPr>
+                            <m:t>𝑧</m:t>
+                          </m:r>
+                          <m:r>
+                            <a:rPr lang="en-US" i="1">
+                              <a:latin typeface="Cambria Math" panose="02040503050406030204" pitchFamily="18" charset="0"/>
+                            </a:rPr>
+                            <m:t>|</m:t>
+                          </m:r>
+                          <m:r>
+                            <a:rPr lang="en-US" i="1">
+                              <a:latin typeface="Cambria Math" panose="02040503050406030204" pitchFamily="18" charset="0"/>
+                            </a:rPr>
+                            <m:t>𝑥</m:t>
+                          </m:r>
+                          <m:r>
+                            <a:rPr lang="en-US" i="1">
+                              <a:latin typeface="Cambria Math" panose="02040503050406030204" pitchFamily="18" charset="0"/>
+                            </a:rPr>
+                            <m:t>)</m:t>
+                          </m:r>
+                        </m:sub>
+                      </m:sSub>
+                      <m:d>
+                        <m:dPr>
+                          <m:ctrlPr>
+                            <a:rPr lang="en-US" i="1">
+                              <a:latin typeface="Cambria Math" panose="02040503050406030204" pitchFamily="18" charset="0"/>
+                            </a:rPr>
+                          </m:ctrlPr>
+                        </m:dPr>
+                        <m:e>
+                          <m:f>
+                            <m:fPr>
+                              <m:ctrlPr>
+                                <a:rPr lang="en-US" i="1">
+                                  <a:latin typeface="Cambria Math" panose="02040503050406030204" pitchFamily="18" charset="0"/>
+                                </a:rPr>
+                              </m:ctrlPr>
+                            </m:fPr>
+                            <m:num>
+                              <m:r>
+                                <a:rPr lang="en-US" i="1">
+                                  <a:latin typeface="Cambria Math" panose="02040503050406030204" pitchFamily="18" charset="0"/>
+                                </a:rPr>
+                                <m:t>𝑝</m:t>
+                              </m:r>
+                              <m:d>
+                                <m:dPr>
+                                  <m:ctrlPr>
+                                    <a:rPr lang="en-US" i="1">
+                                      <a:latin typeface="Cambria Math" panose="02040503050406030204" pitchFamily="18" charset="0"/>
+                                    </a:rPr>
+                                  </m:ctrlPr>
+                                </m:dPr>
+                                <m:e>
+                                  <m:r>
+                                    <a:rPr lang="en-US" i="1">
+                                      <a:latin typeface="Cambria Math" panose="02040503050406030204" pitchFamily="18" charset="0"/>
+                                    </a:rPr>
+                                    <m:t>𝑥</m:t>
+                                  </m:r>
+                                  <m:r>
+                                    <a:rPr lang="en-US" i="1">
+                                      <a:latin typeface="Cambria Math" panose="02040503050406030204" pitchFamily="18" charset="0"/>
+                                    </a:rPr>
+                                    <m:t>,</m:t>
+                                  </m:r>
+                                  <m:r>
+                                    <a:rPr lang="en-US" i="1">
+                                      <a:latin typeface="Cambria Math" panose="02040503050406030204" pitchFamily="18" charset="0"/>
+                                    </a:rPr>
+                                    <m:t>𝑧</m:t>
+                                  </m:r>
+                                </m:e>
+                              </m:d>
+                            </m:num>
+                            <m:den>
+                              <m:sSub>
+                                <m:sSubPr>
+                                  <m:ctrlPr>
+                                    <a:rPr lang="en-US" i="1">
+                                      <a:latin typeface="Cambria Math" panose="02040503050406030204" pitchFamily="18" charset="0"/>
+                                    </a:rPr>
+                                  </m:ctrlPr>
+                                </m:sSubPr>
+                                <m:e>
+                                  <m:r>
+                                    <a:rPr lang="en-US" i="1">
+                                      <a:latin typeface="Cambria Math" panose="02040503050406030204" pitchFamily="18" charset="0"/>
+                                    </a:rPr>
+                                    <m:t>𝑞</m:t>
+                                  </m:r>
+                                </m:e>
+                                <m:sub>
+                                  <m:r>
+                                    <a:rPr lang="en-US" b="0" i="1" smtClean="0">
+                                      <a:latin typeface="Cambria Math" panose="02040503050406030204" pitchFamily="18" charset="0"/>
+                                    </a:rPr>
+                                    <m:t> </m:t>
+                                  </m:r>
+                                </m:sub>
+                              </m:sSub>
+                              <m:r>
+                                <a:rPr lang="en-US" i="1">
+                                  <a:latin typeface="Cambria Math" panose="02040503050406030204" pitchFamily="18" charset="0"/>
+                                </a:rPr>
+                                <m:t>(</m:t>
+                              </m:r>
+                              <m:r>
+                                <a:rPr lang="en-US" i="1">
+                                  <a:latin typeface="Cambria Math" panose="02040503050406030204" pitchFamily="18" charset="0"/>
+                                </a:rPr>
+                                <m:t>𝑧</m:t>
+                              </m:r>
+                              <m:r>
+                                <a:rPr lang="en-US" i="1">
+                                  <a:latin typeface="Cambria Math" panose="02040503050406030204" pitchFamily="18" charset="0"/>
+                                </a:rPr>
+                                <m:t>|</m:t>
+                              </m:r>
+                              <m:r>
+                                <a:rPr lang="en-US" i="1">
+                                  <a:latin typeface="Cambria Math" panose="02040503050406030204" pitchFamily="18" charset="0"/>
+                                </a:rPr>
+                                <m:t>𝑥</m:t>
+                              </m:r>
+                              <m:r>
+                                <a:rPr lang="en-US" i="1">
+                                  <a:latin typeface="Cambria Math" panose="02040503050406030204" pitchFamily="18" charset="0"/>
+                                </a:rPr>
+                                <m:t>)</m:t>
+                              </m:r>
+                            </m:den>
+                          </m:f>
+                        </m:e>
+                      </m:d>
+                    </m:oMath>
+                  </m:oMathPara>
+                </a14:m>
+                <a:endParaRPr lang="en-US" dirty="0"/>
+              </a:p>
+            </p:txBody>
+          </p:sp>
+        </mc:Choice>
+        <mc:Fallback xmlns="">
+          <p:sp>
+            <p:nvSpPr>
+              <p:cNvPr id="3" name="Content Placeholder 2">
+                <a:extLst>
+                  <a:ext uri="{FF2B5EF4-FFF2-40B4-BE49-F238E27FC236}">
+                    <a16:creationId xmlns:a16="http://schemas.microsoft.com/office/drawing/2014/main" id="{43B72DE9-4B50-2F87-683A-F4005205C162}"/>
+                  </a:ext>
+                </a:extLst>
+              </p:cNvPr>
+              <p:cNvSpPr>
+                <a:spLocks noGrp="1" noRot="1" noChangeAspect="1" noMove="1" noResize="1" noEditPoints="1" noAdjustHandles="1" noChangeArrowheads="1" noChangeShapeType="1" noTextEdit="1"/>
+              </p:cNvSpPr>
+              <p:nvPr>
+                <p:ph idx="1"/>
+              </p:nvPr>
+            </p:nvSpPr>
+            <p:spPr>
+              <a:blipFill>
+                <a:blip r:embed="rId2"/>
+                <a:stretch>
+                  <a:fillRect l="-1111" t="-1436"/>
+                </a:stretch>
+              </a:blipFill>
+            </p:spPr>
+            <p:txBody>
+              <a:bodyPr/>
+              <a:lstStyle/>
+              <a:p>
+                <a:r>
+                  <a:rPr lang="en-US">
+                    <a:noFill/>
+                  </a:rPr>
+                  <a:t> </a:t>
+                </a:r>
+              </a:p>
+            </p:txBody>
+          </p:sp>
+        </mc:Fallback>
+      </mc:AlternateContent>
+    </p:spTree>
+    <p:extLst>
+      <p:ext uri="{BB962C8B-B14F-4D97-AF65-F5344CB8AC3E}">
+        <p14:creationId xmlns:p14="http://schemas.microsoft.com/office/powerpoint/2010/main" val="1871029784"/>
+      </p:ext>
+    </p:extLst>
+  </p:cSld>
+  <p:clrMapOvr>
+    <a:masterClrMapping/>
+  </p:clrMapOvr>
+  <p:timing>
+    <p:tnLst>
+      <p:par>
+        <p:cTn id="1" dur="indefinite" restart="never" nodeType="tmRoot">
+          <p:childTnLst>
+            <p:seq concurrent="1" nextAc="seek">
+              <p:cTn id="2" dur="indefinite" nodeType="mainSeq">
+                <p:childTnLst>
+                  <p:par>
+                    <p:cTn id="3" fill="hold">
+                      <p:stCondLst>
+                        <p:cond delay="indefinite"/>
+                      </p:stCondLst>
+                      <p:childTnLst>
+                        <p:par>
+                          <p:cTn id="4" fill="hold">
+                            <p:stCondLst>
+                              <p:cond delay="0"/>
+                            </p:stCondLst>
+                            <p:childTnLst>
+                              <p:par>
+                                <p:cTn id="5" presetID="1" presetClass="entr" presetSubtype="0" fill="hold" nodeType="clickEffect">
+                                  <p:stCondLst>
+                                    <p:cond delay="0"/>
+                                  </p:stCondLst>
+                                  <p:childTnLst>
+                                    <p:set>
+                                      <p:cBhvr>
+                                        <p:cTn id="6" dur="1" fill="hold">
+                                          <p:stCondLst>
+                                            <p:cond delay="0"/>
+                                          </p:stCondLst>
+                                        </p:cTn>
+                                        <p:tgtEl>
+                                          <p:spTgt spid="3">
+                                            <p:txEl>
+                                              <p:pRg st="2" end="2"/>
+                                            </p:txEl>
+                                          </p:spTgt>
+                                        </p:tgtEl>
+                                        <p:attrNameLst>
+                                          <p:attrName>style.visibility</p:attrName>
+                                        </p:attrNameLst>
+                                      </p:cBhvr>
+                                      <p:to>
+                                        <p:strVal val="visible"/>
+                                      </p:to>
+                                    </p:set>
+                                  </p:childTnLst>
+                                </p:cTn>
+                              </p:par>
+                              <p:par>
+                                <p:cTn id="7" presetID="1" presetClass="entr" presetSubtype="0" fill="hold" nodeType="withEffect">
+                                  <p:stCondLst>
+                                    <p:cond delay="0"/>
+                                  </p:stCondLst>
+                                  <p:childTnLst>
+                                    <p:set>
+                                      <p:cBhvr>
+                                        <p:cTn id="8" dur="1" fill="hold">
+                                          <p:stCondLst>
+                                            <p:cond delay="0"/>
+                                          </p:stCondLst>
+                                        </p:cTn>
+                                        <p:tgtEl>
+                                          <p:spTgt spid="3">
+                                            <p:txEl>
+                                              <p:pRg st="3" end="3"/>
+                                            </p:txEl>
+                                          </p:spTgt>
+                                        </p:tgtEl>
+                                        <p:attrNameLst>
+                                          <p:attrName>style.visibility</p:attrName>
+                                        </p:attrNameLst>
+                                      </p:cBhvr>
+                                      <p:to>
+                                        <p:strVal val="visible"/>
+                                      </p:to>
+                                    </p:set>
+                                  </p:childTnLst>
+                                </p:cTn>
+                              </p:par>
+                            </p:childTnLst>
+                          </p:cTn>
+                        </p:par>
+                      </p:childTnLst>
+                    </p:cTn>
+                  </p:par>
+                </p:childTnLst>
+              </p:cTn>
+              <p:prevCondLst>
+                <p:cond evt="onPrev" delay="0">
+                  <p:tgtEl>
+                    <p:sldTgt/>
+                  </p:tgtEl>
+                </p:cond>
+              </p:prevCondLst>
+              <p:nextCondLst>
+                <p:cond evt="onNext" delay="0">
+                  <p:tgtEl>
+                    <p:sldTgt/>
+                  </p:tgtEl>
+                </p:cond>
+              </p:nextCondLst>
+            </p:seq>
+          </p:childTnLst>
+        </p:cTn>
+      </p:par>
+    </p:tnLst>
+  </p:timing>
+</p:sld>
+</file>
+
+<file path=ppt/slides/slide53.xml><?xml version="1.0" encoding="utf-8"?>
+<p:sld xmlns:a="http://schemas.openxmlformats.org/drawingml/2006/main" xmlns:r="http://schemas.openxmlformats.org/officeDocument/2006/relationships" xmlns:p="http://schemas.openxmlformats.org/presentationml/2006/main">
+  <p:cSld>
+    <p:spTree>
+      <p:nvGrpSpPr>
+        <p:cNvPr id="1" name="">
+          <a:extLst>
+            <a:ext uri="{FF2B5EF4-FFF2-40B4-BE49-F238E27FC236}">
+              <a16:creationId xmlns:a16="http://schemas.microsoft.com/office/drawing/2014/main" id="{A4E4059B-5322-34BE-F0CB-84ECBC580C4A}"/>
+            </a:ext>
+          </a:extLst>
+        </p:cNvPr>
+        <p:cNvGrpSpPr/>
+        <p:nvPr/>
+      </p:nvGrpSpPr>
+      <p:grpSpPr>
+        <a:xfrm>
+          <a:off x="0" y="0"/>
+          <a:ext cx="0" cy="0"/>
+          <a:chOff x="0" y="0"/>
+          <a:chExt cx="0" cy="0"/>
+        </a:xfrm>
+      </p:grpSpPr>
+      <p:sp>
+        <p:nvSpPr>
+          <p:cNvPr id="2" name="Title 1">
+            <a:extLst>
+              <a:ext uri="{FF2B5EF4-FFF2-40B4-BE49-F238E27FC236}">
+                <a16:creationId xmlns:a16="http://schemas.microsoft.com/office/drawing/2014/main" id="{6E786532-182B-9382-AC23-982D46104076}"/>
+              </a:ext>
+            </a:extLst>
+          </p:cNvPr>
+          <p:cNvSpPr>
+            <a:spLocks noGrp="1"/>
+          </p:cNvSpPr>
+          <p:nvPr>
+            <p:ph type="title"/>
+          </p:nvPr>
+        </p:nvSpPr>
+        <p:spPr>
+          <a:xfrm>
+            <a:off x="287721" y="205979"/>
+            <a:ext cx="8765627" cy="857250"/>
+          </a:xfrm>
+        </p:spPr>
+        <p:txBody>
+          <a:bodyPr>
+            <a:noAutofit/>
+          </a:bodyPr>
+          <a:lstStyle/>
+          <a:p>
+            <a:pPr marL="0" lvl="0" indent="0">
+              <a:buNone/>
+            </a:pPr>
+            <a:r>
+              <a:rPr sz="2800" dirty="0"/>
+              <a:t>What do you expect: </a:t>
+            </a:r>
+            <a:r>
+              <a:rPr lang="en-US" sz="2800" dirty="0"/>
+              <a:t>Expectation and Marginal Distribution</a:t>
+            </a:r>
+            <a:endParaRPr sz="2800" dirty="0"/>
+          </a:p>
+        </p:txBody>
+      </p:sp>
+      <mc:AlternateContent xmlns:mc="http://schemas.openxmlformats.org/markup-compatibility/2006" xmlns:a14="http://schemas.microsoft.com/office/drawing/2010/main">
+        <mc:Choice Requires="a14">
+          <p:sp>
+            <p:nvSpPr>
+              <p:cNvPr id="3" name="Content Placeholder 2">
+                <a:extLst>
+                  <a:ext uri="{FF2B5EF4-FFF2-40B4-BE49-F238E27FC236}">
+                    <a16:creationId xmlns:a16="http://schemas.microsoft.com/office/drawing/2014/main" id="{9B8CC8AD-8941-AB7E-4FAA-D120FD276B1C}"/>
+                  </a:ext>
+                </a:extLst>
+              </p:cNvPr>
+              <p:cNvSpPr>
+                <a:spLocks noGrp="1"/>
+              </p:cNvSpPr>
+              <p:nvPr>
+                <p:ph idx="1"/>
+              </p:nvPr>
+            </p:nvSpPr>
+            <p:spPr>
+              <a:xfrm>
+                <a:off x="457200" y="1200151"/>
+                <a:ext cx="8229600" cy="3737370"/>
+              </a:xfrm>
+            </p:spPr>
+            <p:txBody>
+              <a:bodyPr>
+                <a:normAutofit lnSpcReduction="10000"/>
+              </a:bodyPr>
+              <a:lstStyle/>
+              <a:p>
+                <a:pPr marL="0" lvl="0" indent="0">
+                  <a:buNone/>
+                </a:pPr>
+                <a:r>
+                  <a:rPr lang="en-US" dirty="0"/>
+                  <a:t>We can write the log marginal distribution of </a:t>
+                </a:r>
+                <a14:m>
+                  <m:oMath xmlns:m="http://schemas.openxmlformats.org/officeDocument/2006/math">
+                    <m:sSub>
+                      <m:sSubPr>
+                        <m:ctrlPr>
+                          <a:rPr lang="en-US" i="1">
+                            <a:latin typeface="Cambria Math" panose="02040503050406030204" pitchFamily="18" charset="0"/>
+                          </a:rPr>
+                        </m:ctrlPr>
+                      </m:sSubPr>
+                      <m:e>
+                        <m:r>
+                          <a:rPr lang="en-US" i="1">
+                            <a:latin typeface="Cambria Math" panose="02040503050406030204" pitchFamily="18" charset="0"/>
+                          </a:rPr>
+                          <m:t>𝑝</m:t>
+                        </m:r>
+                      </m:e>
+                      <m:sub>
+                        <m:r>
+                          <a:rPr lang="en-US" i="1">
+                            <a:latin typeface="Cambria Math" panose="02040503050406030204" pitchFamily="18" charset="0"/>
+                          </a:rPr>
+                          <m:t> </m:t>
+                        </m:r>
+                      </m:sub>
+                    </m:sSub>
+                    <m:d>
+                      <m:dPr>
+                        <m:ctrlPr>
+                          <a:rPr lang="en-US" i="1">
+                            <a:latin typeface="Cambria Math" panose="02040503050406030204" pitchFamily="18" charset="0"/>
+                          </a:rPr>
+                        </m:ctrlPr>
+                      </m:dPr>
+                      <m:e>
+                        <m:r>
+                          <a:rPr lang="en-US" i="1">
+                            <a:latin typeface="Cambria Math" panose="02040503050406030204" pitchFamily="18" charset="0"/>
+                          </a:rPr>
+                          <m:t>𝑥</m:t>
+                        </m:r>
+                        <m:r>
+                          <a:rPr lang="en-US" i="1">
+                            <a:latin typeface="Cambria Math" panose="02040503050406030204" pitchFamily="18" charset="0"/>
+                          </a:rPr>
+                          <m:t>,</m:t>
+                        </m:r>
+                        <m:r>
+                          <a:rPr lang="en-US" i="1">
+                            <a:latin typeface="Cambria Math" panose="02040503050406030204" pitchFamily="18" charset="0"/>
+                          </a:rPr>
+                          <m:t>𝑧</m:t>
+                        </m:r>
+                      </m:e>
+                    </m:d>
+                  </m:oMath>
+                </a14:m>
+                <a:r>
+                  <a:rPr lang="en-US" dirty="0"/>
+                  <a:t> as an expectation with respect to a </a:t>
+                </a:r>
+                <a:r>
+                  <a:rPr lang="en-US" b="1" dirty="0" err="1"/>
+                  <a:t>parmeterized</a:t>
+                </a:r>
+                <a:r>
+                  <a:rPr lang="en-US" b="1" dirty="0"/>
+                  <a:t> distribution </a:t>
+                </a:r>
+                <a14:m>
+                  <m:oMath xmlns:m="http://schemas.openxmlformats.org/officeDocument/2006/math">
+                    <m:sSub>
+                      <m:sSubPr>
+                        <m:ctrlPr>
+                          <a:rPr lang="en-US" i="1">
+                            <a:latin typeface="Cambria Math" panose="02040503050406030204" pitchFamily="18" charset="0"/>
+                          </a:rPr>
+                        </m:ctrlPr>
+                      </m:sSubPr>
+                      <m:e>
+                        <m:r>
+                          <a:rPr lang="en-US" i="1">
+                            <a:latin typeface="Cambria Math" panose="02040503050406030204" pitchFamily="18" charset="0"/>
+                          </a:rPr>
+                          <m:t>𝑞</m:t>
+                        </m:r>
+                      </m:e>
+                      <m:sub>
+                        <m:r>
+                          <a:rPr lang="en-US" i="1">
+                            <a:latin typeface="Cambria Math" panose="02040503050406030204" pitchFamily="18" charset="0"/>
+                            <a:ea typeface="Cambria Math" panose="02040503050406030204" pitchFamily="18" charset="0"/>
+                          </a:rPr>
+                          <m:t>𝜑</m:t>
+                        </m:r>
+                      </m:sub>
+                    </m:sSub>
+                    <m:d>
+                      <m:dPr>
+                        <m:ctrlPr>
+                          <a:rPr lang="en-US" i="1">
+                            <a:latin typeface="Cambria Math" panose="02040503050406030204" pitchFamily="18" charset="0"/>
+                            <a:ea typeface="Cambria Math" panose="02040503050406030204" pitchFamily="18" charset="0"/>
+                          </a:rPr>
+                        </m:ctrlPr>
+                      </m:dPr>
+                      <m:e>
+                        <m:r>
+                          <a:rPr lang="en-US" i="1">
+                            <a:latin typeface="Cambria Math" panose="02040503050406030204" pitchFamily="18" charset="0"/>
+                          </a:rPr>
+                          <m:t>𝑧</m:t>
+                        </m:r>
+                      </m:e>
+                      <m:e>
+                        <m:r>
+                          <a:rPr lang="en-US" i="1">
+                            <a:latin typeface="Cambria Math" panose="02040503050406030204" pitchFamily="18" charset="0"/>
+                          </a:rPr>
+                          <m:t>𝑥</m:t>
+                        </m:r>
+                      </m:e>
+                    </m:d>
+                  </m:oMath>
+                </a14:m>
+                <a:endParaRPr lang="en-US" i="1" dirty="0">
+                  <a:latin typeface="Cambria Math" panose="02040503050406030204" pitchFamily="18" charset="0"/>
+                </a:endParaRPr>
+              </a:p>
+              <a:p>
+                <a:pPr marL="0" indent="0">
+                  <a:buNone/>
+                </a:pPr>
+                <a14:m>
+                  <m:oMathPara xmlns:m="http://schemas.openxmlformats.org/officeDocument/2006/math">
+                    <m:oMathParaPr>
+                      <m:jc m:val="centerGroup"/>
+                    </m:oMathParaPr>
+                    <m:oMath xmlns:m="http://schemas.openxmlformats.org/officeDocument/2006/math">
+                      <m:func>
+                        <m:funcPr>
+                          <m:ctrlPr>
+                            <a:rPr lang="en-US" i="1">
+                              <a:latin typeface="Cambria Math" panose="02040503050406030204" pitchFamily="18" charset="0"/>
+                            </a:rPr>
+                          </m:ctrlPr>
+                        </m:funcPr>
+                        <m:fName>
+                          <m:r>
+                            <m:rPr>
+                              <m:sty m:val="p"/>
+                            </m:rPr>
+                            <a:rPr lang="en-US">
+                              <a:latin typeface="Cambria Math" panose="02040503050406030204" pitchFamily="18" charset="0"/>
+                            </a:rPr>
+                            <m:t>log</m:t>
+                          </m:r>
+                        </m:fName>
+                        <m:e>
+                          <m:d>
+                            <m:dPr>
+                              <m:ctrlPr>
+                                <a:rPr lang="en-US" i="1">
+                                  <a:latin typeface="Cambria Math" panose="02040503050406030204" pitchFamily="18" charset="0"/>
+                                </a:rPr>
+                              </m:ctrlPr>
+                            </m:dPr>
+                            <m:e>
+                              <m:r>
+                                <a:rPr lang="en-US" i="1">
+                                  <a:latin typeface="Cambria Math" panose="02040503050406030204" pitchFamily="18" charset="0"/>
+                                </a:rPr>
+                                <m:t>𝑝</m:t>
+                              </m:r>
+                              <m:d>
+                                <m:dPr>
+                                  <m:ctrlPr>
+                                    <a:rPr lang="en-US" i="1">
+                                      <a:latin typeface="Cambria Math" panose="02040503050406030204" pitchFamily="18" charset="0"/>
+                                    </a:rPr>
+                                  </m:ctrlPr>
+                                </m:dPr>
+                                <m:e>
+                                  <m:r>
+                                    <a:rPr lang="en-US" i="1">
+                                      <a:latin typeface="Cambria Math" panose="02040503050406030204" pitchFamily="18" charset="0"/>
+                                    </a:rPr>
+                                    <m:t>𝑥</m:t>
+                                  </m:r>
+                                </m:e>
+                              </m:d>
+                            </m:e>
+                          </m:d>
+                        </m:e>
+                      </m:func>
+                      <m:r>
+                        <a:rPr lang="en-US" i="1">
+                          <a:latin typeface="Cambria Math" panose="02040503050406030204" pitchFamily="18" charset="0"/>
+                        </a:rPr>
+                        <m:t>=</m:t>
+                      </m:r>
+                      <m:func>
+                        <m:funcPr>
+                          <m:ctrlPr>
+                            <a:rPr lang="en-US" i="1">
+                              <a:latin typeface="Cambria Math" panose="02040503050406030204" pitchFamily="18" charset="0"/>
+                            </a:rPr>
+                          </m:ctrlPr>
+                        </m:funcPr>
+                        <m:fName>
+                          <m:r>
+                            <m:rPr>
+                              <m:sty m:val="p"/>
+                            </m:rPr>
+                            <a:rPr lang="en-US">
+                              <a:latin typeface="Cambria Math" panose="02040503050406030204" pitchFamily="18" charset="0"/>
+                            </a:rPr>
+                            <m:t>log</m:t>
+                          </m:r>
+                        </m:fName>
+                        <m:e>
+                          <m:r>
+                            <a:rPr lang="en-US" i="1">
+                              <a:latin typeface="Cambria Math" panose="02040503050406030204" pitchFamily="18" charset="0"/>
+                            </a:rPr>
+                            <m:t> </m:t>
+                          </m:r>
+                        </m:e>
+                      </m:func>
+                      <m:sSub>
+                        <m:sSubPr>
+                          <m:ctrlPr>
+                            <a:rPr lang="en-US" i="1">
+                              <a:latin typeface="Cambria Math" panose="02040503050406030204" pitchFamily="18" charset="0"/>
+                            </a:rPr>
+                          </m:ctrlPr>
+                        </m:sSubPr>
+                        <m:e>
+                          <m:r>
+                            <a:rPr lang="en-US" i="1">
+                              <a:latin typeface="Cambria Math" panose="02040503050406030204" pitchFamily="18" charset="0"/>
+                            </a:rPr>
+                            <m:t>𝐸</m:t>
+                          </m:r>
+                        </m:e>
+                        <m:sub>
+                          <m:sSub>
+                            <m:sSubPr>
+                              <m:ctrlPr>
+                                <a:rPr lang="en-US" i="1">
+                                  <a:latin typeface="Cambria Math" panose="02040503050406030204" pitchFamily="18" charset="0"/>
+                                </a:rPr>
+                              </m:ctrlPr>
+                            </m:sSubPr>
+                            <m:e>
+                              <m:r>
+                                <a:rPr lang="en-US" i="1">
+                                  <a:latin typeface="Cambria Math" panose="02040503050406030204" pitchFamily="18" charset="0"/>
+                                </a:rPr>
+                                <m:t>𝑞</m:t>
+                              </m:r>
+                            </m:e>
+                            <m:sub>
+                              <m:r>
+                                <a:rPr lang="en-US" i="1">
+                                  <a:latin typeface="Cambria Math" panose="02040503050406030204" pitchFamily="18" charset="0"/>
+                                  <a:ea typeface="Cambria Math" panose="02040503050406030204" pitchFamily="18" charset="0"/>
+                                </a:rPr>
+                                <m:t>𝜑</m:t>
+                              </m:r>
+                            </m:sub>
+                          </m:sSub>
+                          <m:d>
+                            <m:dPr>
+                              <m:ctrlPr>
+                                <a:rPr lang="en-US" i="1">
+                                  <a:latin typeface="Cambria Math" panose="02040503050406030204" pitchFamily="18" charset="0"/>
+                                  <a:ea typeface="Cambria Math" panose="02040503050406030204" pitchFamily="18" charset="0"/>
+                                </a:rPr>
+                              </m:ctrlPr>
+                            </m:dPr>
+                            <m:e>
+                              <m:r>
+                                <a:rPr lang="en-US" i="1">
+                                  <a:latin typeface="Cambria Math" panose="02040503050406030204" pitchFamily="18" charset="0"/>
+                                </a:rPr>
+                                <m:t>𝑧</m:t>
+                              </m:r>
+                            </m:e>
+                            <m:e>
+                              <m:r>
+                                <a:rPr lang="en-US" i="1">
+                                  <a:latin typeface="Cambria Math" panose="02040503050406030204" pitchFamily="18" charset="0"/>
+                                </a:rPr>
+                                <m:t>𝑥</m:t>
+                              </m:r>
+                            </m:e>
+                          </m:d>
+                        </m:sub>
+                      </m:sSub>
+                      <m:d>
+                        <m:dPr>
+                          <m:ctrlPr>
+                            <a:rPr lang="en-US" i="1">
+                              <a:latin typeface="Cambria Math" panose="02040503050406030204" pitchFamily="18" charset="0"/>
+                            </a:rPr>
+                          </m:ctrlPr>
+                        </m:dPr>
+                        <m:e>
+                          <m:f>
+                            <m:fPr>
+                              <m:ctrlPr>
+                                <a:rPr lang="en-US" i="1">
+                                  <a:latin typeface="Cambria Math" panose="02040503050406030204" pitchFamily="18" charset="0"/>
+                                </a:rPr>
+                              </m:ctrlPr>
+                            </m:fPr>
+                            <m:num>
+                              <m:r>
+                                <a:rPr lang="en-US" i="1">
+                                  <a:latin typeface="Cambria Math" panose="02040503050406030204" pitchFamily="18" charset="0"/>
+                                </a:rPr>
+                                <m:t>𝑝</m:t>
+                              </m:r>
+                              <m:d>
+                                <m:dPr>
+                                  <m:ctrlPr>
+                                    <a:rPr lang="en-US" i="1">
+                                      <a:latin typeface="Cambria Math" panose="02040503050406030204" pitchFamily="18" charset="0"/>
+                                    </a:rPr>
+                                  </m:ctrlPr>
+                                </m:dPr>
+                                <m:e>
+                                  <m:r>
+                                    <a:rPr lang="en-US" i="1">
+                                      <a:latin typeface="Cambria Math" panose="02040503050406030204" pitchFamily="18" charset="0"/>
+                                    </a:rPr>
+                                    <m:t>𝑥</m:t>
+                                  </m:r>
+                                  <m:r>
+                                    <a:rPr lang="en-US" i="1">
+                                      <a:latin typeface="Cambria Math" panose="02040503050406030204" pitchFamily="18" charset="0"/>
+                                    </a:rPr>
+                                    <m:t>,</m:t>
+                                  </m:r>
+                                  <m:r>
+                                    <a:rPr lang="en-US" i="1">
+                                      <a:latin typeface="Cambria Math" panose="02040503050406030204" pitchFamily="18" charset="0"/>
+                                    </a:rPr>
+                                    <m:t>𝑧</m:t>
+                                  </m:r>
+                                </m:e>
+                              </m:d>
+                            </m:num>
+                            <m:den>
+                              <m:sSub>
+                                <m:sSubPr>
+                                  <m:ctrlPr>
+                                    <a:rPr lang="en-US" i="1">
+                                      <a:latin typeface="Cambria Math" panose="02040503050406030204" pitchFamily="18" charset="0"/>
+                                    </a:rPr>
+                                  </m:ctrlPr>
+                                </m:sSubPr>
+                                <m:e>
+                                  <m:r>
+                                    <a:rPr lang="en-US" i="1">
+                                      <a:latin typeface="Cambria Math" panose="02040503050406030204" pitchFamily="18" charset="0"/>
+                                    </a:rPr>
+                                    <m:t>𝑞</m:t>
+                                  </m:r>
+                                </m:e>
+                                <m:sub>
+                                  <m:r>
+                                    <a:rPr lang="en-US" i="1">
+                                      <a:latin typeface="Cambria Math" panose="02040503050406030204" pitchFamily="18" charset="0"/>
+                                      <a:ea typeface="Cambria Math" panose="02040503050406030204" pitchFamily="18" charset="0"/>
+                                    </a:rPr>
+                                    <m:t>𝜑</m:t>
+                                  </m:r>
+                                </m:sub>
+                              </m:sSub>
+                              <m:d>
+                                <m:dPr>
+                                  <m:ctrlPr>
+                                    <a:rPr lang="en-US" i="1">
+                                      <a:latin typeface="Cambria Math" panose="02040503050406030204" pitchFamily="18" charset="0"/>
+                                      <a:ea typeface="Cambria Math" panose="02040503050406030204" pitchFamily="18" charset="0"/>
+                                    </a:rPr>
+                                  </m:ctrlPr>
+                                </m:dPr>
+                                <m:e>
+                                  <m:r>
+                                    <a:rPr lang="en-US" i="1">
+                                      <a:latin typeface="Cambria Math" panose="02040503050406030204" pitchFamily="18" charset="0"/>
+                                    </a:rPr>
+                                    <m:t>𝑧</m:t>
+                                  </m:r>
+                                </m:e>
+                                <m:e>
+                                  <m:r>
+                                    <a:rPr lang="en-US" i="1">
+                                      <a:latin typeface="Cambria Math" panose="02040503050406030204" pitchFamily="18" charset="0"/>
+                                    </a:rPr>
+                                    <m:t>𝑥</m:t>
+                                  </m:r>
+                                </m:e>
+                              </m:d>
+                            </m:den>
+                          </m:f>
+                        </m:e>
+                      </m:d>
+                    </m:oMath>
+                  </m:oMathPara>
+                </a14:m>
+                <a:endParaRPr lang="en-US" dirty="0"/>
+              </a:p>
+              <a:p>
+                <a:r>
+                  <a:rPr lang="en-US" dirty="0"/>
+                  <a:t>Move the log inside the expectation and apply </a:t>
+                </a:r>
+                <a:r>
+                  <a:rPr lang="en-US" b="1" dirty="0">
+                    <a:hlinkClick r:id="rId2"/>
+                  </a:rPr>
+                  <a:t>Jensen’s inequality </a:t>
+                </a:r>
+                <a:r>
+                  <a:rPr lang="en-US" dirty="0"/>
+                  <a:t>to find the </a:t>
+                </a:r>
+                <a:r>
+                  <a:rPr lang="en-US" b="1" dirty="0"/>
+                  <a:t>ELBO, evidence lower bound </a:t>
+                </a:r>
+              </a:p>
+              <a:p>
+                <a:pPr marL="0" indent="0">
+                  <a:buNone/>
+                </a:pPr>
+                <a14:m>
+                  <m:oMathPara xmlns:m="http://schemas.openxmlformats.org/officeDocument/2006/math">
+                    <m:oMathParaPr>
+                      <m:jc m:val="centerGroup"/>
+                    </m:oMathParaPr>
+                    <m:oMath xmlns:m="http://schemas.openxmlformats.org/officeDocument/2006/math">
+                      <m:func>
+                        <m:funcPr>
+                          <m:ctrlPr>
+                            <a:rPr lang="en-US" i="1">
+                              <a:latin typeface="Cambria Math" panose="02040503050406030204" pitchFamily="18" charset="0"/>
+                            </a:rPr>
+                          </m:ctrlPr>
+                        </m:funcPr>
+                        <m:fName>
+                          <m:r>
+                            <m:rPr>
+                              <m:sty m:val="p"/>
+                            </m:rPr>
+                            <a:rPr lang="en-US">
+                              <a:latin typeface="Cambria Math" panose="02040503050406030204" pitchFamily="18" charset="0"/>
+                            </a:rPr>
+                            <m:t>log</m:t>
+                          </m:r>
+                        </m:fName>
+                        <m:e>
+                          <m:d>
+                            <m:dPr>
+                              <m:ctrlPr>
+                                <a:rPr lang="en-US" i="1">
+                                  <a:latin typeface="Cambria Math" panose="02040503050406030204" pitchFamily="18" charset="0"/>
+                                </a:rPr>
+                              </m:ctrlPr>
+                            </m:dPr>
+                            <m:e>
+                              <m:r>
+                                <a:rPr lang="en-US" i="1">
+                                  <a:latin typeface="Cambria Math" panose="02040503050406030204" pitchFamily="18" charset="0"/>
+                                </a:rPr>
+                                <m:t>𝑝</m:t>
+                              </m:r>
+                              <m:d>
+                                <m:dPr>
+                                  <m:ctrlPr>
+                                    <a:rPr lang="en-US" i="1">
+                                      <a:latin typeface="Cambria Math" panose="02040503050406030204" pitchFamily="18" charset="0"/>
+                                    </a:rPr>
+                                  </m:ctrlPr>
+                                </m:dPr>
+                                <m:e>
+                                  <m:r>
+                                    <a:rPr lang="en-US" i="1">
+                                      <a:latin typeface="Cambria Math" panose="02040503050406030204" pitchFamily="18" charset="0"/>
+                                    </a:rPr>
+                                    <m:t>𝑥</m:t>
+                                  </m:r>
+                                </m:e>
+                              </m:d>
+                            </m:e>
+                          </m:d>
+                        </m:e>
+                      </m:func>
+                      <m:r>
+                        <a:rPr lang="en-US" i="1">
+                          <a:latin typeface="Cambria Math" panose="02040503050406030204" pitchFamily="18" charset="0"/>
+                          <a:ea typeface="Cambria Math" panose="02040503050406030204" pitchFamily="18" charset="0"/>
+                        </a:rPr>
+                        <m:t>≥</m:t>
+                      </m:r>
+                      <m:sSub>
+                        <m:sSubPr>
+                          <m:ctrlPr>
+                            <a:rPr lang="en-US" i="1">
+                              <a:latin typeface="Cambria Math" panose="02040503050406030204" pitchFamily="18" charset="0"/>
+                            </a:rPr>
+                          </m:ctrlPr>
+                        </m:sSubPr>
+                        <m:e>
+                          <m:r>
+                            <a:rPr lang="en-US" i="1">
+                              <a:latin typeface="Cambria Math" panose="02040503050406030204" pitchFamily="18" charset="0"/>
+                            </a:rPr>
+                            <m:t>𝐸</m:t>
+                          </m:r>
+                        </m:e>
+                        <m:sub>
+                          <m:sSub>
+                            <m:sSubPr>
+                              <m:ctrlPr>
+                                <a:rPr lang="en-US" i="1">
+                                  <a:latin typeface="Cambria Math" panose="02040503050406030204" pitchFamily="18" charset="0"/>
+                                </a:rPr>
+                              </m:ctrlPr>
+                            </m:sSubPr>
+                            <m:e>
+                              <m:r>
+                                <a:rPr lang="en-US" i="1">
+                                  <a:latin typeface="Cambria Math" panose="02040503050406030204" pitchFamily="18" charset="0"/>
+                                </a:rPr>
+                                <m:t>𝑞</m:t>
+                              </m:r>
+                            </m:e>
+                            <m:sub>
+                              <m:r>
+                                <a:rPr lang="en-US" i="1">
+                                  <a:latin typeface="Cambria Math" panose="02040503050406030204" pitchFamily="18" charset="0"/>
+                                  <a:ea typeface="Cambria Math" panose="02040503050406030204" pitchFamily="18" charset="0"/>
+                                </a:rPr>
+                                <m:t>𝜑</m:t>
+                              </m:r>
+                            </m:sub>
+                          </m:sSub>
+                          <m:d>
+                            <m:dPr>
+                              <m:ctrlPr>
+                                <a:rPr lang="en-US" i="1">
+                                  <a:latin typeface="Cambria Math" panose="02040503050406030204" pitchFamily="18" charset="0"/>
+                                  <a:ea typeface="Cambria Math" panose="02040503050406030204" pitchFamily="18" charset="0"/>
+                                </a:rPr>
+                              </m:ctrlPr>
+                            </m:dPr>
+                            <m:e>
+                              <m:r>
+                                <a:rPr lang="en-US" i="1">
+                                  <a:latin typeface="Cambria Math" panose="02040503050406030204" pitchFamily="18" charset="0"/>
+                                </a:rPr>
+                                <m:t>𝑧</m:t>
+                              </m:r>
+                            </m:e>
+                            <m:e>
+                              <m:r>
+                                <a:rPr lang="en-US" i="1">
+                                  <a:latin typeface="Cambria Math" panose="02040503050406030204" pitchFamily="18" charset="0"/>
+                                </a:rPr>
+                                <m:t>𝑥</m:t>
+                              </m:r>
+                            </m:e>
+                          </m:d>
+                        </m:sub>
+                      </m:sSub>
+                      <m:r>
+                        <a:rPr lang="en-US" i="1">
+                          <a:latin typeface="Cambria Math" panose="02040503050406030204" pitchFamily="18" charset="0"/>
+                        </a:rPr>
+                        <m:t>𝑙𝑜𝑔</m:t>
+                      </m:r>
+                      <m:d>
+                        <m:dPr>
+                          <m:ctrlPr>
+                            <a:rPr lang="en-US" i="1">
+                              <a:latin typeface="Cambria Math" panose="02040503050406030204" pitchFamily="18" charset="0"/>
+                            </a:rPr>
+                          </m:ctrlPr>
+                        </m:dPr>
+                        <m:e>
+                          <m:f>
+                            <m:fPr>
+                              <m:ctrlPr>
+                                <a:rPr lang="en-US" i="1">
+                                  <a:latin typeface="Cambria Math" panose="02040503050406030204" pitchFamily="18" charset="0"/>
+                                </a:rPr>
+                              </m:ctrlPr>
+                            </m:fPr>
+                            <m:num>
+                              <m:r>
+                                <a:rPr lang="en-US" i="1">
+                                  <a:latin typeface="Cambria Math" panose="02040503050406030204" pitchFamily="18" charset="0"/>
+                                </a:rPr>
+                                <m:t>𝑝</m:t>
+                              </m:r>
+                              <m:d>
+                                <m:dPr>
+                                  <m:ctrlPr>
+                                    <a:rPr lang="en-US" i="1">
+                                      <a:latin typeface="Cambria Math" panose="02040503050406030204" pitchFamily="18" charset="0"/>
+                                    </a:rPr>
+                                  </m:ctrlPr>
+                                </m:dPr>
+                                <m:e>
+                                  <m:r>
+                                    <a:rPr lang="en-US" i="1">
+                                      <a:latin typeface="Cambria Math" panose="02040503050406030204" pitchFamily="18" charset="0"/>
+                                    </a:rPr>
+                                    <m:t>𝑥</m:t>
+                                  </m:r>
+                                  <m:r>
+                                    <a:rPr lang="en-US" i="1">
+                                      <a:latin typeface="Cambria Math" panose="02040503050406030204" pitchFamily="18" charset="0"/>
+                                    </a:rPr>
+                                    <m:t>,</m:t>
+                                  </m:r>
+                                  <m:r>
+                                    <a:rPr lang="en-US" i="1">
+                                      <a:latin typeface="Cambria Math" panose="02040503050406030204" pitchFamily="18" charset="0"/>
+                                    </a:rPr>
+                                    <m:t>𝑧</m:t>
+                                  </m:r>
+                                </m:e>
+                              </m:d>
+                            </m:num>
+                            <m:den>
+                              <m:sSub>
+                                <m:sSubPr>
+                                  <m:ctrlPr>
+                                    <a:rPr lang="en-US" i="1">
+                                      <a:latin typeface="Cambria Math" panose="02040503050406030204" pitchFamily="18" charset="0"/>
+                                    </a:rPr>
+                                  </m:ctrlPr>
+                                </m:sSubPr>
+                                <m:e>
+                                  <m:r>
+                                    <a:rPr lang="en-US" i="1">
+                                      <a:latin typeface="Cambria Math" panose="02040503050406030204" pitchFamily="18" charset="0"/>
+                                    </a:rPr>
+                                    <m:t>𝑞</m:t>
+                                  </m:r>
+                                </m:e>
+                                <m:sub>
+                                  <m:r>
+                                    <a:rPr lang="en-US" i="1">
+                                      <a:latin typeface="Cambria Math" panose="02040503050406030204" pitchFamily="18" charset="0"/>
+                                      <a:ea typeface="Cambria Math" panose="02040503050406030204" pitchFamily="18" charset="0"/>
+                                    </a:rPr>
+                                    <m:t>𝜑</m:t>
+                                  </m:r>
+                                </m:sub>
+                              </m:sSub>
+                              <m:d>
+                                <m:dPr>
+                                  <m:ctrlPr>
+                                    <a:rPr lang="en-US" i="1">
+                                      <a:latin typeface="Cambria Math" panose="02040503050406030204" pitchFamily="18" charset="0"/>
+                                      <a:ea typeface="Cambria Math" panose="02040503050406030204" pitchFamily="18" charset="0"/>
+                                    </a:rPr>
+                                  </m:ctrlPr>
+                                </m:dPr>
+                                <m:e>
+                                  <m:r>
+                                    <a:rPr lang="en-US" i="1">
+                                      <a:latin typeface="Cambria Math" panose="02040503050406030204" pitchFamily="18" charset="0"/>
+                                    </a:rPr>
+                                    <m:t>𝑧</m:t>
+                                  </m:r>
+                                </m:e>
+                                <m:e>
+                                  <m:r>
+                                    <a:rPr lang="en-US" i="1">
+                                      <a:latin typeface="Cambria Math" panose="02040503050406030204" pitchFamily="18" charset="0"/>
+                                    </a:rPr>
+                                    <m:t>𝑥</m:t>
+                                  </m:r>
+                                </m:e>
+                              </m:d>
+                            </m:den>
+                          </m:f>
+                        </m:e>
+                      </m:d>
+                      <m:r>
+                        <a:rPr lang="en-US" i="1">
+                          <a:latin typeface="Cambria Math" panose="02040503050406030204" pitchFamily="18" charset="0"/>
+                          <a:ea typeface="Cambria Math" panose="02040503050406030204" pitchFamily="18" charset="0"/>
+                        </a:rPr>
+                        <m:t>≔</m:t>
+                      </m:r>
+                      <m:sSub>
+                        <m:sSubPr>
+                          <m:ctrlPr>
+                            <a:rPr lang="en-US" i="1">
+                              <a:latin typeface="Cambria Math" panose="02040503050406030204" pitchFamily="18" charset="0"/>
+                            </a:rPr>
+                          </m:ctrlPr>
+                        </m:sSubPr>
+                        <m:e>
+                          <m:r>
+                            <a:rPr lang="en-US" i="1">
+                              <a:latin typeface="Cambria Math" panose="02040503050406030204" pitchFamily="18" charset="0"/>
+                            </a:rPr>
+                            <m:t>𝐿</m:t>
+                          </m:r>
+                        </m:e>
+                        <m:sub>
+                          <m:r>
+                            <a:rPr lang="en-US" i="1">
+                              <a:latin typeface="Cambria Math" panose="02040503050406030204" pitchFamily="18" charset="0"/>
+                            </a:rPr>
+                            <m:t>𝐸𝐿𝐵𝑂</m:t>
+                          </m:r>
+                        </m:sub>
+                      </m:sSub>
+                    </m:oMath>
+                  </m:oMathPara>
+                </a14:m>
+                <a:endParaRPr lang="en-US" dirty="0"/>
+              </a:p>
+              <a:p>
+                <a:r>
+                  <a:rPr lang="en-US" dirty="0"/>
+                  <a:t>The key relationship for </a:t>
+                </a:r>
+                <a:r>
+                  <a:rPr lang="en-US" b="1" dirty="0"/>
+                  <a:t>variational Bayes </a:t>
+                </a:r>
+                <a:r>
+                  <a:rPr lang="en-US" dirty="0"/>
+                  <a:t>models!</a:t>
+                </a:r>
+              </a:p>
+            </p:txBody>
+          </p:sp>
+        </mc:Choice>
+        <mc:Fallback xmlns="">
+          <p:sp>
+            <p:nvSpPr>
+              <p:cNvPr id="3" name="Content Placeholder 2">
+                <a:extLst>
+                  <a:ext uri="{FF2B5EF4-FFF2-40B4-BE49-F238E27FC236}">
+                    <a16:creationId xmlns:a16="http://schemas.microsoft.com/office/drawing/2014/main" id="{9B8CC8AD-8941-AB7E-4FAA-D120FD276B1C}"/>
+                  </a:ext>
+                </a:extLst>
+              </p:cNvPr>
+              <p:cNvSpPr>
+                <a:spLocks noGrp="1" noRot="1" noChangeAspect="1" noMove="1" noResize="1" noEditPoints="1" noAdjustHandles="1" noChangeArrowheads="1" noChangeShapeType="1" noTextEdit="1"/>
+              </p:cNvSpPr>
+              <p:nvPr>
+                <p:ph idx="1"/>
+              </p:nvPr>
+            </p:nvSpPr>
+            <p:spPr>
+              <a:xfrm>
+                <a:off x="457200" y="1200151"/>
+                <a:ext cx="8229600" cy="3737370"/>
+              </a:xfrm>
+              <a:blipFill>
+                <a:blip r:embed="rId3"/>
+                <a:stretch>
+                  <a:fillRect l="-1111" t="-2284"/>
+                </a:stretch>
+              </a:blipFill>
+            </p:spPr>
+            <p:txBody>
+              <a:bodyPr/>
+              <a:lstStyle/>
+              <a:p>
+                <a:r>
+                  <a:rPr lang="en-US">
+                    <a:noFill/>
+                  </a:rPr>
+                  <a:t> </a:t>
+                </a:r>
+              </a:p>
+            </p:txBody>
+          </p:sp>
+        </mc:Fallback>
+      </mc:AlternateContent>
+    </p:spTree>
+    <p:extLst>
+      <p:ext uri="{BB962C8B-B14F-4D97-AF65-F5344CB8AC3E}">
+        <p14:creationId xmlns:p14="http://schemas.microsoft.com/office/powerpoint/2010/main" val="274490908"/>
+      </p:ext>
+    </p:extLst>
+  </p:cSld>
+  <p:clrMapOvr>
+    <a:masterClrMapping/>
+  </p:clrMapOvr>
+  <p:timing>
+    <p:tnLst>
+      <p:par>
+        <p:cTn id="1" dur="indefinite" restart="never" nodeType="tmRoot">
+          <p:childTnLst>
+            <p:seq concurrent="1" nextAc="seek">
+              <p:cTn id="2" dur="indefinite" nodeType="mainSeq">
+                <p:childTnLst>
+                  <p:par>
+                    <p:cTn id="3" fill="hold">
+                      <p:stCondLst>
+                        <p:cond delay="indefinite"/>
+                      </p:stCondLst>
+                      <p:childTnLst>
+                        <p:par>
+                          <p:cTn id="4" fill="hold">
+                            <p:stCondLst>
+                              <p:cond delay="0"/>
+                            </p:stCondLst>
+                            <p:childTnLst>
+                              <p:par>
+                                <p:cTn id="5" presetID="1" presetClass="entr" presetSubtype="0" fill="hold" nodeType="clickEffect">
+                                  <p:stCondLst>
+                                    <p:cond delay="0"/>
+                                  </p:stCondLst>
+                                  <p:childTnLst>
+                                    <p:set>
+                                      <p:cBhvr>
+                                        <p:cTn id="6" dur="1" fill="hold">
+                                          <p:stCondLst>
+                                            <p:cond delay="0"/>
+                                          </p:stCondLst>
+                                        </p:cTn>
+                                        <p:tgtEl>
+                                          <p:spTgt spid="3">
+                                            <p:txEl>
+                                              <p:pRg st="2" end="2"/>
+                                            </p:txEl>
+                                          </p:spTgt>
+                                        </p:tgtEl>
+                                        <p:attrNameLst>
+                                          <p:attrName>style.visibility</p:attrName>
+                                        </p:attrNameLst>
+                                      </p:cBhvr>
+                                      <p:to>
+                                        <p:strVal val="visible"/>
+                                      </p:to>
+                                    </p:set>
+                                  </p:childTnLst>
+                                </p:cTn>
+                              </p:par>
+                              <p:par>
+                                <p:cTn id="7" presetID="1" presetClass="entr" presetSubtype="0" fill="hold" nodeType="withEffect">
+                                  <p:stCondLst>
+                                    <p:cond delay="0"/>
+                                  </p:stCondLst>
+                                  <p:childTnLst>
+                                    <p:set>
+                                      <p:cBhvr>
+                                        <p:cTn id="8" dur="1" fill="hold">
+                                          <p:stCondLst>
+                                            <p:cond delay="0"/>
+                                          </p:stCondLst>
+                                        </p:cTn>
+                                        <p:tgtEl>
+                                          <p:spTgt spid="3">
+                                            <p:txEl>
+                                              <p:pRg st="3" end="3"/>
+                                            </p:txEl>
+                                          </p:spTgt>
+                                        </p:tgtEl>
+                                        <p:attrNameLst>
+                                          <p:attrName>style.visibility</p:attrName>
+                                        </p:attrNameLst>
+                                      </p:cBhvr>
+                                      <p:to>
+                                        <p:strVal val="visible"/>
+                                      </p:to>
+                                    </p:set>
+                                  </p:childTnLst>
+                                </p:cTn>
+                              </p:par>
+                            </p:childTnLst>
+                          </p:cTn>
+                        </p:par>
+                      </p:childTnLst>
+                    </p:cTn>
+                  </p:par>
+                  <p:par>
+                    <p:cTn id="9" fill="hold">
+                      <p:stCondLst>
+                        <p:cond delay="indefinite"/>
+                      </p:stCondLst>
+                      <p:childTnLst>
+                        <p:par>
+                          <p:cTn id="10" fill="hold">
+                            <p:stCondLst>
+                              <p:cond delay="0"/>
+                            </p:stCondLst>
+                            <p:childTnLst>
+                              <p:par>
+                                <p:cTn id="11" presetID="1" presetClass="entr" presetSubtype="0" fill="hold" nodeType="clickEffect">
+                                  <p:stCondLst>
+                                    <p:cond delay="0"/>
+                                  </p:stCondLst>
+                                  <p:childTnLst>
+                                    <p:set>
+                                      <p:cBhvr>
+                                        <p:cTn id="12" dur="1" fill="hold">
+                                          <p:stCondLst>
+                                            <p:cond delay="0"/>
+                                          </p:stCondLst>
+                                        </p:cTn>
+                                        <p:tgtEl>
+                                          <p:spTgt spid="3">
+                                            <p:txEl>
+                                              <p:pRg st="4" end="4"/>
+                                            </p:txEl>
+                                          </p:spTgt>
+                                        </p:tgtEl>
+                                        <p:attrNameLst>
+                                          <p:attrName>style.visibility</p:attrName>
+                                        </p:attrNameLst>
+                                      </p:cBhvr>
+                                      <p:to>
+                                        <p:strVal val="visible"/>
+                                      </p:to>
+                                    </p:set>
+                                  </p:childTnLst>
+                                </p:cTn>
+                              </p:par>
+                            </p:childTnLst>
+                          </p:cTn>
+                        </p:par>
+                      </p:childTnLst>
+                    </p:cTn>
+                  </p:par>
+                </p:childTnLst>
+              </p:cTn>
+              <p:prevCondLst>
+                <p:cond evt="onPrev" delay="0">
+                  <p:tgtEl>
+                    <p:sldTgt/>
+                  </p:tgtEl>
+                </p:cond>
+              </p:prevCondLst>
+              <p:nextCondLst>
+                <p:cond evt="onNext" delay="0">
+                  <p:tgtEl>
+                    <p:sldTgt/>
+                  </p:tgtEl>
+                </p:cond>
+              </p:nextCondLst>
+            </p:seq>
+          </p:childTnLst>
+        </p:cTn>
+      </p:par>
+    </p:tnLst>
+  </p:timing>
+</p:sld>
+</file>
+
+<file path=ppt/slides/slide54.xml><?xml version="1.0" encoding="utf-8"?>
+<p:sld xmlns:a="http://schemas.openxmlformats.org/drawingml/2006/main" xmlns:r="http://schemas.openxmlformats.org/officeDocument/2006/relationships" xmlns:p="http://schemas.openxmlformats.org/presentationml/2006/main">
+  <p:cSld>
+    <p:spTree>
+      <p:nvGrpSpPr>
+        <p:cNvPr id="1" name="">
+          <a:extLst>
+            <a:ext uri="{FF2B5EF4-FFF2-40B4-BE49-F238E27FC236}">
+              <a16:creationId xmlns:a16="http://schemas.microsoft.com/office/drawing/2014/main" id="{BF40C48C-FE8D-5E59-FF25-E957C7783C88}"/>
+            </a:ext>
+          </a:extLst>
+        </p:cNvPr>
+        <p:cNvGrpSpPr/>
+        <p:nvPr/>
+      </p:nvGrpSpPr>
+      <p:grpSpPr>
+        <a:xfrm>
+          <a:off x="0" y="0"/>
+          <a:ext cx="0" cy="0"/>
+          <a:chOff x="0" y="0"/>
+          <a:chExt cx="0" cy="0"/>
+        </a:xfrm>
+      </p:grpSpPr>
+      <p:sp>
+        <p:nvSpPr>
+          <p:cNvPr id="3" name="Text Placeholder 2">
+            <a:extLst>
+              <a:ext uri="{FF2B5EF4-FFF2-40B4-BE49-F238E27FC236}">
+                <a16:creationId xmlns:a16="http://schemas.microsoft.com/office/drawing/2014/main" id="{9F09CE30-4A82-F1F9-7C5F-ADED37513E39}"/>
+              </a:ext>
+            </a:extLst>
+          </p:cNvPr>
+          <p:cNvSpPr>
+            <a:spLocks noGrp="1"/>
+          </p:cNvSpPr>
+          <p:nvPr>
+            <p:ph type="body" idx="1"/>
+          </p:nvPr>
+        </p:nvSpPr>
+        <p:spPr>
+          <a:xfrm>
+            <a:off x="722313" y="2180035"/>
+            <a:ext cx="7772400" cy="703243"/>
+          </a:xfrm>
+        </p:spPr>
+        <p:txBody>
+          <a:bodyPr>
+            <a:normAutofit/>
+          </a:bodyPr>
+          <a:lstStyle/>
+          <a:p>
+            <a:pPr algn="ctr"/>
+            <a:r>
+              <a:rPr lang="en-US" sz="3600" dirty="0"/>
+              <a:t>Summary</a:t>
+            </a:r>
+          </a:p>
+        </p:txBody>
+      </p:sp>
+    </p:spTree>
+    <p:extLst>
+      <p:ext uri="{BB962C8B-B14F-4D97-AF65-F5344CB8AC3E}">
+        <p14:creationId xmlns:p14="http://schemas.microsoft.com/office/powerpoint/2010/main" val="2331190628"/>
+      </p:ext>
+    </p:extLst>
+  </p:cSld>
+  <p:clrMapOvr>
+    <a:masterClrMapping/>
+  </p:clrMapOvr>
+</p:sld>
+</file>
+
+<file path=ppt/slides/slide55.xml><?xml version="1.0" encoding="utf-8"?>
+<p:sld xmlns:a="http://schemas.openxmlformats.org/drawingml/2006/main" xmlns:r="http://schemas.openxmlformats.org/officeDocument/2006/relationships" xmlns:p="http://schemas.openxmlformats.org/presentationml/2006/main">
+  <p:cSld>
+    <p:spTree>
+      <p:nvGrpSpPr>
         <p:cNvPr id="1" name=""/>
         <p:cNvGrpSpPr/>
         <p:nvPr/>
@@ -34027,6 +38236,47 @@
                             <a:latin typeface="Cambria Math" panose="02040503050406030204" pitchFamily="18" charset="0"/>
                           </a:rPr>
                           <m:t>∩</m:t>
+                        </m:r>
+                        <m:r>
+                          <a:rPr lang="ar-AE">
+                            <a:latin typeface="Cambria Math" panose="02040503050406030204" pitchFamily="18" charset="0"/>
+                          </a:rPr>
+                          <m:t>𝐵</m:t>
+                        </m:r>
+                      </m:e>
+                    </m:d>
+                    <m:r>
+                      <a:rPr lang="ar-AE">
+                        <a:latin typeface="Cambria Math" panose="02040503050406030204" pitchFamily="18" charset="0"/>
+                      </a:rPr>
+                      <m:t>=</m:t>
+                    </m:r>
+                    <m:r>
+                      <a:rPr lang="en-US">
+                        <a:latin typeface="Cambria Math" panose="02040503050406030204" pitchFamily="18" charset="0"/>
+                      </a:rPr>
+                      <m:t>𝑃</m:t>
+                    </m:r>
+                    <m:d>
+                      <m:dPr>
+                        <m:ctrlPr>
+                          <a:rPr lang="ar-AE" i="1">
+                            <a:latin typeface="Cambria Math" panose="02040503050406030204" pitchFamily="18" charset="0"/>
+                          </a:rPr>
+                        </m:ctrlPr>
+                      </m:dPr>
+                      <m:e>
+                        <m:r>
+                          <a:rPr lang="ar-AE">
+                            <a:latin typeface="Cambria Math" panose="02040503050406030204" pitchFamily="18" charset="0"/>
+                          </a:rPr>
+                          <m:t>𝐴</m:t>
+                        </m:r>
+                        <m:r>
+                          <a:rPr lang="en-US" b="0" i="0" smtClean="0">
+                            <a:latin typeface="Cambria Math" panose="02040503050406030204" pitchFamily="18" charset="0"/>
+                          </a:rPr>
+                          <m:t>,</m:t>
                         </m:r>
                         <m:r>
                           <a:rPr lang="ar-AE">
@@ -34862,391 +39112,10 @@
   <p:clrMapOvr>
     <a:masterClrMapping/>
   </p:clrMapOvr>
-  <p:timing>
-    <p:tnLst>
-      <p:par>
-        <p:cTn id="1" dur="indefinite" restart="never" nodeType="tmRoot">
-          <p:childTnLst>
-            <p:seq concurrent="1" nextAc="seek">
-              <p:cTn id="2" dur="indefinite" nodeType="mainSeq">
-                <p:childTnLst>
-                  <p:par>
-                    <p:cTn id="3" fill="hold">
-                      <p:stCondLst>
-                        <p:cond delay="indefinite"/>
-                      </p:stCondLst>
-                      <p:childTnLst>
-                        <p:par>
-                          <p:cTn id="4" fill="hold">
-                            <p:stCondLst>
-                              <p:cond delay="0"/>
-                            </p:stCondLst>
-                            <p:childTnLst>
-                              <p:par>
-                                <p:cTn id="5" presetID="1" presetClass="entr" presetSubtype="0" fill="hold" nodeType="clickEffect">
-                                  <p:stCondLst>
-                                    <p:cond delay="0"/>
-                                  </p:stCondLst>
-                                  <p:childTnLst>
-                                    <p:set>
-                                      <p:cBhvr>
-                                        <p:cTn id="6" dur="1" fill="hold">
-                                          <p:stCondLst>
-                                            <p:cond delay="0"/>
-                                          </p:stCondLst>
-                                        </p:cTn>
-                                        <p:tgtEl>
-                                          <p:spTgt spid="3">
-                                            <p:txEl>
-                                              <p:pRg st="1" end="1"/>
-                                            </p:txEl>
-                                          </p:spTgt>
-                                        </p:tgtEl>
-                                        <p:attrNameLst>
-                                          <p:attrName>style.visibility</p:attrName>
-                                        </p:attrNameLst>
-                                      </p:cBhvr>
-                                      <p:to>
-                                        <p:strVal val="visible"/>
-                                      </p:to>
-                                    </p:set>
-                                  </p:childTnLst>
-                                </p:cTn>
-                              </p:par>
-                              <p:par>
-                                <p:cTn id="7" presetID="1" presetClass="entr" presetSubtype="0" fill="hold" nodeType="withEffect">
-                                  <p:stCondLst>
-                                    <p:cond delay="0"/>
-                                  </p:stCondLst>
-                                  <p:childTnLst>
-                                    <p:set>
-                                      <p:cBhvr>
-                                        <p:cTn id="8" dur="1" fill="hold">
-                                          <p:stCondLst>
-                                            <p:cond delay="0"/>
-                                          </p:stCondLst>
-                                        </p:cTn>
-                                        <p:tgtEl>
-                                          <p:spTgt spid="3">
-                                            <p:txEl>
-                                              <p:pRg st="2" end="2"/>
-                                            </p:txEl>
-                                          </p:spTgt>
-                                        </p:tgtEl>
-                                        <p:attrNameLst>
-                                          <p:attrName>style.visibility</p:attrName>
-                                        </p:attrNameLst>
-                                      </p:cBhvr>
-                                      <p:to>
-                                        <p:strVal val="visible"/>
-                                      </p:to>
-                                    </p:set>
-                                  </p:childTnLst>
-                                </p:cTn>
-                              </p:par>
-                              <p:par>
-                                <p:cTn id="9" presetID="1" presetClass="entr" presetSubtype="0" fill="hold" nodeType="withEffect">
-                                  <p:stCondLst>
-                                    <p:cond delay="0"/>
-                                  </p:stCondLst>
-                                  <p:childTnLst>
-                                    <p:set>
-                                      <p:cBhvr>
-                                        <p:cTn id="10" dur="1" fill="hold">
-                                          <p:stCondLst>
-                                            <p:cond delay="0"/>
-                                          </p:stCondLst>
-                                        </p:cTn>
-                                        <p:tgtEl>
-                                          <p:spTgt spid="3">
-                                            <p:txEl>
-                                              <p:pRg st="3" end="3"/>
-                                            </p:txEl>
-                                          </p:spTgt>
-                                        </p:tgtEl>
-                                        <p:attrNameLst>
-                                          <p:attrName>style.visibility</p:attrName>
-                                        </p:attrNameLst>
-                                      </p:cBhvr>
-                                      <p:to>
-                                        <p:strVal val="visible"/>
-                                      </p:to>
-                                    </p:set>
-                                  </p:childTnLst>
-                                </p:cTn>
-                              </p:par>
-                            </p:childTnLst>
-                          </p:cTn>
-                        </p:par>
-                      </p:childTnLst>
-                    </p:cTn>
-                  </p:par>
-                  <p:par>
-                    <p:cTn id="11" fill="hold">
-                      <p:stCondLst>
-                        <p:cond delay="indefinite"/>
-                      </p:stCondLst>
-                      <p:childTnLst>
-                        <p:par>
-                          <p:cTn id="12" fill="hold">
-                            <p:stCondLst>
-                              <p:cond delay="0"/>
-                            </p:stCondLst>
-                            <p:childTnLst>
-                              <p:par>
-                                <p:cTn id="13" presetID="1" presetClass="entr" presetSubtype="0" fill="hold" nodeType="clickEffect">
-                                  <p:stCondLst>
-                                    <p:cond delay="0"/>
-                                  </p:stCondLst>
-                                  <p:childTnLst>
-                                    <p:set>
-                                      <p:cBhvr>
-                                        <p:cTn id="14" dur="1" fill="hold">
-                                          <p:stCondLst>
-                                            <p:cond delay="0"/>
-                                          </p:stCondLst>
-                                        </p:cTn>
-                                        <p:tgtEl>
-                                          <p:spTgt spid="3">
-                                            <p:txEl>
-                                              <p:pRg st="4" end="4"/>
-                                            </p:txEl>
-                                          </p:spTgt>
-                                        </p:tgtEl>
-                                        <p:attrNameLst>
-                                          <p:attrName>style.visibility</p:attrName>
-                                        </p:attrNameLst>
-                                      </p:cBhvr>
-                                      <p:to>
-                                        <p:strVal val="visible"/>
-                                      </p:to>
-                                    </p:set>
-                                  </p:childTnLst>
-                                </p:cTn>
-                              </p:par>
-                              <p:par>
-                                <p:cTn id="15" presetID="1" presetClass="entr" presetSubtype="0" fill="hold" nodeType="withEffect">
-                                  <p:stCondLst>
-                                    <p:cond delay="0"/>
-                                  </p:stCondLst>
-                                  <p:childTnLst>
-                                    <p:set>
-                                      <p:cBhvr>
-                                        <p:cTn id="16" dur="1" fill="hold">
-                                          <p:stCondLst>
-                                            <p:cond delay="0"/>
-                                          </p:stCondLst>
-                                        </p:cTn>
-                                        <p:tgtEl>
-                                          <p:spTgt spid="3">
-                                            <p:txEl>
-                                              <p:pRg st="5" end="5"/>
-                                            </p:txEl>
-                                          </p:spTgt>
-                                        </p:tgtEl>
-                                        <p:attrNameLst>
-                                          <p:attrName>style.visibility</p:attrName>
-                                        </p:attrNameLst>
-                                      </p:cBhvr>
-                                      <p:to>
-                                        <p:strVal val="visible"/>
-                                      </p:to>
-                                    </p:set>
-                                  </p:childTnLst>
-                                </p:cTn>
-                              </p:par>
-                            </p:childTnLst>
-                          </p:cTn>
-                        </p:par>
-                      </p:childTnLst>
-                    </p:cTn>
-                  </p:par>
-                  <p:par>
-                    <p:cTn id="17" fill="hold">
-                      <p:stCondLst>
-                        <p:cond delay="indefinite"/>
-                      </p:stCondLst>
-                      <p:childTnLst>
-                        <p:par>
-                          <p:cTn id="18" fill="hold">
-                            <p:stCondLst>
-                              <p:cond delay="0"/>
-                            </p:stCondLst>
-                            <p:childTnLst>
-                              <p:par>
-                                <p:cTn id="19" presetID="1" presetClass="entr" presetSubtype="0" fill="hold" nodeType="clickEffect">
-                                  <p:stCondLst>
-                                    <p:cond delay="0"/>
-                                  </p:stCondLst>
-                                  <p:childTnLst>
-                                    <p:set>
-                                      <p:cBhvr>
-                                        <p:cTn id="20" dur="1" fill="hold">
-                                          <p:stCondLst>
-                                            <p:cond delay="0"/>
-                                          </p:stCondLst>
-                                        </p:cTn>
-                                        <p:tgtEl>
-                                          <p:spTgt spid="3">
-                                            <p:txEl>
-                                              <p:pRg st="6" end="6"/>
-                                            </p:txEl>
-                                          </p:spTgt>
-                                        </p:tgtEl>
-                                        <p:attrNameLst>
-                                          <p:attrName>style.visibility</p:attrName>
-                                        </p:attrNameLst>
-                                      </p:cBhvr>
-                                      <p:to>
-                                        <p:strVal val="visible"/>
-                                      </p:to>
-                                    </p:set>
-                                  </p:childTnLst>
-                                </p:cTn>
-                              </p:par>
-                              <p:par>
-                                <p:cTn id="21" presetID="1" presetClass="entr" presetSubtype="0" fill="hold" nodeType="withEffect">
-                                  <p:stCondLst>
-                                    <p:cond delay="0"/>
-                                  </p:stCondLst>
-                                  <p:childTnLst>
-                                    <p:set>
-                                      <p:cBhvr>
-                                        <p:cTn id="22" dur="1" fill="hold">
-                                          <p:stCondLst>
-                                            <p:cond delay="0"/>
-                                          </p:stCondLst>
-                                        </p:cTn>
-                                        <p:tgtEl>
-                                          <p:spTgt spid="3">
-                                            <p:txEl>
-                                              <p:pRg st="7" end="7"/>
-                                            </p:txEl>
-                                          </p:spTgt>
-                                        </p:tgtEl>
-                                        <p:attrNameLst>
-                                          <p:attrName>style.visibility</p:attrName>
-                                        </p:attrNameLst>
-                                      </p:cBhvr>
-                                      <p:to>
-                                        <p:strVal val="visible"/>
-                                      </p:to>
-                                    </p:set>
-                                  </p:childTnLst>
-                                </p:cTn>
-                              </p:par>
-                            </p:childTnLst>
-                          </p:cTn>
-                        </p:par>
-                      </p:childTnLst>
-                    </p:cTn>
-                  </p:par>
-                  <p:par>
-                    <p:cTn id="23" fill="hold">
-                      <p:stCondLst>
-                        <p:cond delay="indefinite"/>
-                      </p:stCondLst>
-                      <p:childTnLst>
-                        <p:par>
-                          <p:cTn id="24" fill="hold">
-                            <p:stCondLst>
-                              <p:cond delay="0"/>
-                            </p:stCondLst>
-                            <p:childTnLst>
-                              <p:par>
-                                <p:cTn id="25" presetID="1" presetClass="entr" presetSubtype="0" fill="hold" nodeType="clickEffect">
-                                  <p:stCondLst>
-                                    <p:cond delay="0"/>
-                                  </p:stCondLst>
-                                  <p:childTnLst>
-                                    <p:set>
-                                      <p:cBhvr>
-                                        <p:cTn id="26" dur="1" fill="hold">
-                                          <p:stCondLst>
-                                            <p:cond delay="0"/>
-                                          </p:stCondLst>
-                                        </p:cTn>
-                                        <p:tgtEl>
-                                          <p:spTgt spid="3">
-                                            <p:txEl>
-                                              <p:pRg st="8" end="8"/>
-                                            </p:txEl>
-                                          </p:spTgt>
-                                        </p:tgtEl>
-                                        <p:attrNameLst>
-                                          <p:attrName>style.visibility</p:attrName>
-                                        </p:attrNameLst>
-                                      </p:cBhvr>
-                                      <p:to>
-                                        <p:strVal val="visible"/>
-                                      </p:to>
-                                    </p:set>
-                                  </p:childTnLst>
-                                </p:cTn>
-                              </p:par>
-                              <p:par>
-                                <p:cTn id="27" presetID="1" presetClass="entr" presetSubtype="0" fill="hold" nodeType="withEffect">
-                                  <p:stCondLst>
-                                    <p:cond delay="0"/>
-                                  </p:stCondLst>
-                                  <p:childTnLst>
-                                    <p:set>
-                                      <p:cBhvr>
-                                        <p:cTn id="28" dur="1" fill="hold">
-                                          <p:stCondLst>
-                                            <p:cond delay="0"/>
-                                          </p:stCondLst>
-                                        </p:cTn>
-                                        <p:tgtEl>
-                                          <p:spTgt spid="3">
-                                            <p:txEl>
-                                              <p:pRg st="9" end="9"/>
-                                            </p:txEl>
-                                          </p:spTgt>
-                                        </p:tgtEl>
-                                        <p:attrNameLst>
-                                          <p:attrName>style.visibility</p:attrName>
-                                        </p:attrNameLst>
-                                      </p:cBhvr>
-                                      <p:to>
-                                        <p:strVal val="visible"/>
-                                      </p:to>
-                                    </p:set>
-                                  </p:childTnLst>
-                                </p:cTn>
-                              </p:par>
-                            </p:childTnLst>
-                          </p:cTn>
-                        </p:par>
-                      </p:childTnLst>
-                    </p:cTn>
-                  </p:par>
-                </p:childTnLst>
-              </p:cTn>
-              <p:prevCondLst>
-                <p:cond evt="onPrev" delay="0">
-                  <p:tgtEl>
-                    <p:sldTgt/>
-                  </p:tgtEl>
-                </p:cond>
-              </p:prevCondLst>
-              <p:nextCondLst>
-                <p:cond evt="onNext" delay="0">
-                  <p:tgtEl>
-                    <p:sldTgt/>
-                  </p:tgtEl>
-                </p:cond>
-              </p:nextCondLst>
-            </p:seq>
-          </p:childTnLst>
-        </p:cTn>
-      </p:par>
-    </p:tnLst>
-  </p:timing>
 </p:sld>
 </file>
 
-<file path=ppt/slides/slide52.xml><?xml version="1.0" encoding="utf-8"?>
+<file path=ppt/slides/slide56.xml><?xml version="1.0" encoding="utf-8"?>
 <p:sld xmlns:a="http://schemas.openxmlformats.org/drawingml/2006/main" xmlns:r="http://schemas.openxmlformats.org/officeDocument/2006/relationships" xmlns:p="http://schemas.openxmlformats.org/presentationml/2006/main">
   <p:cSld>
     <p:spTree>
